--- a/presentation.pptx
+++ b/presentation.pptx
@@ -120,6 +120,11 @@
       </a:defRPr>
     </a:lvl9pPr>
   </p:defaultTextStyle>
+  <p:extLst>
+    <p:ext uri="{EFAFB233-063F-42B5-8137-9DF3F51BA10A}">
+      <p15:sldGuideLst xmlns:p15="http://schemas.microsoft.com/office/powerpoint/2012/main"/>
+    </p:ext>
+  </p:extLst>
 </p:presentation>
 </file>
 
@@ -4641,31 +4646,534 @@
           </a:p>
         </p:txBody>
       </p:sp>
-      <p:sp>
-        <p:nvSpPr>
-          <p:cNvPr id="3" name="Segnaposto contenuto 2">
-            <a:extLst>
-              <a:ext uri="{FF2B5EF4-FFF2-40B4-BE49-F238E27FC236}">
-                <a16:creationId xmlns:a16="http://schemas.microsoft.com/office/drawing/2014/main" id="{E20673C2-4259-E940-BA76-F3278CE345AE}"/>
-              </a:ext>
-            </a:extLst>
-          </p:cNvPr>
-          <p:cNvSpPr>
-            <a:spLocks noGrp="1"/>
-          </p:cNvSpPr>
+      <p:graphicFrame>
+        <p:nvGraphicFramePr>
+          <p:cNvPr id="4" name="Segnaposto contenuto 3">
+            <a:extLst>
+              <a:ext uri="{FF2B5EF4-FFF2-40B4-BE49-F238E27FC236}">
+                <a16:creationId xmlns:a16="http://schemas.microsoft.com/office/drawing/2014/main" id="{5CEC9810-FEF0-2E57-2FFB-F3F2AD59AA04}"/>
+              </a:ext>
+            </a:extLst>
+          </p:cNvPr>
+          <p:cNvGraphicFramePr>
+            <a:graphicFrameLocks noGrp="1"/>
+          </p:cNvGraphicFramePr>
           <p:nvPr>
             <p:ph idx="1"/>
-          </p:nvPr>
-        </p:nvSpPr>
-        <p:spPr/>
-        <p:txBody>
-          <a:bodyPr/>
-          <a:lstStyle/>
-          <a:p>
-            <a:endParaRPr lang="it-IT"/>
-          </a:p>
-        </p:txBody>
-      </p:sp>
+            <p:extLst>
+              <p:ext uri="{D42A27DB-BD31-4B8C-83A1-F6EECF244321}">
+                <p14:modId xmlns:p14="http://schemas.microsoft.com/office/powerpoint/2010/main" val="639082304"/>
+              </p:ext>
+            </p:extLst>
+          </p:nvPr>
+        </p:nvGraphicFramePr>
+        <p:xfrm>
+          <a:off x="639763" y="2633663"/>
+          <a:ext cx="10891832" cy="1854200"/>
+        </p:xfrm>
+        <a:graphic>
+          <a:graphicData uri="http://schemas.openxmlformats.org/drawingml/2006/table">
+            <a:tbl>
+              <a:tblPr firstRow="1" bandRow="1">
+                <a:tableStyleId>{00A15C55-8517-42AA-B614-E9B94910E393}</a:tableStyleId>
+              </a:tblPr>
+              <a:tblGrid>
+                <a:gridCol w="1361479">
+                  <a:extLst>
+                    <a:ext uri="{9D8B030D-6E8A-4147-A177-3AD203B41FA5}">
+                      <a16:colId xmlns:a16="http://schemas.microsoft.com/office/drawing/2014/main" val="3826079438"/>
+                    </a:ext>
+                  </a:extLst>
+                </a:gridCol>
+                <a:gridCol w="1361479">
+                  <a:extLst>
+                    <a:ext uri="{9D8B030D-6E8A-4147-A177-3AD203B41FA5}">
+                      <a16:colId xmlns:a16="http://schemas.microsoft.com/office/drawing/2014/main" val="3607718456"/>
+                    </a:ext>
+                  </a:extLst>
+                </a:gridCol>
+                <a:gridCol w="1361479">
+                  <a:extLst>
+                    <a:ext uri="{9D8B030D-6E8A-4147-A177-3AD203B41FA5}">
+                      <a16:colId xmlns:a16="http://schemas.microsoft.com/office/drawing/2014/main" val="2879001292"/>
+                    </a:ext>
+                  </a:extLst>
+                </a:gridCol>
+                <a:gridCol w="1361479">
+                  <a:extLst>
+                    <a:ext uri="{9D8B030D-6E8A-4147-A177-3AD203B41FA5}">
+                      <a16:colId xmlns:a16="http://schemas.microsoft.com/office/drawing/2014/main" val="1366314030"/>
+                    </a:ext>
+                  </a:extLst>
+                </a:gridCol>
+                <a:gridCol w="1361479">
+                  <a:extLst>
+                    <a:ext uri="{9D8B030D-6E8A-4147-A177-3AD203B41FA5}">
+                      <a16:colId xmlns:a16="http://schemas.microsoft.com/office/drawing/2014/main" val="3745959777"/>
+                    </a:ext>
+                  </a:extLst>
+                </a:gridCol>
+                <a:gridCol w="1361479">
+                  <a:extLst>
+                    <a:ext uri="{9D8B030D-6E8A-4147-A177-3AD203B41FA5}">
+                      <a16:colId xmlns:a16="http://schemas.microsoft.com/office/drawing/2014/main" val="88174228"/>
+                    </a:ext>
+                  </a:extLst>
+                </a:gridCol>
+                <a:gridCol w="1361479">
+                  <a:extLst>
+                    <a:ext uri="{9D8B030D-6E8A-4147-A177-3AD203B41FA5}">
+                      <a16:colId xmlns:a16="http://schemas.microsoft.com/office/drawing/2014/main" val="3272165040"/>
+                    </a:ext>
+                  </a:extLst>
+                </a:gridCol>
+                <a:gridCol w="1361479">
+                  <a:extLst>
+                    <a:ext uri="{9D8B030D-6E8A-4147-A177-3AD203B41FA5}">
+                      <a16:colId xmlns:a16="http://schemas.microsoft.com/office/drawing/2014/main" val="2378510156"/>
+                    </a:ext>
+                  </a:extLst>
+                </a:gridCol>
+              </a:tblGrid>
+              <a:tr h="370840">
+                <a:tc>
+                  <a:txBody>
+                    <a:bodyPr/>
+                    <a:lstStyle/>
+                    <a:p>
+                      <a:endParaRPr lang="it-IT"/>
+                    </a:p>
+                  </a:txBody>
+                  <a:tcPr/>
+                </a:tc>
+                <a:tc>
+                  <a:txBody>
+                    <a:bodyPr/>
+                    <a:lstStyle/>
+                    <a:p>
+                      <a:endParaRPr lang="it-IT"/>
+                    </a:p>
+                  </a:txBody>
+                  <a:tcPr/>
+                </a:tc>
+                <a:tc>
+                  <a:txBody>
+                    <a:bodyPr/>
+                    <a:lstStyle/>
+                    <a:p>
+                      <a:endParaRPr lang="it-IT"/>
+                    </a:p>
+                  </a:txBody>
+                  <a:tcPr/>
+                </a:tc>
+                <a:tc>
+                  <a:txBody>
+                    <a:bodyPr/>
+                    <a:lstStyle/>
+                    <a:p>
+                      <a:endParaRPr lang="it-IT"/>
+                    </a:p>
+                  </a:txBody>
+                  <a:tcPr/>
+                </a:tc>
+                <a:tc>
+                  <a:txBody>
+                    <a:bodyPr/>
+                    <a:lstStyle/>
+                    <a:p>
+                      <a:endParaRPr lang="it-IT"/>
+                    </a:p>
+                  </a:txBody>
+                  <a:tcPr/>
+                </a:tc>
+                <a:tc>
+                  <a:txBody>
+                    <a:bodyPr/>
+                    <a:lstStyle/>
+                    <a:p>
+                      <a:endParaRPr lang="it-IT"/>
+                    </a:p>
+                  </a:txBody>
+                  <a:tcPr/>
+                </a:tc>
+                <a:tc>
+                  <a:txBody>
+                    <a:bodyPr/>
+                    <a:lstStyle/>
+                    <a:p>
+                      <a:endParaRPr lang="it-IT"/>
+                    </a:p>
+                  </a:txBody>
+                  <a:tcPr/>
+                </a:tc>
+                <a:tc>
+                  <a:txBody>
+                    <a:bodyPr/>
+                    <a:lstStyle/>
+                    <a:p>
+                      <a:endParaRPr lang="it-IT"/>
+                    </a:p>
+                  </a:txBody>
+                  <a:tcPr/>
+                </a:tc>
+                <a:extLst>
+                  <a:ext uri="{0D108BD9-81ED-4DB2-BD59-A6C34878D82A}">
+                    <a16:rowId xmlns:a16="http://schemas.microsoft.com/office/drawing/2014/main" val="2739413700"/>
+                  </a:ext>
+                </a:extLst>
+              </a:tr>
+              <a:tr h="370840">
+                <a:tc>
+                  <a:txBody>
+                    <a:bodyPr/>
+                    <a:lstStyle/>
+                    <a:p>
+                      <a:endParaRPr lang="it-IT"/>
+                    </a:p>
+                  </a:txBody>
+                  <a:tcPr/>
+                </a:tc>
+                <a:tc>
+                  <a:txBody>
+                    <a:bodyPr/>
+                    <a:lstStyle/>
+                    <a:p>
+                      <a:endParaRPr lang="it-IT"/>
+                    </a:p>
+                  </a:txBody>
+                  <a:tcPr/>
+                </a:tc>
+                <a:tc>
+                  <a:txBody>
+                    <a:bodyPr/>
+                    <a:lstStyle/>
+                    <a:p>
+                      <a:endParaRPr lang="it-IT"/>
+                    </a:p>
+                  </a:txBody>
+                  <a:tcPr/>
+                </a:tc>
+                <a:tc>
+                  <a:txBody>
+                    <a:bodyPr/>
+                    <a:lstStyle/>
+                    <a:p>
+                      <a:endParaRPr lang="it-IT"/>
+                    </a:p>
+                  </a:txBody>
+                  <a:tcPr/>
+                </a:tc>
+                <a:tc>
+                  <a:txBody>
+                    <a:bodyPr/>
+                    <a:lstStyle/>
+                    <a:p>
+                      <a:endParaRPr lang="it-IT"/>
+                    </a:p>
+                  </a:txBody>
+                  <a:tcPr/>
+                </a:tc>
+                <a:tc>
+                  <a:txBody>
+                    <a:bodyPr/>
+                    <a:lstStyle/>
+                    <a:p>
+                      <a:endParaRPr lang="it-IT"/>
+                    </a:p>
+                  </a:txBody>
+                  <a:tcPr/>
+                </a:tc>
+                <a:tc>
+                  <a:txBody>
+                    <a:bodyPr/>
+                    <a:lstStyle/>
+                    <a:p>
+                      <a:endParaRPr lang="it-IT"/>
+                    </a:p>
+                  </a:txBody>
+                  <a:tcPr/>
+                </a:tc>
+                <a:tc>
+                  <a:txBody>
+                    <a:bodyPr/>
+                    <a:lstStyle/>
+                    <a:p>
+                      <a:endParaRPr lang="it-IT"/>
+                    </a:p>
+                  </a:txBody>
+                  <a:tcPr/>
+                </a:tc>
+                <a:extLst>
+                  <a:ext uri="{0D108BD9-81ED-4DB2-BD59-A6C34878D82A}">
+                    <a16:rowId xmlns:a16="http://schemas.microsoft.com/office/drawing/2014/main" val="2805054735"/>
+                  </a:ext>
+                </a:extLst>
+              </a:tr>
+              <a:tr h="370840">
+                <a:tc>
+                  <a:txBody>
+                    <a:bodyPr/>
+                    <a:lstStyle/>
+                    <a:p>
+                      <a:endParaRPr lang="it-IT"/>
+                    </a:p>
+                  </a:txBody>
+                  <a:tcPr/>
+                </a:tc>
+                <a:tc>
+                  <a:txBody>
+                    <a:bodyPr/>
+                    <a:lstStyle/>
+                    <a:p>
+                      <a:endParaRPr lang="it-IT"/>
+                    </a:p>
+                  </a:txBody>
+                  <a:tcPr/>
+                </a:tc>
+                <a:tc>
+                  <a:txBody>
+                    <a:bodyPr/>
+                    <a:lstStyle/>
+                    <a:p>
+                      <a:endParaRPr lang="it-IT"/>
+                    </a:p>
+                  </a:txBody>
+                  <a:tcPr/>
+                </a:tc>
+                <a:tc>
+                  <a:txBody>
+                    <a:bodyPr/>
+                    <a:lstStyle/>
+                    <a:p>
+                      <a:endParaRPr lang="it-IT"/>
+                    </a:p>
+                  </a:txBody>
+                  <a:tcPr/>
+                </a:tc>
+                <a:tc>
+                  <a:txBody>
+                    <a:bodyPr/>
+                    <a:lstStyle/>
+                    <a:p>
+                      <a:endParaRPr lang="it-IT"/>
+                    </a:p>
+                  </a:txBody>
+                  <a:tcPr/>
+                </a:tc>
+                <a:tc>
+                  <a:txBody>
+                    <a:bodyPr/>
+                    <a:lstStyle/>
+                    <a:p>
+                      <a:endParaRPr lang="it-IT"/>
+                    </a:p>
+                  </a:txBody>
+                  <a:tcPr/>
+                </a:tc>
+                <a:tc>
+                  <a:txBody>
+                    <a:bodyPr/>
+                    <a:lstStyle/>
+                    <a:p>
+                      <a:endParaRPr lang="it-IT"/>
+                    </a:p>
+                  </a:txBody>
+                  <a:tcPr/>
+                </a:tc>
+                <a:tc>
+                  <a:txBody>
+                    <a:bodyPr/>
+                    <a:lstStyle/>
+                    <a:p>
+                      <a:endParaRPr lang="it-IT"/>
+                    </a:p>
+                  </a:txBody>
+                  <a:tcPr/>
+                </a:tc>
+                <a:extLst>
+                  <a:ext uri="{0D108BD9-81ED-4DB2-BD59-A6C34878D82A}">
+                    <a16:rowId xmlns:a16="http://schemas.microsoft.com/office/drawing/2014/main" val="2514358854"/>
+                  </a:ext>
+                </a:extLst>
+              </a:tr>
+              <a:tr h="370840">
+                <a:tc>
+                  <a:txBody>
+                    <a:bodyPr/>
+                    <a:lstStyle/>
+                    <a:p>
+                      <a:endParaRPr lang="it-IT"/>
+                    </a:p>
+                  </a:txBody>
+                  <a:tcPr/>
+                </a:tc>
+                <a:tc>
+                  <a:txBody>
+                    <a:bodyPr/>
+                    <a:lstStyle/>
+                    <a:p>
+                      <a:endParaRPr lang="it-IT"/>
+                    </a:p>
+                  </a:txBody>
+                  <a:tcPr/>
+                </a:tc>
+                <a:tc>
+                  <a:txBody>
+                    <a:bodyPr/>
+                    <a:lstStyle/>
+                    <a:p>
+                      <a:endParaRPr lang="it-IT"/>
+                    </a:p>
+                  </a:txBody>
+                  <a:tcPr/>
+                </a:tc>
+                <a:tc>
+                  <a:txBody>
+                    <a:bodyPr/>
+                    <a:lstStyle/>
+                    <a:p>
+                      <a:endParaRPr lang="it-IT"/>
+                    </a:p>
+                  </a:txBody>
+                  <a:tcPr/>
+                </a:tc>
+                <a:tc>
+                  <a:txBody>
+                    <a:bodyPr/>
+                    <a:lstStyle/>
+                    <a:p>
+                      <a:endParaRPr lang="it-IT"/>
+                    </a:p>
+                  </a:txBody>
+                  <a:tcPr/>
+                </a:tc>
+                <a:tc>
+                  <a:txBody>
+                    <a:bodyPr/>
+                    <a:lstStyle/>
+                    <a:p>
+                      <a:endParaRPr lang="it-IT"/>
+                    </a:p>
+                  </a:txBody>
+                  <a:tcPr/>
+                </a:tc>
+                <a:tc>
+                  <a:txBody>
+                    <a:bodyPr/>
+                    <a:lstStyle/>
+                    <a:p>
+                      <a:endParaRPr lang="it-IT"/>
+                    </a:p>
+                  </a:txBody>
+                  <a:tcPr/>
+                </a:tc>
+                <a:tc>
+                  <a:txBody>
+                    <a:bodyPr/>
+                    <a:lstStyle/>
+                    <a:p>
+                      <a:endParaRPr lang="it-IT"/>
+                    </a:p>
+                  </a:txBody>
+                  <a:tcPr/>
+                </a:tc>
+                <a:extLst>
+                  <a:ext uri="{0D108BD9-81ED-4DB2-BD59-A6C34878D82A}">
+                    <a16:rowId xmlns:a16="http://schemas.microsoft.com/office/drawing/2014/main" val="457417100"/>
+                  </a:ext>
+                </a:extLst>
+              </a:tr>
+              <a:tr h="370840">
+                <a:tc>
+                  <a:txBody>
+                    <a:bodyPr/>
+                    <a:lstStyle/>
+                    <a:p>
+                      <a:endParaRPr lang="it-IT"/>
+                    </a:p>
+                  </a:txBody>
+                  <a:tcPr/>
+                </a:tc>
+                <a:tc>
+                  <a:txBody>
+                    <a:bodyPr/>
+                    <a:lstStyle/>
+                    <a:p>
+                      <a:endParaRPr lang="it-IT"/>
+                    </a:p>
+                  </a:txBody>
+                  <a:tcPr/>
+                </a:tc>
+                <a:tc>
+                  <a:txBody>
+                    <a:bodyPr/>
+                    <a:lstStyle/>
+                    <a:p>
+                      <a:endParaRPr lang="it-IT"/>
+                    </a:p>
+                  </a:txBody>
+                  <a:tcPr/>
+                </a:tc>
+                <a:tc>
+                  <a:txBody>
+                    <a:bodyPr/>
+                    <a:lstStyle/>
+                    <a:p>
+                      <a:endParaRPr lang="it-IT"/>
+                    </a:p>
+                  </a:txBody>
+                  <a:tcPr/>
+                </a:tc>
+                <a:tc>
+                  <a:txBody>
+                    <a:bodyPr/>
+                    <a:lstStyle/>
+                    <a:p>
+                      <a:endParaRPr lang="it-IT"/>
+                    </a:p>
+                  </a:txBody>
+                  <a:tcPr/>
+                </a:tc>
+                <a:tc>
+                  <a:txBody>
+                    <a:bodyPr/>
+                    <a:lstStyle/>
+                    <a:p>
+                      <a:endParaRPr lang="it-IT"/>
+                    </a:p>
+                  </a:txBody>
+                  <a:tcPr/>
+                </a:tc>
+                <a:tc>
+                  <a:txBody>
+                    <a:bodyPr/>
+                    <a:lstStyle/>
+                    <a:p>
+                      <a:endParaRPr lang="it-IT"/>
+                    </a:p>
+                  </a:txBody>
+                  <a:tcPr/>
+                </a:tc>
+                <a:tc>
+                  <a:txBody>
+                    <a:bodyPr/>
+                    <a:lstStyle/>
+                    <a:p>
+                      <a:endParaRPr lang="it-IT" dirty="0"/>
+                    </a:p>
+                  </a:txBody>
+                  <a:tcPr/>
+                </a:tc>
+                <a:extLst>
+                  <a:ext uri="{0D108BD9-81ED-4DB2-BD59-A6C34878D82A}">
+                    <a16:rowId xmlns:a16="http://schemas.microsoft.com/office/drawing/2014/main" val="1510141637"/>
+                  </a:ext>
+                </a:extLst>
+              </a:tr>
+            </a:tbl>
+          </a:graphicData>
+        </a:graphic>
+      </p:graphicFrame>
     </p:spTree>
     <p:extLst>
       <p:ext uri="{BB962C8B-B14F-4D97-AF65-F5344CB8AC3E}">

--- a/presentation.pptx
+++ b/presentation.pptx
@@ -2,7 +2,7 @@
 <file path=ppt/presentation.xml><?xml version="1.0" encoding="utf-8"?>
 <p:presentation xmlns:a="http://schemas.openxmlformats.org/drawingml/2006/main" xmlns:r="http://schemas.openxmlformats.org/officeDocument/2006/relationships" xmlns:p="http://schemas.openxmlformats.org/presentationml/2006/main" saveSubsetFonts="1">
   <p:sldMasterIdLst>
-    <p:sldMasterId id="2147483673" r:id="rId1"/>
+    <p:sldMasterId id="2147483715" r:id="rId1"/>
   </p:sldMasterIdLst>
   <p:sldIdLst>
     <p:sldId id="256" r:id="rId2"/>
@@ -27,9 +27,9 @@
   <p:notesSz cx="6858000" cy="9144000"/>
   <p:defaultTextStyle>
     <a:defPPr>
-      <a:defRPr lang="it-IT"/>
+      <a:defRPr lang="en-US"/>
     </a:defPPr>
-    <a:lvl1pPr marL="0" algn="l" defTabSz="914400" rtl="0" eaLnBrk="1" latinLnBrk="0" hangingPunct="1">
+    <a:lvl1pPr marL="0" algn="l" defTabSz="457200" rtl="0" eaLnBrk="1" latinLnBrk="0" hangingPunct="1">
       <a:defRPr sz="1800" kern="1200">
         <a:solidFill>
           <a:schemeClr val="tx1"/>
@@ -39,7 +39,7 @@
         <a:cs typeface="+mn-cs"/>
       </a:defRPr>
     </a:lvl1pPr>
-    <a:lvl2pPr marL="457200" algn="l" defTabSz="914400" rtl="0" eaLnBrk="1" latinLnBrk="0" hangingPunct="1">
+    <a:lvl2pPr marL="457200" algn="l" defTabSz="457200" rtl="0" eaLnBrk="1" latinLnBrk="0" hangingPunct="1">
       <a:defRPr sz="1800" kern="1200">
         <a:solidFill>
           <a:schemeClr val="tx1"/>
@@ -49,7 +49,7 @@
         <a:cs typeface="+mn-cs"/>
       </a:defRPr>
     </a:lvl2pPr>
-    <a:lvl3pPr marL="914400" algn="l" defTabSz="914400" rtl="0" eaLnBrk="1" latinLnBrk="0" hangingPunct="1">
+    <a:lvl3pPr marL="914400" algn="l" defTabSz="457200" rtl="0" eaLnBrk="1" latinLnBrk="0" hangingPunct="1">
       <a:defRPr sz="1800" kern="1200">
         <a:solidFill>
           <a:schemeClr val="tx1"/>
@@ -59,7 +59,7 @@
         <a:cs typeface="+mn-cs"/>
       </a:defRPr>
     </a:lvl3pPr>
-    <a:lvl4pPr marL="1371600" algn="l" defTabSz="914400" rtl="0" eaLnBrk="1" latinLnBrk="0" hangingPunct="1">
+    <a:lvl4pPr marL="1371600" algn="l" defTabSz="457200" rtl="0" eaLnBrk="1" latinLnBrk="0" hangingPunct="1">
       <a:defRPr sz="1800" kern="1200">
         <a:solidFill>
           <a:schemeClr val="tx1"/>
@@ -69,7 +69,7 @@
         <a:cs typeface="+mn-cs"/>
       </a:defRPr>
     </a:lvl4pPr>
-    <a:lvl5pPr marL="1828800" algn="l" defTabSz="914400" rtl="0" eaLnBrk="1" latinLnBrk="0" hangingPunct="1">
+    <a:lvl5pPr marL="1828800" algn="l" defTabSz="457200" rtl="0" eaLnBrk="1" latinLnBrk="0" hangingPunct="1">
       <a:defRPr sz="1800" kern="1200">
         <a:solidFill>
           <a:schemeClr val="tx1"/>
@@ -79,7 +79,7 @@
         <a:cs typeface="+mn-cs"/>
       </a:defRPr>
     </a:lvl5pPr>
-    <a:lvl6pPr marL="2286000" algn="l" defTabSz="914400" rtl="0" eaLnBrk="1" latinLnBrk="0" hangingPunct="1">
+    <a:lvl6pPr marL="2286000" algn="l" defTabSz="457200" rtl="0" eaLnBrk="1" latinLnBrk="0" hangingPunct="1">
       <a:defRPr sz="1800" kern="1200">
         <a:solidFill>
           <a:schemeClr val="tx1"/>
@@ -89,7 +89,7 @@
         <a:cs typeface="+mn-cs"/>
       </a:defRPr>
     </a:lvl6pPr>
-    <a:lvl7pPr marL="2743200" algn="l" defTabSz="914400" rtl="0" eaLnBrk="1" latinLnBrk="0" hangingPunct="1">
+    <a:lvl7pPr marL="2743200" algn="l" defTabSz="457200" rtl="0" eaLnBrk="1" latinLnBrk="0" hangingPunct="1">
       <a:defRPr sz="1800" kern="1200">
         <a:solidFill>
           <a:schemeClr val="tx1"/>
@@ -99,7 +99,7 @@
         <a:cs typeface="+mn-cs"/>
       </a:defRPr>
     </a:lvl7pPr>
-    <a:lvl8pPr marL="3200400" algn="l" defTabSz="914400" rtl="0" eaLnBrk="1" latinLnBrk="0" hangingPunct="1">
+    <a:lvl8pPr marL="3200400" algn="l" defTabSz="457200" rtl="0" eaLnBrk="1" latinLnBrk="0" hangingPunct="1">
       <a:defRPr sz="1800" kern="1200">
         <a:solidFill>
           <a:schemeClr val="tx1"/>
@@ -109,7 +109,7 @@
         <a:cs typeface="+mn-cs"/>
       </a:defRPr>
     </a:lvl8pPr>
-    <a:lvl9pPr marL="3657600" algn="l" defTabSz="914400" rtl="0" eaLnBrk="1" latinLnBrk="0" hangingPunct="1">
+    <a:lvl9pPr marL="3657600" algn="l" defTabSz="457200" rtl="0" eaLnBrk="1" latinLnBrk="0" hangingPunct="1">
       <a:defRPr sz="1800" kern="1200">
         <a:solidFill>
           <a:schemeClr val="tx1"/>
@@ -130,7 +130,7 @@
 
 <file path=ppt/slideLayouts/slideLayout1.xml><?xml version="1.0" encoding="utf-8"?>
 <p:sldLayout xmlns:a="http://schemas.openxmlformats.org/drawingml/2006/main" xmlns:r="http://schemas.openxmlformats.org/officeDocument/2006/relationships" xmlns:p="http://schemas.openxmlformats.org/presentationml/2006/main" type="title" preserve="1">
-  <p:cSld name="Title Slide">
+  <p:cSld name="Diapositiva titolo">
     <p:spTree>
       <p:nvGrpSpPr>
         <p:cNvPr id="1" name=""/>
@@ -147,13 +147,7 @@
       </p:grpSpPr>
       <p:sp>
         <p:nvSpPr>
-          <p:cNvPr id="2" name="Title 1">
-            <a:extLst>
-              <a:ext uri="{FF2B5EF4-FFF2-40B4-BE49-F238E27FC236}">
-                <a16:creationId xmlns:a16="http://schemas.microsoft.com/office/drawing/2014/main" id="{B345610A-17B4-4656-93CF-E1D9982860F7}"/>
-              </a:ext>
-            </a:extLst>
-          </p:cNvPr>
+          <p:cNvPr id="2" name="Title 1"/>
           <p:cNvSpPr>
             <a:spLocks noGrp="1"/>
           </p:cNvSpPr>
@@ -163,23 +157,21 @@
         </p:nvSpPr>
         <p:spPr>
           <a:xfrm>
-            <a:off x="640080" y="1371599"/>
-            <a:ext cx="6675120" cy="2951825"/>
+            <a:off x="1524000" y="1122363"/>
+            <a:ext cx="9144000" cy="2387600"/>
           </a:xfrm>
         </p:spPr>
         <p:txBody>
-          <a:bodyPr anchor="t">
-            <a:normAutofit/>
-          </a:bodyPr>
+          <a:bodyPr anchor="b"/>
           <a:lstStyle>
-            <a:lvl1pPr algn="l">
-              <a:defRPr sz="5400"/>
+            <a:lvl1pPr algn="ctr">
+              <a:defRPr sz="6000"/>
             </a:lvl1pPr>
           </a:lstStyle>
           <a:p>
             <a:r>
-              <a:rPr lang="en-US"/>
-              <a:t>Click to edit Master title style</a:t>
+              <a:rPr lang="it-IT"/>
+              <a:t>Fare clic per modificare lo stile del titolo dello schema</a:t>
             </a:r>
             <a:endParaRPr lang="en-US" dirty="0"/>
           </a:p>
@@ -187,13 +179,7 @@
       </p:sp>
       <p:sp>
         <p:nvSpPr>
-          <p:cNvPr id="3" name="Subtitle 2">
-            <a:extLst>
-              <a:ext uri="{FF2B5EF4-FFF2-40B4-BE49-F238E27FC236}">
-                <a16:creationId xmlns:a16="http://schemas.microsoft.com/office/drawing/2014/main" id="{A451C80B-DFD6-415B-BA5B-E56E510CD12B}"/>
-              </a:ext>
-            </a:extLst>
-          </p:cNvPr>
+          <p:cNvPr id="3" name="Subtitle 2"/>
           <p:cNvSpPr>
             <a:spLocks noGrp="1"/>
           </p:cNvSpPr>
@@ -203,21 +189,16 @@
         </p:nvSpPr>
         <p:spPr>
           <a:xfrm>
-            <a:off x="640080" y="4584879"/>
-            <a:ext cx="6675120" cy="1287887"/>
+            <a:off x="1524000" y="3602038"/>
+            <a:ext cx="9144000" cy="1655762"/>
           </a:xfrm>
         </p:spPr>
         <p:txBody>
-          <a:bodyPr anchor="b">
-            <a:normAutofit/>
-          </a:bodyPr>
+          <a:bodyPr/>
           <a:lstStyle>
-            <a:lvl1pPr marL="0" indent="0" algn="l">
-              <a:lnSpc>
-                <a:spcPct val="130000"/>
-              </a:lnSpc>
+            <a:lvl1pPr marL="0" indent="0" algn="ctr">
               <a:buNone/>
-              <a:defRPr sz="1800" b="1" cap="all" spc="300" baseline="0"/>
+              <a:defRPr sz="2400"/>
             </a:lvl1pPr>
             <a:lvl2pPr marL="457200" indent="0" algn="ctr">
               <a:buNone/>
@@ -254,8 +235,8 @@
           </a:lstStyle>
           <a:p>
             <a:r>
-              <a:rPr lang="en-US"/>
-              <a:t>Click to edit Master subtitle style</a:t>
+              <a:rPr lang="it-IT"/>
+              <a:t>Fare clic per modificare lo stile del sottotitolo dello schema</a:t>
             </a:r>
             <a:endParaRPr lang="en-US" dirty="0"/>
           </a:p>
@@ -263,13 +244,7 @@
       </p:sp>
       <p:sp>
         <p:nvSpPr>
-          <p:cNvPr id="4" name="Date Placeholder 3">
-            <a:extLst>
-              <a:ext uri="{FF2B5EF4-FFF2-40B4-BE49-F238E27FC236}">
-                <a16:creationId xmlns:a16="http://schemas.microsoft.com/office/drawing/2014/main" id="{67A2065B-06FF-4991-9F8A-4BE25457B479}"/>
-              </a:ext>
-            </a:extLst>
-          </p:cNvPr>
+          <p:cNvPr id="4" name="Date Placeholder 3"/>
           <p:cNvSpPr>
             <a:spLocks noGrp="1"/>
           </p:cNvSpPr>
@@ -282,9 +257,9 @@
           <a:bodyPr/>
           <a:lstStyle/>
           <a:p>
-            <a:fld id="{6444479B-705B-4489-957E-7E8A228BDFA0}" type="datetime1">
+            <a:fld id="{7DA38F49-B3E2-4BF0-BEC7-C30D34ABBB8D}" type="datetime1">
               <a:rPr lang="en-US" smtClean="0"/>
-              <a:t>7/20/2025</a:t>
+              <a:t>7/21/2025</a:t>
             </a:fld>
             <a:endParaRPr lang="en-US"/>
           </a:p>
@@ -292,13 +267,7 @@
       </p:sp>
       <p:sp>
         <p:nvSpPr>
-          <p:cNvPr id="5" name="Footer Placeholder 4">
-            <a:extLst>
-              <a:ext uri="{FF2B5EF4-FFF2-40B4-BE49-F238E27FC236}">
-                <a16:creationId xmlns:a16="http://schemas.microsoft.com/office/drawing/2014/main" id="{B20DF2FA-C604-45D8-A633-11D3742EC141}"/>
-              </a:ext>
-            </a:extLst>
-          </p:cNvPr>
+          <p:cNvPr id="5" name="Footer Placeholder 4"/>
           <p:cNvSpPr>
             <a:spLocks noGrp="1"/>
           </p:cNvSpPr>
@@ -317,13 +286,7 @@
       </p:sp>
       <p:sp>
         <p:nvSpPr>
-          <p:cNvPr id="6" name="Slide Number Placeholder 5">
-            <a:extLst>
-              <a:ext uri="{FF2B5EF4-FFF2-40B4-BE49-F238E27FC236}">
-                <a16:creationId xmlns:a16="http://schemas.microsoft.com/office/drawing/2014/main" id="{02EE5DA9-2D04-4850-AB9F-BD353816504A}"/>
-              </a:ext>
-            </a:extLst>
-          </p:cNvPr>
+          <p:cNvPr id="6" name="Slide Number Placeholder 5"/>
           <p:cNvSpPr>
             <a:spLocks noGrp="1"/>
           </p:cNvSpPr>
@@ -347,19 +310,20 @@
     </p:spTree>
     <p:extLst>
       <p:ext uri="{BB962C8B-B14F-4D97-AF65-F5344CB8AC3E}">
-        <p14:creationId xmlns:p14="http://schemas.microsoft.com/office/powerpoint/2010/main" val="132794325"/>
+        <p14:creationId xmlns:p14="http://schemas.microsoft.com/office/powerpoint/2010/main" val="654952457"/>
       </p:ext>
     </p:extLst>
   </p:cSld>
   <p:clrMapOvr>
     <a:masterClrMapping/>
   </p:clrMapOvr>
+  <p:hf sldNum="0" hdr="0" ftr="0" dt="0"/>
 </p:sldLayout>
 </file>
 
 <file path=ppt/slideLayouts/slideLayout10.xml><?xml version="1.0" encoding="utf-8"?>
 <p:sldLayout xmlns:a="http://schemas.openxmlformats.org/drawingml/2006/main" xmlns:r="http://schemas.openxmlformats.org/officeDocument/2006/relationships" xmlns:p="http://schemas.openxmlformats.org/presentationml/2006/main" type="vertTx" preserve="1">
-  <p:cSld name="Title and Vertical Text">
+  <p:cSld name="Titolo e testo verticale">
     <p:spTree>
       <p:nvGrpSpPr>
         <p:cNvPr id="1" name=""/>
@@ -376,13 +340,7 @@
       </p:grpSpPr>
       <p:sp>
         <p:nvSpPr>
-          <p:cNvPr id="2" name="Title 1">
-            <a:extLst>
-              <a:ext uri="{FF2B5EF4-FFF2-40B4-BE49-F238E27FC236}">
-                <a16:creationId xmlns:a16="http://schemas.microsoft.com/office/drawing/2014/main" id="{495E4BB7-3F30-4C31-9BB2-8EC24FC0A1D6}"/>
-              </a:ext>
-            </a:extLst>
-          </p:cNvPr>
+          <p:cNvPr id="2" name="Title 1"/>
           <p:cNvSpPr>
             <a:spLocks noGrp="1"/>
           </p:cNvSpPr>
@@ -396,8 +354,8 @@
           <a:lstStyle/>
           <a:p>
             <a:r>
-              <a:rPr lang="en-US"/>
-              <a:t>Click to edit Master title style</a:t>
+              <a:rPr lang="it-IT"/>
+              <a:t>Fare clic per modificare lo stile del titolo dello schema</a:t>
             </a:r>
             <a:endParaRPr lang="en-US" dirty="0"/>
           </a:p>
@@ -405,13 +363,7 @@
       </p:sp>
       <p:sp>
         <p:nvSpPr>
-          <p:cNvPr id="3" name="Vertical Text Placeholder 2">
-            <a:extLst>
-              <a:ext uri="{FF2B5EF4-FFF2-40B4-BE49-F238E27FC236}">
-                <a16:creationId xmlns:a16="http://schemas.microsoft.com/office/drawing/2014/main" id="{1ECF4134-70F5-4EE6-88BE-49D129630CDF}"/>
-              </a:ext>
-            </a:extLst>
-          </p:cNvPr>
+          <p:cNvPr id="3" name="Vertical Text Placeholder 2"/>
           <p:cNvSpPr>
             <a:spLocks noGrp="1"/>
           </p:cNvSpPr>
@@ -426,36 +378,36 @@
           <a:p>
             <a:pPr lvl="0"/>
             <a:r>
-              <a:rPr lang="en-US"/>
-              <a:t>Click to edit Master text styles</a:t>
+              <a:rPr lang="it-IT"/>
+              <a:t>Fare clic per modificare gli stili del testo dello schema</a:t>
             </a:r>
           </a:p>
           <a:p>
             <a:pPr lvl="1"/>
             <a:r>
-              <a:rPr lang="en-US"/>
-              <a:t>Second level</a:t>
+              <a:rPr lang="it-IT"/>
+              <a:t>Secondo livello</a:t>
             </a:r>
           </a:p>
           <a:p>
             <a:pPr lvl="2"/>
             <a:r>
-              <a:rPr lang="en-US"/>
-              <a:t>Third level</a:t>
+              <a:rPr lang="it-IT"/>
+              <a:t>Terzo livello</a:t>
             </a:r>
           </a:p>
           <a:p>
             <a:pPr lvl="3"/>
             <a:r>
-              <a:rPr lang="en-US"/>
-              <a:t>Fourth level</a:t>
+              <a:rPr lang="it-IT"/>
+              <a:t>Quarto livello</a:t>
             </a:r>
           </a:p>
           <a:p>
             <a:pPr lvl="4"/>
             <a:r>
-              <a:rPr lang="en-US"/>
-              <a:t>Fifth level</a:t>
+              <a:rPr lang="it-IT"/>
+              <a:t>Quinto livello</a:t>
             </a:r>
             <a:endParaRPr lang="en-US" dirty="0"/>
           </a:p>
@@ -463,13 +415,7 @@
       </p:sp>
       <p:sp>
         <p:nvSpPr>
-          <p:cNvPr id="4" name="Date Placeholder 3">
-            <a:extLst>
-              <a:ext uri="{FF2B5EF4-FFF2-40B4-BE49-F238E27FC236}">
-                <a16:creationId xmlns:a16="http://schemas.microsoft.com/office/drawing/2014/main" id="{C19EABC7-C044-44DE-B303-55A0581DA1E8}"/>
-              </a:ext>
-            </a:extLst>
-          </p:cNvPr>
+          <p:cNvPr id="4" name="Date Placeholder 3"/>
           <p:cNvSpPr>
             <a:spLocks noGrp="1"/>
           </p:cNvSpPr>
@@ -482,9 +428,9 @@
           <a:bodyPr/>
           <a:lstStyle/>
           <a:p>
-            <a:fld id="{C07B66AD-7C08-490A-ADA4-B47E10FB2407}" type="datetime1">
+            <a:fld id="{7DA38F49-B3E2-4BF0-BEC7-C30D34ABBB8D}" type="datetime1">
               <a:rPr lang="en-US" smtClean="0"/>
-              <a:t>7/20/2025</a:t>
+              <a:t>7/21/2025</a:t>
             </a:fld>
             <a:endParaRPr lang="en-US"/>
           </a:p>
@@ -492,13 +438,7 @@
       </p:sp>
       <p:sp>
         <p:nvSpPr>
-          <p:cNvPr id="5" name="Footer Placeholder 4">
-            <a:extLst>
-              <a:ext uri="{FF2B5EF4-FFF2-40B4-BE49-F238E27FC236}">
-                <a16:creationId xmlns:a16="http://schemas.microsoft.com/office/drawing/2014/main" id="{4D4A63E1-5BC5-402E-9916-BAB84BCF0BB2}"/>
-              </a:ext>
-            </a:extLst>
-          </p:cNvPr>
+          <p:cNvPr id="5" name="Footer Placeholder 4"/>
           <p:cNvSpPr>
             <a:spLocks noGrp="1"/>
           </p:cNvSpPr>
@@ -517,13 +457,7 @@
       </p:sp>
       <p:sp>
         <p:nvSpPr>
-          <p:cNvPr id="6" name="Slide Number Placeholder 5">
-            <a:extLst>
-              <a:ext uri="{FF2B5EF4-FFF2-40B4-BE49-F238E27FC236}">
-                <a16:creationId xmlns:a16="http://schemas.microsoft.com/office/drawing/2014/main" id="{0A2EF915-AF64-4ECC-8B1A-B7E6A89B7917}"/>
-              </a:ext>
-            </a:extLst>
-          </p:cNvPr>
+          <p:cNvPr id="6" name="Slide Number Placeholder 5"/>
           <p:cNvSpPr>
             <a:spLocks noGrp="1"/>
           </p:cNvSpPr>
@@ -547,19 +481,20 @@
     </p:spTree>
     <p:extLst>
       <p:ext uri="{BB962C8B-B14F-4D97-AF65-F5344CB8AC3E}">
-        <p14:creationId xmlns:p14="http://schemas.microsoft.com/office/powerpoint/2010/main" val="1380763757"/>
+        <p14:creationId xmlns:p14="http://schemas.microsoft.com/office/powerpoint/2010/main" val="2232330553"/>
       </p:ext>
     </p:extLst>
   </p:cSld>
   <p:clrMapOvr>
     <a:masterClrMapping/>
   </p:clrMapOvr>
+  <p:hf sldNum="0" hdr="0" ftr="0" dt="0"/>
 </p:sldLayout>
 </file>
 
 <file path=ppt/slideLayouts/slideLayout11.xml><?xml version="1.0" encoding="utf-8"?>
 <p:sldLayout xmlns:a="http://schemas.openxmlformats.org/drawingml/2006/main" xmlns:r="http://schemas.openxmlformats.org/officeDocument/2006/relationships" xmlns:p="http://schemas.openxmlformats.org/presentationml/2006/main" type="vertTitleAndTx" preserve="1">
-  <p:cSld name="Vertical Title and Text">
+  <p:cSld name="1_Titolo e testo verticale">
     <p:spTree>
       <p:nvGrpSpPr>
         <p:cNvPr id="1" name=""/>
@@ -574,84 +509,86 @@
           <a:chExt cx="0" cy="0"/>
         </a:xfrm>
       </p:grpSpPr>
-      <p:sp useBgFill="1">
-        <p:nvSpPr>
-          <p:cNvPr id="10" name="Rectangle 9">
-            <a:extLst>
-              <a:ext uri="{FF2B5EF4-FFF2-40B4-BE49-F238E27FC236}">
-                <a16:creationId xmlns:a16="http://schemas.microsoft.com/office/drawing/2014/main" id="{31CB3635-47E1-90D8-B693-DA85A66B3831}"/>
-              </a:ext>
-            </a:extLst>
-          </p:cNvPr>
-          <p:cNvSpPr/>
-          <p:nvPr/>
+      <p:sp>
+        <p:nvSpPr>
+          <p:cNvPr id="2" name="Vertical Title 1"/>
+          <p:cNvSpPr>
+            <a:spLocks noGrp="1"/>
+          </p:cNvSpPr>
+          <p:nvPr>
+            <p:ph type="title" orient="vert"/>
+          </p:nvPr>
         </p:nvSpPr>
         <p:spPr>
           <a:xfrm>
-            <a:off x="0" y="0"/>
-            <a:ext cx="12192000" cy="6858000"/>
+            <a:off x="8724900" y="365125"/>
+            <a:ext cx="2628900" cy="5811838"/>
           </a:xfrm>
-          <a:prstGeom prst="rect">
-            <a:avLst/>
-          </a:prstGeom>
-          <a:ln>
-            <a:noFill/>
-          </a:ln>
         </p:spPr>
-        <p:style>
-          <a:lnRef idx="2">
-            <a:schemeClr val="accent1">
-              <a:shade val="15000"/>
-            </a:schemeClr>
-          </a:lnRef>
-          <a:fillRef idx="1">
-            <a:schemeClr val="accent1"/>
-          </a:fillRef>
-          <a:effectRef idx="0">
-            <a:schemeClr val="accent1"/>
-          </a:effectRef>
-          <a:fontRef idx="minor">
-            <a:schemeClr val="lt1"/>
-          </a:fontRef>
-        </p:style>
-        <p:txBody>
-          <a:bodyPr rtlCol="0" anchor="ctr"/>
-          <a:lstStyle/>
-          <a:p>
-            <a:pPr algn="ctr"/>
-            <a:endParaRPr lang="en-US"/>
-          </a:p>
-        </p:txBody>
-      </p:sp>
-      <p:sp>
-        <p:nvSpPr>
-          <p:cNvPr id="2" name="Vertical Title 1">
-            <a:extLst>
-              <a:ext uri="{FF2B5EF4-FFF2-40B4-BE49-F238E27FC236}">
-                <a16:creationId xmlns:a16="http://schemas.microsoft.com/office/drawing/2014/main" id="{6EB09414-2AA1-4D8E-A00A-C092FBC92D91}"/>
-              </a:ext>
-            </a:extLst>
-          </p:cNvPr>
-          <p:cNvSpPr>
-            <a:spLocks noGrp="1"/>
-          </p:cNvSpPr>
-          <p:nvPr>
-            <p:ph type="title" orient="vert"/>
+        <p:txBody>
+          <a:bodyPr vert="eaVert"/>
+          <a:lstStyle/>
+          <a:p>
+            <a:r>
+              <a:rPr lang="it-IT"/>
+              <a:t>Fare clic per modificare lo stile del titolo dello schema</a:t>
+            </a:r>
+            <a:endParaRPr lang="en-US" dirty="0"/>
+          </a:p>
+        </p:txBody>
+      </p:sp>
+      <p:sp>
+        <p:nvSpPr>
+          <p:cNvPr id="3" name="Vertical Text Placeholder 2"/>
+          <p:cNvSpPr>
+            <a:spLocks noGrp="1"/>
+          </p:cNvSpPr>
+          <p:nvPr>
+            <p:ph type="body" orient="vert" idx="1"/>
           </p:nvPr>
         </p:nvSpPr>
         <p:spPr>
           <a:xfrm>
-            <a:off x="9209219" y="640079"/>
-            <a:ext cx="1811773" cy="5536884"/>
+            <a:off x="838200" y="365125"/>
+            <a:ext cx="7734300" cy="5811838"/>
           </a:xfrm>
         </p:spPr>
         <p:txBody>
           <a:bodyPr vert="eaVert"/>
           <a:lstStyle/>
           <a:p>
-            <a:r>
-              <a:rPr lang="en-US"/>
-              <a:t>Click to edit Master title style</a:t>
+            <a:pPr lvl="0"/>
+            <a:r>
+              <a:rPr lang="it-IT"/>
+              <a:t>Fare clic per modificare gli stili del testo dello schema</a:t>
+            </a:r>
+          </a:p>
+          <a:p>
+            <a:pPr lvl="1"/>
+            <a:r>
+              <a:rPr lang="it-IT"/>
+              <a:t>Secondo livello</a:t>
+            </a:r>
+          </a:p>
+          <a:p>
+            <a:pPr lvl="2"/>
+            <a:r>
+              <a:rPr lang="it-IT"/>
+              <a:t>Terzo livello</a:t>
+            </a:r>
+          </a:p>
+          <a:p>
+            <a:pPr lvl="3"/>
+            <a:r>
+              <a:rPr lang="it-IT"/>
+              <a:t>Quarto livello</a:t>
+            </a:r>
+          </a:p>
+          <a:p>
+            <a:pPr lvl="4"/>
+            <a:r>
+              <a:rPr lang="it-IT"/>
+              <a:t>Quinto livello</a:t>
             </a:r>
             <a:endParaRPr lang="en-US" dirty="0"/>
           </a:p>
@@ -659,76 +596,7 @@
       </p:sp>
       <p:sp>
         <p:nvSpPr>
-          <p:cNvPr id="3" name="Vertical Text Placeholder 2">
-            <a:extLst>
-              <a:ext uri="{FF2B5EF4-FFF2-40B4-BE49-F238E27FC236}">
-                <a16:creationId xmlns:a16="http://schemas.microsoft.com/office/drawing/2014/main" id="{D42C3A78-37C5-46D0-9DF4-CB78AF883C2C}"/>
-              </a:ext>
-            </a:extLst>
-          </p:cNvPr>
-          <p:cNvSpPr>
-            <a:spLocks noGrp="1"/>
-          </p:cNvSpPr>
-          <p:nvPr>
-            <p:ph type="body" orient="vert" idx="1"/>
-          </p:nvPr>
-        </p:nvSpPr>
-        <p:spPr>
-          <a:xfrm>
-            <a:off x="640080" y="640080"/>
-            <a:ext cx="8412422" cy="5536884"/>
-          </a:xfrm>
-        </p:spPr>
-        <p:txBody>
-          <a:bodyPr vert="eaVert"/>
-          <a:lstStyle/>
-          <a:p>
-            <a:pPr lvl="0"/>
-            <a:r>
-              <a:rPr lang="en-US"/>
-              <a:t>Click to edit Master text styles</a:t>
-            </a:r>
-          </a:p>
-          <a:p>
-            <a:pPr lvl="1"/>
-            <a:r>
-              <a:rPr lang="en-US"/>
-              <a:t>Second level</a:t>
-            </a:r>
-          </a:p>
-          <a:p>
-            <a:pPr lvl="2"/>
-            <a:r>
-              <a:rPr lang="en-US"/>
-              <a:t>Third level</a:t>
-            </a:r>
-          </a:p>
-          <a:p>
-            <a:pPr lvl="3"/>
-            <a:r>
-              <a:rPr lang="en-US"/>
-              <a:t>Fourth level</a:t>
-            </a:r>
-          </a:p>
-          <a:p>
-            <a:pPr lvl="4"/>
-            <a:r>
-              <a:rPr lang="en-US"/>
-              <a:t>Fifth level</a:t>
-            </a:r>
-            <a:endParaRPr lang="en-US" dirty="0"/>
-          </a:p>
-        </p:txBody>
-      </p:sp>
-      <p:sp>
-        <p:nvSpPr>
-          <p:cNvPr id="4" name="Date Placeholder 3">
-            <a:extLst>
-              <a:ext uri="{FF2B5EF4-FFF2-40B4-BE49-F238E27FC236}">
-                <a16:creationId xmlns:a16="http://schemas.microsoft.com/office/drawing/2014/main" id="{49D8705E-925D-4F57-8268-107CE3CF4C45}"/>
-              </a:ext>
-            </a:extLst>
-          </p:cNvPr>
+          <p:cNvPr id="4" name="Date Placeholder 3"/>
           <p:cNvSpPr>
             <a:spLocks noGrp="1"/>
           </p:cNvSpPr>
@@ -741,9 +609,9 @@
           <a:bodyPr/>
           <a:lstStyle/>
           <a:p>
-            <a:fld id="{05B95027-4255-49E7-9841-CD21BCC99996}" type="datetime1">
+            <a:fld id="{7DA38F49-B3E2-4BF0-BEC7-C30D34ABBB8D}" type="datetime1">
               <a:rPr lang="en-US" smtClean="0"/>
-              <a:t>7/20/2025</a:t>
+              <a:t>7/21/2025</a:t>
             </a:fld>
             <a:endParaRPr lang="en-US"/>
           </a:p>
@@ -751,13 +619,7 @@
       </p:sp>
       <p:sp>
         <p:nvSpPr>
-          <p:cNvPr id="5" name="Footer Placeholder 4">
-            <a:extLst>
-              <a:ext uri="{FF2B5EF4-FFF2-40B4-BE49-F238E27FC236}">
-                <a16:creationId xmlns:a16="http://schemas.microsoft.com/office/drawing/2014/main" id="{50FE207E-070D-4EC8-A44C-21F1815FDAAC}"/>
-              </a:ext>
-            </a:extLst>
-          </p:cNvPr>
+          <p:cNvPr id="5" name="Footer Placeholder 4"/>
           <p:cNvSpPr>
             <a:spLocks noGrp="1"/>
           </p:cNvSpPr>
@@ -776,13 +638,7 @@
       </p:sp>
       <p:sp>
         <p:nvSpPr>
-          <p:cNvPr id="6" name="Slide Number Placeholder 5">
-            <a:extLst>
-              <a:ext uri="{FF2B5EF4-FFF2-40B4-BE49-F238E27FC236}">
-                <a16:creationId xmlns:a16="http://schemas.microsoft.com/office/drawing/2014/main" id="{715D01D1-C266-4161-A820-C084B980131C}"/>
-              </a:ext>
-            </a:extLst>
-          </p:cNvPr>
+          <p:cNvPr id="6" name="Slide Number Placeholder 5"/>
           <p:cNvSpPr>
             <a:spLocks noGrp="1"/>
           </p:cNvSpPr>
@@ -803,64 +659,23 @@
           </a:p>
         </p:txBody>
       </p:sp>
-      <p:cxnSp>
-        <p:nvCxnSpPr>
-          <p:cNvPr id="7" name="Straight Connector 6">
-            <a:extLst>
-              <a:ext uri="{FF2B5EF4-FFF2-40B4-BE49-F238E27FC236}">
-                <a16:creationId xmlns:a16="http://schemas.microsoft.com/office/drawing/2014/main" id="{3230604F-219C-2DEE-830E-27274CC2FE19}"/>
-              </a:ext>
-              <a:ext uri="{C183D7F6-B498-43B3-948B-1728B52AA6E4}">
-                <adec:decorative xmlns:adec="http://schemas.microsoft.com/office/drawing/2017/decorative" val="1"/>
-              </a:ext>
-            </a:extLst>
-          </p:cNvPr>
-          <p:cNvCxnSpPr>
-            <a:cxnSpLocks/>
-          </p:cNvCxnSpPr>
-          <p:nvPr/>
-        </p:nvCxnSpPr>
-        <p:spPr>
-          <a:xfrm rot="5400000">
-            <a:off x="10872154" y="1192438"/>
-            <a:ext cx="978862" cy="0"/>
-          </a:xfrm>
-          <a:prstGeom prst="line">
-            <a:avLst/>
-          </a:prstGeom>
-          <a:ln w="76200"/>
-        </p:spPr>
-        <p:style>
-          <a:lnRef idx="1">
-            <a:schemeClr val="accent1"/>
-          </a:lnRef>
-          <a:fillRef idx="0">
-            <a:schemeClr val="accent1"/>
-          </a:fillRef>
-          <a:effectRef idx="0">
-            <a:schemeClr val="accent1"/>
-          </a:effectRef>
-          <a:fontRef idx="minor">
-            <a:schemeClr val="tx1"/>
-          </a:fontRef>
-        </p:style>
-      </p:cxnSp>
     </p:spTree>
     <p:extLst>
       <p:ext uri="{BB962C8B-B14F-4D97-AF65-F5344CB8AC3E}">
-        <p14:creationId xmlns:p14="http://schemas.microsoft.com/office/powerpoint/2010/main" val="1806708752"/>
+        <p14:creationId xmlns:p14="http://schemas.microsoft.com/office/powerpoint/2010/main" val="3945090746"/>
       </p:ext>
     </p:extLst>
   </p:cSld>
   <p:clrMapOvr>
     <a:masterClrMapping/>
   </p:clrMapOvr>
+  <p:hf sldNum="0" hdr="0" ftr="0" dt="0"/>
 </p:sldLayout>
 </file>
 
 <file path=ppt/slideLayouts/slideLayout2.xml><?xml version="1.0" encoding="utf-8"?>
 <p:sldLayout xmlns:a="http://schemas.openxmlformats.org/drawingml/2006/main" xmlns:r="http://schemas.openxmlformats.org/officeDocument/2006/relationships" xmlns:p="http://schemas.openxmlformats.org/presentationml/2006/main" type="obj" preserve="1">
-  <p:cSld name="Title and Content">
+  <p:cSld name="Titolo e contenuto">
     <p:spTree>
       <p:nvGrpSpPr>
         <p:cNvPr id="1" name=""/>
@@ -877,13 +692,7 @@
       </p:grpSpPr>
       <p:sp>
         <p:nvSpPr>
-          <p:cNvPr id="2" name="Title 1">
-            <a:extLst>
-              <a:ext uri="{FF2B5EF4-FFF2-40B4-BE49-F238E27FC236}">
-                <a16:creationId xmlns:a16="http://schemas.microsoft.com/office/drawing/2014/main" id="{1E08B246-6A68-46BE-9DBD-614FA8CF4E26}"/>
-              </a:ext>
-            </a:extLst>
-          </p:cNvPr>
+          <p:cNvPr id="2" name="Title 1"/>
           <p:cNvSpPr>
             <a:spLocks noGrp="1"/>
           </p:cNvSpPr>
@@ -897,8 +706,8 @@
           <a:lstStyle/>
           <a:p>
             <a:r>
-              <a:rPr lang="en-US"/>
-              <a:t>Click to edit Master title style</a:t>
+              <a:rPr lang="it-IT"/>
+              <a:t>Fare clic per modificare lo stile del titolo dello schema</a:t>
             </a:r>
             <a:endParaRPr lang="en-US" dirty="0"/>
           </a:p>
@@ -906,13 +715,7 @@
       </p:sp>
       <p:sp>
         <p:nvSpPr>
-          <p:cNvPr id="3" name="Content Placeholder 2">
-            <a:extLst>
-              <a:ext uri="{FF2B5EF4-FFF2-40B4-BE49-F238E27FC236}">
-                <a16:creationId xmlns:a16="http://schemas.microsoft.com/office/drawing/2014/main" id="{03E47706-8D18-4093-A7C1-F30D7543CEDE}"/>
-              </a:ext>
-            </a:extLst>
-          </p:cNvPr>
+          <p:cNvPr id="3" name="Content Placeholder 2"/>
           <p:cNvSpPr>
             <a:spLocks noGrp="1"/>
           </p:cNvSpPr>
@@ -927,49 +730,44 @@
           <a:p>
             <a:pPr lvl="0"/>
             <a:r>
-              <a:rPr lang="en-US"/>
-              <a:t>Click to edit Master text styles</a:t>
+              <a:rPr lang="it-IT"/>
+              <a:t>Fare clic per modificare gli stili del testo dello schema</a:t>
             </a:r>
           </a:p>
           <a:p>
             <a:pPr lvl="1"/>
             <a:r>
-              <a:rPr lang="en-US"/>
-              <a:t>Second level</a:t>
+              <a:rPr lang="it-IT"/>
+              <a:t>Secondo livello</a:t>
             </a:r>
           </a:p>
           <a:p>
             <a:pPr lvl="2"/>
             <a:r>
-              <a:rPr lang="en-US"/>
-              <a:t>Third level</a:t>
+              <a:rPr lang="it-IT"/>
+              <a:t>Terzo livello</a:t>
             </a:r>
           </a:p>
           <a:p>
             <a:pPr lvl="3"/>
             <a:r>
-              <a:rPr lang="en-US"/>
-              <a:t>Fourth level</a:t>
+              <a:rPr lang="it-IT"/>
+              <a:t>Quarto livello</a:t>
             </a:r>
           </a:p>
           <a:p>
             <a:pPr lvl="4"/>
             <a:r>
-              <a:rPr lang="en-US"/>
-              <a:t>Fifth level</a:t>
-            </a:r>
-          </a:p>
-        </p:txBody>
-      </p:sp>
-      <p:sp>
-        <p:nvSpPr>
-          <p:cNvPr id="4" name="Date Placeholder 3">
-            <a:extLst>
-              <a:ext uri="{FF2B5EF4-FFF2-40B4-BE49-F238E27FC236}">
-                <a16:creationId xmlns:a16="http://schemas.microsoft.com/office/drawing/2014/main" id="{3EC7C8FC-AAEA-4AB6-9DB5-2503F58F0E69}"/>
-              </a:ext>
-            </a:extLst>
-          </p:cNvPr>
+              <a:rPr lang="it-IT"/>
+              <a:t>Quinto livello</a:t>
+            </a:r>
+            <a:endParaRPr lang="en-US" dirty="0"/>
+          </a:p>
+        </p:txBody>
+      </p:sp>
+      <p:sp>
+        <p:nvSpPr>
+          <p:cNvPr id="4" name="Date Placeholder 3"/>
           <p:cNvSpPr>
             <a:spLocks noGrp="1"/>
           </p:cNvSpPr>
@@ -982,9 +780,9 @@
           <a:bodyPr/>
           <a:lstStyle/>
           <a:p>
-            <a:fld id="{9F89F774-3FA6-43B8-9241-99959C8FD463}" type="datetime1">
+            <a:fld id="{7DA38F49-B3E2-4BF0-BEC7-C30D34ABBB8D}" type="datetime1">
               <a:rPr lang="en-US" smtClean="0"/>
-              <a:t>7/20/2025</a:t>
+              <a:t>7/21/2025</a:t>
             </a:fld>
             <a:endParaRPr lang="en-US"/>
           </a:p>
@@ -992,13 +790,7 @@
       </p:sp>
       <p:sp>
         <p:nvSpPr>
-          <p:cNvPr id="5" name="Footer Placeholder 4">
-            <a:extLst>
-              <a:ext uri="{FF2B5EF4-FFF2-40B4-BE49-F238E27FC236}">
-                <a16:creationId xmlns:a16="http://schemas.microsoft.com/office/drawing/2014/main" id="{E8B1616B-3F08-4869-A522-773C38940F66}"/>
-              </a:ext>
-            </a:extLst>
-          </p:cNvPr>
+          <p:cNvPr id="5" name="Footer Placeholder 4"/>
           <p:cNvSpPr>
             <a:spLocks noGrp="1"/>
           </p:cNvSpPr>
@@ -1017,13 +809,7 @@
       </p:sp>
       <p:sp>
         <p:nvSpPr>
-          <p:cNvPr id="6" name="Slide Number Placeholder 5">
-            <a:extLst>
-              <a:ext uri="{FF2B5EF4-FFF2-40B4-BE49-F238E27FC236}">
-                <a16:creationId xmlns:a16="http://schemas.microsoft.com/office/drawing/2014/main" id="{3E030CE6-9124-4B3A-A912-AE16B5C34003}"/>
-              </a:ext>
-            </a:extLst>
-          </p:cNvPr>
+          <p:cNvPr id="6" name="Slide Number Placeholder 5"/>
           <p:cNvSpPr>
             <a:spLocks noGrp="1"/>
           </p:cNvSpPr>
@@ -1047,19 +833,20 @@
     </p:spTree>
     <p:extLst>
       <p:ext uri="{BB962C8B-B14F-4D97-AF65-F5344CB8AC3E}">
-        <p14:creationId xmlns:p14="http://schemas.microsoft.com/office/powerpoint/2010/main" val="4257343394"/>
+        <p14:creationId xmlns:p14="http://schemas.microsoft.com/office/powerpoint/2010/main" val="1881829296"/>
       </p:ext>
     </p:extLst>
   </p:cSld>
   <p:clrMapOvr>
     <a:masterClrMapping/>
   </p:clrMapOvr>
+  <p:hf sldNum="0" hdr="0" ftr="0" dt="0"/>
 </p:sldLayout>
 </file>
 
 <file path=ppt/slideLayouts/slideLayout3.xml><?xml version="1.0" encoding="utf-8"?>
 <p:sldLayout xmlns:a="http://schemas.openxmlformats.org/drawingml/2006/main" xmlns:r="http://schemas.openxmlformats.org/officeDocument/2006/relationships" xmlns:p="http://schemas.openxmlformats.org/presentationml/2006/main" type="secHead" preserve="1">
-  <p:cSld name="Section Header">
+  <p:cSld name="Intestazione sezione">
     <p:spTree>
       <p:nvGrpSpPr>
         <p:cNvPr id="1" name=""/>
@@ -1074,127 +861,64 @@
           <a:chExt cx="0" cy="0"/>
         </a:xfrm>
       </p:grpSpPr>
-      <p:sp useBgFill="1">
-        <p:nvSpPr>
-          <p:cNvPr id="8" name="Rectangle 7">
-            <a:extLst>
-              <a:ext uri="{FF2B5EF4-FFF2-40B4-BE49-F238E27FC236}">
-                <a16:creationId xmlns:a16="http://schemas.microsoft.com/office/drawing/2014/main" id="{71BB59B6-79B9-97F5-AC3B-DF65899D39D8}"/>
-              </a:ext>
-            </a:extLst>
-          </p:cNvPr>
-          <p:cNvSpPr/>
-          <p:nvPr/>
+      <p:sp>
+        <p:nvSpPr>
+          <p:cNvPr id="2" name="Title 1"/>
+          <p:cNvSpPr>
+            <a:spLocks noGrp="1"/>
+          </p:cNvSpPr>
+          <p:nvPr>
+            <p:ph type="title"/>
+          </p:nvPr>
         </p:nvSpPr>
         <p:spPr>
           <a:xfrm>
-            <a:off x="0" y="0"/>
-            <a:ext cx="12192000" cy="6858000"/>
+            <a:off x="831850" y="1709738"/>
+            <a:ext cx="10515600" cy="2852737"/>
           </a:xfrm>
-          <a:prstGeom prst="rect">
-            <a:avLst/>
-          </a:prstGeom>
-          <a:ln>
-            <a:noFill/>
-          </a:ln>
         </p:spPr>
-        <p:style>
-          <a:lnRef idx="2">
-            <a:schemeClr val="accent1">
-              <a:shade val="15000"/>
-            </a:schemeClr>
-          </a:lnRef>
-          <a:fillRef idx="1">
-            <a:schemeClr val="accent1"/>
-          </a:fillRef>
-          <a:effectRef idx="0">
-            <a:schemeClr val="accent1"/>
-          </a:effectRef>
-          <a:fontRef idx="minor">
-            <a:schemeClr val="lt1"/>
-          </a:fontRef>
-        </p:style>
-        <p:txBody>
-          <a:bodyPr rtlCol="0" anchor="ctr"/>
-          <a:lstStyle/>
-          <a:p>
-            <a:pPr algn="ctr"/>
-            <a:endParaRPr lang="en-US"/>
-          </a:p>
-        </p:txBody>
-      </p:sp>
-      <p:sp>
-        <p:nvSpPr>
-          <p:cNvPr id="2" name="Title 1">
-            <a:extLst>
-              <a:ext uri="{FF2B5EF4-FFF2-40B4-BE49-F238E27FC236}">
-                <a16:creationId xmlns:a16="http://schemas.microsoft.com/office/drawing/2014/main" id="{16C78885-57B2-4930-BD7D-CBF916EDF1C6}"/>
-              </a:ext>
-            </a:extLst>
-          </p:cNvPr>
-          <p:cNvSpPr>
-            <a:spLocks noGrp="1"/>
-          </p:cNvSpPr>
-          <p:nvPr>
-            <p:ph type="title"/>
+        <p:txBody>
+          <a:bodyPr anchor="b"/>
+          <a:lstStyle>
+            <a:lvl1pPr>
+              <a:defRPr sz="6000"/>
+            </a:lvl1pPr>
+          </a:lstStyle>
+          <a:p>
+            <a:r>
+              <a:rPr lang="it-IT"/>
+              <a:t>Fare clic per modificare lo stile del titolo dello schema</a:t>
+            </a:r>
+            <a:endParaRPr lang="en-US" dirty="0"/>
+          </a:p>
+        </p:txBody>
+      </p:sp>
+      <p:sp>
+        <p:nvSpPr>
+          <p:cNvPr id="3" name="Text Placeholder 2"/>
+          <p:cNvSpPr>
+            <a:spLocks noGrp="1"/>
+          </p:cNvSpPr>
+          <p:nvPr>
+            <p:ph type="body" idx="1"/>
           </p:nvPr>
         </p:nvSpPr>
         <p:spPr>
           <a:xfrm>
-            <a:off x="640080" y="1291366"/>
-            <a:ext cx="9214884" cy="3159974"/>
+            <a:off x="831850" y="4589463"/>
+            <a:ext cx="10515600" cy="1500187"/>
           </a:xfrm>
         </p:spPr>
         <p:txBody>
-          <a:bodyPr anchor="b">
-            <a:normAutofit/>
-          </a:bodyPr>
-          <a:lstStyle>
-            <a:lvl1pPr>
-              <a:defRPr sz="5400"/>
-            </a:lvl1pPr>
-          </a:lstStyle>
-          <a:p>
-            <a:r>
-              <a:rPr lang="en-US"/>
-              <a:t>Click to edit Master title style</a:t>
-            </a:r>
-            <a:endParaRPr lang="en-US" dirty="0"/>
-          </a:p>
-        </p:txBody>
-      </p:sp>
-      <p:sp>
-        <p:nvSpPr>
-          <p:cNvPr id="3" name="Text Placeholder 2">
-            <a:extLst>
-              <a:ext uri="{FF2B5EF4-FFF2-40B4-BE49-F238E27FC236}">
-                <a16:creationId xmlns:a16="http://schemas.microsoft.com/office/drawing/2014/main" id="{9BE495E4-2F8B-4CC7-88AC-A312067E60D2}"/>
-              </a:ext>
-            </a:extLst>
-          </p:cNvPr>
-          <p:cNvSpPr>
-            <a:spLocks noGrp="1"/>
-          </p:cNvSpPr>
-          <p:nvPr>
-            <p:ph type="body" idx="1"/>
-          </p:nvPr>
-        </p:nvSpPr>
-        <p:spPr>
-          <a:xfrm>
-            <a:off x="640080" y="5018567"/>
-            <a:ext cx="7907079" cy="1073889"/>
-          </a:xfrm>
-        </p:spPr>
-        <p:txBody>
-          <a:bodyPr>
-            <a:normAutofit/>
-          </a:bodyPr>
+          <a:bodyPr/>
           <a:lstStyle>
             <a:lvl1pPr marL="0" indent="0">
               <a:buNone/>
-              <a:defRPr sz="2000">
+              <a:defRPr sz="2400">
                 <a:solidFill>
-                  <a:schemeClr val="tx1"/>
+                  <a:schemeClr val="tx1">
+                    <a:tint val="75000"/>
+                  </a:schemeClr>
                 </a:solidFill>
               </a:defRPr>
             </a:lvl1pPr>
@@ -1282,21 +1006,15 @@
           <a:p>
             <a:pPr lvl="0"/>
             <a:r>
-              <a:rPr lang="en-US"/>
-              <a:t>Click to edit Master text styles</a:t>
-            </a:r>
-          </a:p>
-        </p:txBody>
-      </p:sp>
-      <p:sp>
-        <p:nvSpPr>
-          <p:cNvPr id="4" name="Date Placeholder 3">
-            <a:extLst>
-              <a:ext uri="{FF2B5EF4-FFF2-40B4-BE49-F238E27FC236}">
-                <a16:creationId xmlns:a16="http://schemas.microsoft.com/office/drawing/2014/main" id="{F8585CC9-BAD3-4807-90BB-97DA2D6A6BE2}"/>
-              </a:ext>
-            </a:extLst>
-          </p:cNvPr>
+              <a:rPr lang="it-IT"/>
+              <a:t>Fare clic per modificare gli stili del testo dello schema</a:t>
+            </a:r>
+          </a:p>
+        </p:txBody>
+      </p:sp>
+      <p:sp>
+        <p:nvSpPr>
+          <p:cNvPr id="4" name="Date Placeholder 3"/>
           <p:cNvSpPr>
             <a:spLocks noGrp="1"/>
           </p:cNvSpPr>
@@ -1309,9 +1027,9 @@
           <a:bodyPr/>
           <a:lstStyle/>
           <a:p>
-            <a:fld id="{F9504452-5DCC-4FE2-A5C9-8A5EF6714D65}" type="datetime1">
+            <a:fld id="{7DA38F49-B3E2-4BF0-BEC7-C30D34ABBB8D}" type="datetime1">
               <a:rPr lang="en-US" smtClean="0"/>
-              <a:t>7/20/2025</a:t>
+              <a:t>7/21/2025</a:t>
             </a:fld>
             <a:endParaRPr lang="en-US"/>
           </a:p>
@@ -1319,13 +1037,7 @@
       </p:sp>
       <p:sp>
         <p:nvSpPr>
-          <p:cNvPr id="5" name="Footer Placeholder 4">
-            <a:extLst>
-              <a:ext uri="{FF2B5EF4-FFF2-40B4-BE49-F238E27FC236}">
-                <a16:creationId xmlns:a16="http://schemas.microsoft.com/office/drawing/2014/main" id="{5F108CEF-165F-4D7E-9666-5CD0156B497C}"/>
-              </a:ext>
-            </a:extLst>
-          </p:cNvPr>
+          <p:cNvPr id="5" name="Footer Placeholder 4"/>
           <p:cNvSpPr>
             <a:spLocks noGrp="1"/>
           </p:cNvSpPr>
@@ -1344,13 +1056,7 @@
       </p:sp>
       <p:sp>
         <p:nvSpPr>
-          <p:cNvPr id="6" name="Slide Number Placeholder 5">
-            <a:extLst>
-              <a:ext uri="{FF2B5EF4-FFF2-40B4-BE49-F238E27FC236}">
-                <a16:creationId xmlns:a16="http://schemas.microsoft.com/office/drawing/2014/main" id="{FE0EBC3D-3277-4D34-9F67-71040C21E3B3}"/>
-              </a:ext>
-            </a:extLst>
-          </p:cNvPr>
+          <p:cNvPr id="6" name="Slide Number Placeholder 5"/>
           <p:cNvSpPr>
             <a:spLocks noGrp="1"/>
           </p:cNvSpPr>
@@ -1371,64 +1077,23 @@
           </a:p>
         </p:txBody>
       </p:sp>
-      <p:cxnSp>
-        <p:nvCxnSpPr>
-          <p:cNvPr id="7" name="Straight Connector 6">
-            <a:extLst>
-              <a:ext uri="{FF2B5EF4-FFF2-40B4-BE49-F238E27FC236}">
-                <a16:creationId xmlns:a16="http://schemas.microsoft.com/office/drawing/2014/main" id="{FF05EAE5-4812-F718-6D75-9627884180BF}"/>
-              </a:ext>
-              <a:ext uri="{C183D7F6-B498-43B3-948B-1728B52AA6E4}">
-                <adec:decorative xmlns:adec="http://schemas.microsoft.com/office/drawing/2017/decorative" val="1"/>
-              </a:ext>
-            </a:extLst>
-          </p:cNvPr>
-          <p:cNvCxnSpPr>
-            <a:cxnSpLocks/>
-          </p:cNvCxnSpPr>
-          <p:nvPr/>
-        </p:nvCxnSpPr>
-        <p:spPr>
-          <a:xfrm>
-            <a:off x="716281" y="4715234"/>
-            <a:ext cx="978862" cy="0"/>
-          </a:xfrm>
-          <a:prstGeom prst="line">
-            <a:avLst/>
-          </a:prstGeom>
-          <a:ln w="76200"/>
-        </p:spPr>
-        <p:style>
-          <a:lnRef idx="1">
-            <a:schemeClr val="accent1"/>
-          </a:lnRef>
-          <a:fillRef idx="0">
-            <a:schemeClr val="accent1"/>
-          </a:fillRef>
-          <a:effectRef idx="0">
-            <a:schemeClr val="accent1"/>
-          </a:effectRef>
-          <a:fontRef idx="minor">
-            <a:schemeClr val="tx1"/>
-          </a:fontRef>
-        </p:style>
-      </p:cxnSp>
     </p:spTree>
     <p:extLst>
       <p:ext uri="{BB962C8B-B14F-4D97-AF65-F5344CB8AC3E}">
-        <p14:creationId xmlns:p14="http://schemas.microsoft.com/office/powerpoint/2010/main" val="2077814768"/>
+        <p14:creationId xmlns:p14="http://schemas.microsoft.com/office/powerpoint/2010/main" val="1822925689"/>
       </p:ext>
     </p:extLst>
   </p:cSld>
   <p:clrMapOvr>
     <a:masterClrMapping/>
   </p:clrMapOvr>
+  <p:hf sldNum="0" hdr="0" ftr="0" dt="0"/>
 </p:sldLayout>
 </file>
 
 <file path=ppt/slideLayouts/slideLayout4.xml><?xml version="1.0" encoding="utf-8"?>
 <p:sldLayout xmlns:a="http://schemas.openxmlformats.org/drawingml/2006/main" xmlns:r="http://schemas.openxmlformats.org/officeDocument/2006/relationships" xmlns:p="http://schemas.openxmlformats.org/presentationml/2006/main" type="twoObj" preserve="1">
-  <p:cSld name="Two Content">
+  <p:cSld name="Due contenuti">
     <p:spTree>
       <p:nvGrpSpPr>
         <p:cNvPr id="1" name=""/>
@@ -1445,13 +1110,7 @@
       </p:grpSpPr>
       <p:sp>
         <p:nvSpPr>
-          <p:cNvPr id="2" name="Title 1">
-            <a:extLst>
-              <a:ext uri="{FF2B5EF4-FFF2-40B4-BE49-F238E27FC236}">
-                <a16:creationId xmlns:a16="http://schemas.microsoft.com/office/drawing/2014/main" id="{CDB477A4-4D01-45B6-9563-0BF13BA72F7C}"/>
-              </a:ext>
-            </a:extLst>
-          </p:cNvPr>
+          <p:cNvPr id="2" name="Title 1"/>
           <p:cNvSpPr>
             <a:spLocks noGrp="1"/>
           </p:cNvSpPr>
@@ -1465,8 +1124,8 @@
           <a:lstStyle/>
           <a:p>
             <a:r>
-              <a:rPr lang="en-US"/>
-              <a:t>Click to edit Master title style</a:t>
+              <a:rPr lang="it-IT"/>
+              <a:t>Fare clic per modificare lo stile del titolo dello schema</a:t>
             </a:r>
             <a:endParaRPr lang="en-US" dirty="0"/>
           </a:p>
@@ -1474,13 +1133,7 @@
       </p:sp>
       <p:sp>
         <p:nvSpPr>
-          <p:cNvPr id="3" name="Content Placeholder 2">
-            <a:extLst>
-              <a:ext uri="{FF2B5EF4-FFF2-40B4-BE49-F238E27FC236}">
-                <a16:creationId xmlns:a16="http://schemas.microsoft.com/office/drawing/2014/main" id="{2EE17E00-96AC-45F0-82B2-9F601E9B93C2}"/>
-              </a:ext>
-            </a:extLst>
-          </p:cNvPr>
+          <p:cNvPr id="3" name="Content Placeholder 2"/>
           <p:cNvSpPr>
             <a:spLocks noGrp="1"/>
           </p:cNvSpPr>
@@ -1490,8 +1143,8 @@
         </p:nvSpPr>
         <p:spPr>
           <a:xfrm>
-            <a:off x="640080" y="2633472"/>
-            <a:ext cx="5212080" cy="3566160"/>
+            <a:off x="838200" y="1825625"/>
+            <a:ext cx="5181600" cy="4351338"/>
           </a:xfrm>
         </p:spPr>
         <p:txBody>
@@ -1500,36 +1153,36 @@
           <a:p>
             <a:pPr lvl="0"/>
             <a:r>
-              <a:rPr lang="en-US"/>
-              <a:t>Click to edit Master text styles</a:t>
+              <a:rPr lang="it-IT"/>
+              <a:t>Fare clic per modificare gli stili del testo dello schema</a:t>
             </a:r>
           </a:p>
           <a:p>
             <a:pPr lvl="1"/>
             <a:r>
-              <a:rPr lang="en-US"/>
-              <a:t>Second level</a:t>
+              <a:rPr lang="it-IT"/>
+              <a:t>Secondo livello</a:t>
             </a:r>
           </a:p>
           <a:p>
             <a:pPr lvl="2"/>
             <a:r>
-              <a:rPr lang="en-US"/>
-              <a:t>Third level</a:t>
+              <a:rPr lang="it-IT"/>
+              <a:t>Terzo livello</a:t>
             </a:r>
           </a:p>
           <a:p>
             <a:pPr lvl="3"/>
             <a:r>
-              <a:rPr lang="en-US"/>
-              <a:t>Fourth level</a:t>
+              <a:rPr lang="it-IT"/>
+              <a:t>Quarto livello</a:t>
             </a:r>
           </a:p>
           <a:p>
             <a:pPr lvl="4"/>
             <a:r>
-              <a:rPr lang="en-US"/>
-              <a:t>Fifth level</a:t>
+              <a:rPr lang="it-IT"/>
+              <a:t>Quinto livello</a:t>
             </a:r>
             <a:endParaRPr lang="en-US" dirty="0"/>
           </a:p>
@@ -1537,13 +1190,7 @@
       </p:sp>
       <p:sp>
         <p:nvSpPr>
-          <p:cNvPr id="4" name="Content Placeholder 3">
-            <a:extLst>
-              <a:ext uri="{FF2B5EF4-FFF2-40B4-BE49-F238E27FC236}">
-                <a16:creationId xmlns:a16="http://schemas.microsoft.com/office/drawing/2014/main" id="{72BA30CD-95C0-427B-A571-A7D8A53278F4}"/>
-              </a:ext>
-            </a:extLst>
-          </p:cNvPr>
+          <p:cNvPr id="4" name="Content Placeholder 3"/>
           <p:cNvSpPr>
             <a:spLocks noGrp="1"/>
           </p:cNvSpPr>
@@ -1553,8 +1200,8 @@
         </p:nvSpPr>
         <p:spPr>
           <a:xfrm>
-            <a:off x="6318928" y="2633472"/>
-            <a:ext cx="5212080" cy="3566160"/>
+            <a:off x="6172200" y="1825625"/>
+            <a:ext cx="5181600" cy="4351338"/>
           </a:xfrm>
         </p:spPr>
         <p:txBody>
@@ -1563,36 +1210,36 @@
           <a:p>
             <a:pPr lvl="0"/>
             <a:r>
-              <a:rPr lang="en-US"/>
-              <a:t>Click to edit Master text styles</a:t>
+              <a:rPr lang="it-IT"/>
+              <a:t>Fare clic per modificare gli stili del testo dello schema</a:t>
             </a:r>
           </a:p>
           <a:p>
             <a:pPr lvl="1"/>
             <a:r>
-              <a:rPr lang="en-US"/>
-              <a:t>Second level</a:t>
+              <a:rPr lang="it-IT"/>
+              <a:t>Secondo livello</a:t>
             </a:r>
           </a:p>
           <a:p>
             <a:pPr lvl="2"/>
             <a:r>
-              <a:rPr lang="en-US"/>
-              <a:t>Third level</a:t>
+              <a:rPr lang="it-IT"/>
+              <a:t>Terzo livello</a:t>
             </a:r>
           </a:p>
           <a:p>
             <a:pPr lvl="3"/>
             <a:r>
-              <a:rPr lang="en-US"/>
-              <a:t>Fourth level</a:t>
+              <a:rPr lang="it-IT"/>
+              <a:t>Quarto livello</a:t>
             </a:r>
           </a:p>
           <a:p>
             <a:pPr lvl="4"/>
             <a:r>
-              <a:rPr lang="en-US"/>
-              <a:t>Fifth level</a:t>
+              <a:rPr lang="it-IT"/>
+              <a:t>Quinto livello</a:t>
             </a:r>
             <a:endParaRPr lang="en-US" dirty="0"/>
           </a:p>
@@ -1600,13 +1247,7 @@
       </p:sp>
       <p:sp>
         <p:nvSpPr>
-          <p:cNvPr id="5" name="Date Placeholder 4">
-            <a:extLst>
-              <a:ext uri="{FF2B5EF4-FFF2-40B4-BE49-F238E27FC236}">
-                <a16:creationId xmlns:a16="http://schemas.microsoft.com/office/drawing/2014/main" id="{86F67CAC-53E4-44AF-BEAC-8FFB96F05A86}"/>
-              </a:ext>
-            </a:extLst>
-          </p:cNvPr>
+          <p:cNvPr id="5" name="Date Placeholder 4"/>
           <p:cNvSpPr>
             <a:spLocks noGrp="1"/>
           </p:cNvSpPr>
@@ -1619,9 +1260,9 @@
           <a:bodyPr/>
           <a:lstStyle/>
           <a:p>
-            <a:fld id="{E579ABC2-0180-4F3A-A895-A85BC724D472}" type="datetime1">
+            <a:fld id="{7DA38F49-B3E2-4BF0-BEC7-C30D34ABBB8D}" type="datetime1">
               <a:rPr lang="en-US" smtClean="0"/>
-              <a:t>7/20/2025</a:t>
+              <a:t>7/21/2025</a:t>
             </a:fld>
             <a:endParaRPr lang="en-US"/>
           </a:p>
@@ -1629,13 +1270,7 @@
       </p:sp>
       <p:sp>
         <p:nvSpPr>
-          <p:cNvPr id="6" name="Footer Placeholder 5">
-            <a:extLst>
-              <a:ext uri="{FF2B5EF4-FFF2-40B4-BE49-F238E27FC236}">
-                <a16:creationId xmlns:a16="http://schemas.microsoft.com/office/drawing/2014/main" id="{083D9F3A-E7F0-45E7-AFA8-0D4A669EC16C}"/>
-              </a:ext>
-            </a:extLst>
-          </p:cNvPr>
+          <p:cNvPr id="6" name="Footer Placeholder 5"/>
           <p:cNvSpPr>
             <a:spLocks noGrp="1"/>
           </p:cNvSpPr>
@@ -1654,13 +1289,7 @@
       </p:sp>
       <p:sp>
         <p:nvSpPr>
-          <p:cNvPr id="7" name="Slide Number Placeholder 6">
-            <a:extLst>
-              <a:ext uri="{FF2B5EF4-FFF2-40B4-BE49-F238E27FC236}">
-                <a16:creationId xmlns:a16="http://schemas.microsoft.com/office/drawing/2014/main" id="{3C5F008B-58BB-45FF-923F-5909DAB49D34}"/>
-              </a:ext>
-            </a:extLst>
-          </p:cNvPr>
+          <p:cNvPr id="7" name="Slide Number Placeholder 6"/>
           <p:cNvSpPr>
             <a:spLocks noGrp="1"/>
           </p:cNvSpPr>
@@ -1684,19 +1313,20 @@
     </p:spTree>
     <p:extLst>
       <p:ext uri="{BB962C8B-B14F-4D97-AF65-F5344CB8AC3E}">
-        <p14:creationId xmlns:p14="http://schemas.microsoft.com/office/powerpoint/2010/main" val="3838202949"/>
+        <p14:creationId xmlns:p14="http://schemas.microsoft.com/office/powerpoint/2010/main" val="840545353"/>
       </p:ext>
     </p:extLst>
   </p:cSld>
   <p:clrMapOvr>
     <a:masterClrMapping/>
   </p:clrMapOvr>
+  <p:hf sldNum="0" hdr="0" ftr="0" dt="0"/>
 </p:sldLayout>
 </file>
 
 <file path=ppt/slideLayouts/slideLayout5.xml><?xml version="1.0" encoding="utf-8"?>
 <p:sldLayout xmlns:a="http://schemas.openxmlformats.org/drawingml/2006/main" xmlns:r="http://schemas.openxmlformats.org/officeDocument/2006/relationships" xmlns:p="http://schemas.openxmlformats.org/presentationml/2006/main" type="twoTxTwoObj" preserve="1">
-  <p:cSld name="Comparison">
+  <p:cSld name="Confronto">
     <p:spTree>
       <p:nvGrpSpPr>
         <p:cNvPr id="1" name=""/>
@@ -1713,13 +1343,7 @@
       </p:grpSpPr>
       <p:sp>
         <p:nvSpPr>
-          <p:cNvPr id="2" name="Title 1">
-            <a:extLst>
-              <a:ext uri="{FF2B5EF4-FFF2-40B4-BE49-F238E27FC236}">
-                <a16:creationId xmlns:a16="http://schemas.microsoft.com/office/drawing/2014/main" id="{EA97B549-9E51-42E0-992A-73E775957773}"/>
-              </a:ext>
-            </a:extLst>
-          </p:cNvPr>
+          <p:cNvPr id="2" name="Title 1"/>
           <p:cNvSpPr>
             <a:spLocks noGrp="1"/>
           </p:cNvSpPr>
@@ -1729,8 +1353,8 @@
         </p:nvSpPr>
         <p:spPr>
           <a:xfrm>
-            <a:off x="640079" y="1371599"/>
-            <a:ext cx="10890929" cy="939753"/>
+            <a:off x="839788" y="365125"/>
+            <a:ext cx="10515600" cy="1325563"/>
           </a:xfrm>
         </p:spPr>
         <p:txBody>
@@ -1738,8 +1362,8 @@
           <a:lstStyle/>
           <a:p>
             <a:r>
-              <a:rPr lang="en-US"/>
-              <a:t>Click to edit Master title style</a:t>
+              <a:rPr lang="it-IT"/>
+              <a:t>Fare clic per modificare lo stile del titolo dello schema</a:t>
             </a:r>
             <a:endParaRPr lang="en-US" dirty="0"/>
           </a:p>
@@ -1747,13 +1371,7 @@
       </p:sp>
       <p:sp>
         <p:nvSpPr>
-          <p:cNvPr id="3" name="Text Placeholder 2">
-            <a:extLst>
-              <a:ext uri="{FF2B5EF4-FFF2-40B4-BE49-F238E27FC236}">
-                <a16:creationId xmlns:a16="http://schemas.microsoft.com/office/drawing/2014/main" id="{C81A5FDC-7C4B-45FB-8462-E2CE79919F33}"/>
-              </a:ext>
-            </a:extLst>
-          </p:cNvPr>
+          <p:cNvPr id="3" name="Text Placeholder 2"/>
           <p:cNvSpPr>
             <a:spLocks noGrp="1"/>
           </p:cNvSpPr>
@@ -1763,18 +1381,16 @@
         </p:nvSpPr>
         <p:spPr>
           <a:xfrm>
-            <a:off x="640079" y="2311352"/>
-            <a:ext cx="5212080" cy="695373"/>
+            <a:off x="839788" y="1681163"/>
+            <a:ext cx="5157787" cy="823912"/>
           </a:xfrm>
         </p:spPr>
         <p:txBody>
-          <a:bodyPr anchor="b">
-            <a:normAutofit/>
-          </a:bodyPr>
+          <a:bodyPr anchor="b"/>
           <a:lstStyle>
             <a:lvl1pPr marL="0" indent="0">
               <a:buNone/>
-              <a:defRPr sz="1800" b="1" cap="all" spc="300" baseline="0"/>
+              <a:defRPr sz="2400" b="1"/>
             </a:lvl1pPr>
             <a:lvl2pPr marL="457200" indent="0">
               <a:buNone/>
@@ -1812,21 +1428,15 @@
           <a:p>
             <a:pPr lvl="0"/>
             <a:r>
-              <a:rPr lang="en-US"/>
-              <a:t>Click to edit Master text styles</a:t>
-            </a:r>
-          </a:p>
-        </p:txBody>
-      </p:sp>
-      <p:sp>
-        <p:nvSpPr>
-          <p:cNvPr id="4" name="Content Placeholder 3">
-            <a:extLst>
-              <a:ext uri="{FF2B5EF4-FFF2-40B4-BE49-F238E27FC236}">
-                <a16:creationId xmlns:a16="http://schemas.microsoft.com/office/drawing/2014/main" id="{CBD8B686-2E92-45B9-A3D7-9DCAA0C50B36}"/>
-              </a:ext>
-            </a:extLst>
-          </p:cNvPr>
+              <a:rPr lang="it-IT"/>
+              <a:t>Fare clic per modificare gli stili del testo dello schema</a:t>
+            </a:r>
+          </a:p>
+        </p:txBody>
+      </p:sp>
+      <p:sp>
+        <p:nvSpPr>
+          <p:cNvPr id="4" name="Content Placeholder 3"/>
           <p:cNvSpPr>
             <a:spLocks noGrp="1"/>
           </p:cNvSpPr>
@@ -1836,8 +1446,8 @@
         </p:nvSpPr>
         <p:spPr>
           <a:xfrm>
-            <a:off x="640079" y="3006725"/>
-            <a:ext cx="5212080" cy="3191256"/>
+            <a:off x="839788" y="2505075"/>
+            <a:ext cx="5157787" cy="3684588"/>
           </a:xfrm>
         </p:spPr>
         <p:txBody>
@@ -1846,36 +1456,36 @@
           <a:p>
             <a:pPr lvl="0"/>
             <a:r>
-              <a:rPr lang="en-US"/>
-              <a:t>Click to edit Master text styles</a:t>
+              <a:rPr lang="it-IT"/>
+              <a:t>Fare clic per modificare gli stili del testo dello schema</a:t>
             </a:r>
           </a:p>
           <a:p>
             <a:pPr lvl="1"/>
             <a:r>
-              <a:rPr lang="en-US"/>
-              <a:t>Second level</a:t>
+              <a:rPr lang="it-IT"/>
+              <a:t>Secondo livello</a:t>
             </a:r>
           </a:p>
           <a:p>
             <a:pPr lvl="2"/>
             <a:r>
-              <a:rPr lang="en-US"/>
-              <a:t>Third level</a:t>
+              <a:rPr lang="it-IT"/>
+              <a:t>Terzo livello</a:t>
             </a:r>
           </a:p>
           <a:p>
             <a:pPr lvl="3"/>
             <a:r>
-              <a:rPr lang="en-US"/>
-              <a:t>Fourth level</a:t>
+              <a:rPr lang="it-IT"/>
+              <a:t>Quarto livello</a:t>
             </a:r>
           </a:p>
           <a:p>
             <a:pPr lvl="4"/>
             <a:r>
-              <a:rPr lang="en-US"/>
-              <a:t>Fifth level</a:t>
+              <a:rPr lang="it-IT"/>
+              <a:t>Quinto livello</a:t>
             </a:r>
             <a:endParaRPr lang="en-US" dirty="0"/>
           </a:p>
@@ -1883,13 +1493,7 @@
       </p:sp>
       <p:sp>
         <p:nvSpPr>
-          <p:cNvPr id="5" name="Text Placeholder 4">
-            <a:extLst>
-              <a:ext uri="{FF2B5EF4-FFF2-40B4-BE49-F238E27FC236}">
-                <a16:creationId xmlns:a16="http://schemas.microsoft.com/office/drawing/2014/main" id="{86ADB526-4A44-47B6-8D14-93202E590AA7}"/>
-              </a:ext>
-            </a:extLst>
-          </p:cNvPr>
+          <p:cNvPr id="5" name="Text Placeholder 4"/>
           <p:cNvSpPr>
             <a:spLocks noGrp="1"/>
           </p:cNvSpPr>
@@ -1899,18 +1503,16 @@
         </p:nvSpPr>
         <p:spPr>
           <a:xfrm>
-            <a:off x="6318928" y="2311352"/>
-            <a:ext cx="5212080" cy="695373"/>
+            <a:off x="6172200" y="1681163"/>
+            <a:ext cx="5183188" cy="823912"/>
           </a:xfrm>
         </p:spPr>
         <p:txBody>
-          <a:bodyPr anchor="b">
-            <a:normAutofit/>
-          </a:bodyPr>
+          <a:bodyPr anchor="b"/>
           <a:lstStyle>
             <a:lvl1pPr marL="0" indent="0">
               <a:buNone/>
-              <a:defRPr sz="1800" b="1" cap="all" spc="300" baseline="0"/>
+              <a:defRPr sz="2400" b="1"/>
             </a:lvl1pPr>
             <a:lvl2pPr marL="457200" indent="0">
               <a:buNone/>
@@ -1948,21 +1550,15 @@
           <a:p>
             <a:pPr lvl="0"/>
             <a:r>
-              <a:rPr lang="en-US"/>
-              <a:t>Click to edit Master text styles</a:t>
-            </a:r>
-          </a:p>
-        </p:txBody>
-      </p:sp>
-      <p:sp>
-        <p:nvSpPr>
-          <p:cNvPr id="6" name="Content Placeholder 5">
-            <a:extLst>
-              <a:ext uri="{FF2B5EF4-FFF2-40B4-BE49-F238E27FC236}">
-                <a16:creationId xmlns:a16="http://schemas.microsoft.com/office/drawing/2014/main" id="{574177CA-5C13-4311-BFD3-B98FBD942DA5}"/>
-              </a:ext>
-            </a:extLst>
-          </p:cNvPr>
+              <a:rPr lang="it-IT"/>
+              <a:t>Fare clic per modificare gli stili del testo dello schema</a:t>
+            </a:r>
+          </a:p>
+        </p:txBody>
+      </p:sp>
+      <p:sp>
+        <p:nvSpPr>
+          <p:cNvPr id="6" name="Content Placeholder 5"/>
           <p:cNvSpPr>
             <a:spLocks noGrp="1"/>
           </p:cNvSpPr>
@@ -1972,8 +1568,8 @@
         </p:nvSpPr>
         <p:spPr>
           <a:xfrm>
-            <a:off x="6318928" y="3006725"/>
-            <a:ext cx="5212080" cy="3191256"/>
+            <a:off x="6172200" y="2505075"/>
+            <a:ext cx="5183188" cy="3684588"/>
           </a:xfrm>
         </p:spPr>
         <p:txBody>
@@ -1982,49 +1578,44 @@
           <a:p>
             <a:pPr lvl="0"/>
             <a:r>
-              <a:rPr lang="en-US"/>
-              <a:t>Click to edit Master text styles</a:t>
+              <a:rPr lang="it-IT"/>
+              <a:t>Fare clic per modificare gli stili del testo dello schema</a:t>
             </a:r>
           </a:p>
           <a:p>
             <a:pPr lvl="1"/>
             <a:r>
-              <a:rPr lang="en-US"/>
-              <a:t>Second level</a:t>
+              <a:rPr lang="it-IT"/>
+              <a:t>Secondo livello</a:t>
             </a:r>
           </a:p>
           <a:p>
             <a:pPr lvl="2"/>
             <a:r>
-              <a:rPr lang="en-US"/>
-              <a:t>Third level</a:t>
+              <a:rPr lang="it-IT"/>
+              <a:t>Terzo livello</a:t>
             </a:r>
           </a:p>
           <a:p>
             <a:pPr lvl="3"/>
             <a:r>
-              <a:rPr lang="en-US"/>
-              <a:t>Fourth level</a:t>
+              <a:rPr lang="it-IT"/>
+              <a:t>Quarto livello</a:t>
             </a:r>
           </a:p>
           <a:p>
             <a:pPr lvl="4"/>
             <a:r>
-              <a:rPr lang="en-US"/>
-              <a:t>Fifth level</a:t>
-            </a:r>
-          </a:p>
-        </p:txBody>
-      </p:sp>
-      <p:sp>
-        <p:nvSpPr>
-          <p:cNvPr id="7" name="Date Placeholder 6">
-            <a:extLst>
-              <a:ext uri="{FF2B5EF4-FFF2-40B4-BE49-F238E27FC236}">
-                <a16:creationId xmlns:a16="http://schemas.microsoft.com/office/drawing/2014/main" id="{4DEA255A-4CB5-40CA-B756-1AA5E27C20BF}"/>
-              </a:ext>
-            </a:extLst>
-          </p:cNvPr>
+              <a:rPr lang="it-IT"/>
+              <a:t>Quinto livello</a:t>
+            </a:r>
+            <a:endParaRPr lang="en-US" dirty="0"/>
+          </a:p>
+        </p:txBody>
+      </p:sp>
+      <p:sp>
+        <p:nvSpPr>
+          <p:cNvPr id="7" name="Date Placeholder 6"/>
           <p:cNvSpPr>
             <a:spLocks noGrp="1"/>
           </p:cNvSpPr>
@@ -2037,9 +1628,9 @@
           <a:bodyPr/>
           <a:lstStyle/>
           <a:p>
-            <a:fld id="{6AEEA9BA-4E8F-439E-BEA4-91FBA01E3F5F}" type="datetime1">
+            <a:fld id="{7DA38F49-B3E2-4BF0-BEC7-C30D34ABBB8D}" type="datetime1">
               <a:rPr lang="en-US" smtClean="0"/>
-              <a:t>7/20/2025</a:t>
+              <a:t>7/21/2025</a:t>
             </a:fld>
             <a:endParaRPr lang="en-US"/>
           </a:p>
@@ -2047,13 +1638,7 @@
       </p:sp>
       <p:sp>
         <p:nvSpPr>
-          <p:cNvPr id="8" name="Footer Placeholder 7">
-            <a:extLst>
-              <a:ext uri="{FF2B5EF4-FFF2-40B4-BE49-F238E27FC236}">
-                <a16:creationId xmlns:a16="http://schemas.microsoft.com/office/drawing/2014/main" id="{FF3072C4-10F1-49B8-B0BF-69204EDDCFAE}"/>
-              </a:ext>
-            </a:extLst>
-          </p:cNvPr>
+          <p:cNvPr id="8" name="Footer Placeholder 7"/>
           <p:cNvSpPr>
             <a:spLocks noGrp="1"/>
           </p:cNvSpPr>
@@ -2072,13 +1657,7 @@
       </p:sp>
       <p:sp>
         <p:nvSpPr>
-          <p:cNvPr id="9" name="Slide Number Placeholder 8">
-            <a:extLst>
-              <a:ext uri="{FF2B5EF4-FFF2-40B4-BE49-F238E27FC236}">
-                <a16:creationId xmlns:a16="http://schemas.microsoft.com/office/drawing/2014/main" id="{4A5ACC97-44C1-4887-909B-E6732D3C1FFE}"/>
-              </a:ext>
-            </a:extLst>
-          </p:cNvPr>
+          <p:cNvPr id="9" name="Slide Number Placeholder 8"/>
           <p:cNvSpPr>
             <a:spLocks noGrp="1"/>
           </p:cNvSpPr>
@@ -2102,19 +1681,20 @@
     </p:spTree>
     <p:extLst>
       <p:ext uri="{BB962C8B-B14F-4D97-AF65-F5344CB8AC3E}">
-        <p14:creationId xmlns:p14="http://schemas.microsoft.com/office/powerpoint/2010/main" val="2761922353"/>
+        <p14:creationId xmlns:p14="http://schemas.microsoft.com/office/powerpoint/2010/main" val="1527065998"/>
       </p:ext>
     </p:extLst>
   </p:cSld>
   <p:clrMapOvr>
     <a:masterClrMapping/>
   </p:clrMapOvr>
+  <p:hf sldNum="0" hdr="0" ftr="0" dt="0"/>
 </p:sldLayout>
 </file>
 
 <file path=ppt/slideLayouts/slideLayout6.xml><?xml version="1.0" encoding="utf-8"?>
 <p:sldLayout xmlns:a="http://schemas.openxmlformats.org/drawingml/2006/main" xmlns:r="http://schemas.openxmlformats.org/officeDocument/2006/relationships" xmlns:p="http://schemas.openxmlformats.org/presentationml/2006/main" type="titleOnly" preserve="1">
-  <p:cSld name="Title Only">
+  <p:cSld name="Solo titolo">
     <p:spTree>
       <p:nvGrpSpPr>
         <p:cNvPr id="1" name=""/>
@@ -2131,13 +1711,7 @@
       </p:grpSpPr>
       <p:sp>
         <p:nvSpPr>
-          <p:cNvPr id="2" name="Title 1">
-            <a:extLst>
-              <a:ext uri="{FF2B5EF4-FFF2-40B4-BE49-F238E27FC236}">
-                <a16:creationId xmlns:a16="http://schemas.microsoft.com/office/drawing/2014/main" id="{AE27D313-943A-47E0-8A7A-DFFBCC297AB7}"/>
-              </a:ext>
-            </a:extLst>
-          </p:cNvPr>
+          <p:cNvPr id="2" name="Title 1"/>
           <p:cNvSpPr>
             <a:spLocks noGrp="1"/>
           </p:cNvSpPr>
@@ -2151,8 +1725,8 @@
           <a:lstStyle/>
           <a:p>
             <a:r>
-              <a:rPr lang="en-US"/>
-              <a:t>Click to edit Master title style</a:t>
+              <a:rPr lang="it-IT"/>
+              <a:t>Fare clic per modificare lo stile del titolo dello schema</a:t>
             </a:r>
             <a:endParaRPr lang="en-US" dirty="0"/>
           </a:p>
@@ -2160,13 +1734,7 @@
       </p:sp>
       <p:sp>
         <p:nvSpPr>
-          <p:cNvPr id="3" name="Date Placeholder 2">
-            <a:extLst>
-              <a:ext uri="{FF2B5EF4-FFF2-40B4-BE49-F238E27FC236}">
-                <a16:creationId xmlns:a16="http://schemas.microsoft.com/office/drawing/2014/main" id="{23AC25A7-81C8-4AA1-AD9F-C78A451FDE2E}"/>
-              </a:ext>
-            </a:extLst>
-          </p:cNvPr>
+          <p:cNvPr id="3" name="Date Placeholder 2"/>
           <p:cNvSpPr>
             <a:spLocks noGrp="1"/>
           </p:cNvSpPr>
@@ -2179,9 +1747,9 @@
           <a:bodyPr/>
           <a:lstStyle/>
           <a:p>
-            <a:fld id="{BE15BF18-0007-481C-AA29-413124BC3EE7}" type="datetime1">
+            <a:fld id="{7DA38F49-B3E2-4BF0-BEC7-C30D34ABBB8D}" type="datetime1">
               <a:rPr lang="en-US" smtClean="0"/>
-              <a:t>7/20/2025</a:t>
+              <a:t>7/21/2025</a:t>
             </a:fld>
             <a:endParaRPr lang="en-US"/>
           </a:p>
@@ -2189,13 +1757,7 @@
       </p:sp>
       <p:sp>
         <p:nvSpPr>
-          <p:cNvPr id="4" name="Footer Placeholder 3">
-            <a:extLst>
-              <a:ext uri="{FF2B5EF4-FFF2-40B4-BE49-F238E27FC236}">
-                <a16:creationId xmlns:a16="http://schemas.microsoft.com/office/drawing/2014/main" id="{6EF54740-6022-46B2-9C55-B60E9651684F}"/>
-              </a:ext>
-            </a:extLst>
-          </p:cNvPr>
+          <p:cNvPr id="4" name="Footer Placeholder 3"/>
           <p:cNvSpPr>
             <a:spLocks noGrp="1"/>
           </p:cNvSpPr>
@@ -2214,13 +1776,7 @@
       </p:sp>
       <p:sp>
         <p:nvSpPr>
-          <p:cNvPr id="5" name="Slide Number Placeholder 4">
-            <a:extLst>
-              <a:ext uri="{FF2B5EF4-FFF2-40B4-BE49-F238E27FC236}">
-                <a16:creationId xmlns:a16="http://schemas.microsoft.com/office/drawing/2014/main" id="{089497C9-6B5E-46D6-8FE9-0A5E0CF7F95B}"/>
-              </a:ext>
-            </a:extLst>
-          </p:cNvPr>
+          <p:cNvPr id="5" name="Slide Number Placeholder 4"/>
           <p:cNvSpPr>
             <a:spLocks noGrp="1"/>
           </p:cNvSpPr>
@@ -2244,19 +1800,20 @@
     </p:spTree>
     <p:extLst>
       <p:ext uri="{BB962C8B-B14F-4D97-AF65-F5344CB8AC3E}">
-        <p14:creationId xmlns:p14="http://schemas.microsoft.com/office/powerpoint/2010/main" val="978115043"/>
+        <p14:creationId xmlns:p14="http://schemas.microsoft.com/office/powerpoint/2010/main" val="1210305460"/>
       </p:ext>
     </p:extLst>
   </p:cSld>
   <p:clrMapOvr>
     <a:masterClrMapping/>
   </p:clrMapOvr>
+  <p:hf sldNum="0" hdr="0" ftr="0" dt="0"/>
 </p:sldLayout>
 </file>
 
 <file path=ppt/slideLayouts/slideLayout7.xml><?xml version="1.0" encoding="utf-8"?>
 <p:sldLayout xmlns:a="http://schemas.openxmlformats.org/drawingml/2006/main" xmlns:r="http://schemas.openxmlformats.org/officeDocument/2006/relationships" xmlns:p="http://schemas.openxmlformats.org/presentationml/2006/main" type="blank" preserve="1">
-  <p:cSld name="Blank">
+  <p:cSld name="Vuota">
     <p:spTree>
       <p:nvGrpSpPr>
         <p:cNvPr id="1" name=""/>
@@ -2271,64 +1828,9 @@
           <a:chExt cx="0" cy="0"/>
         </a:xfrm>
       </p:grpSpPr>
-      <p:sp useBgFill="1">
-        <p:nvSpPr>
-          <p:cNvPr id="5" name="Rectangle 4">
-            <a:extLst>
-              <a:ext uri="{FF2B5EF4-FFF2-40B4-BE49-F238E27FC236}">
-                <a16:creationId xmlns:a16="http://schemas.microsoft.com/office/drawing/2014/main" id="{149F9F0F-FB8C-5565-247C-BDCC156B5CAF}"/>
-              </a:ext>
-            </a:extLst>
-          </p:cNvPr>
-          <p:cNvSpPr/>
-          <p:nvPr/>
-        </p:nvSpPr>
-        <p:spPr>
-          <a:xfrm>
-            <a:off x="0" y="0"/>
-            <a:ext cx="12192000" cy="6858000"/>
-          </a:xfrm>
-          <a:prstGeom prst="rect">
-            <a:avLst/>
-          </a:prstGeom>
-          <a:ln>
-            <a:noFill/>
-          </a:ln>
-        </p:spPr>
-        <p:style>
-          <a:lnRef idx="2">
-            <a:schemeClr val="accent1">
-              <a:shade val="15000"/>
-            </a:schemeClr>
-          </a:lnRef>
-          <a:fillRef idx="1">
-            <a:schemeClr val="accent1"/>
-          </a:fillRef>
-          <a:effectRef idx="0">
-            <a:schemeClr val="accent1"/>
-          </a:effectRef>
-          <a:fontRef idx="minor">
-            <a:schemeClr val="lt1"/>
-          </a:fontRef>
-        </p:style>
-        <p:txBody>
-          <a:bodyPr rtlCol="0" anchor="ctr"/>
-          <a:lstStyle/>
-          <a:p>
-            <a:pPr algn="ctr"/>
-            <a:endParaRPr lang="en-US"/>
-          </a:p>
-        </p:txBody>
-      </p:sp>
-      <p:sp>
-        <p:nvSpPr>
-          <p:cNvPr id="2" name="Date Placeholder 1">
-            <a:extLst>
-              <a:ext uri="{FF2B5EF4-FFF2-40B4-BE49-F238E27FC236}">
-                <a16:creationId xmlns:a16="http://schemas.microsoft.com/office/drawing/2014/main" id="{92740D3C-270A-401A-810C-2F86BBBB87D4}"/>
-              </a:ext>
-            </a:extLst>
-          </p:cNvPr>
+      <p:sp>
+        <p:nvSpPr>
+          <p:cNvPr id="2" name="Date Placeholder 1"/>
           <p:cNvSpPr>
             <a:spLocks noGrp="1"/>
           </p:cNvSpPr>
@@ -2341,9 +1843,9 @@
           <a:bodyPr/>
           <a:lstStyle/>
           <a:p>
-            <a:fld id="{09BE9870-3748-43AD-B547-02A075CB4A1D}" type="datetime1">
+            <a:fld id="{7DA38F49-B3E2-4BF0-BEC7-C30D34ABBB8D}" type="datetime1">
               <a:rPr lang="en-US" smtClean="0"/>
-              <a:t>7/20/2025</a:t>
+              <a:t>7/21/2025</a:t>
             </a:fld>
             <a:endParaRPr lang="en-US"/>
           </a:p>
@@ -2351,13 +1853,7 @@
       </p:sp>
       <p:sp>
         <p:nvSpPr>
-          <p:cNvPr id="3" name="Footer Placeholder 2">
-            <a:extLst>
-              <a:ext uri="{FF2B5EF4-FFF2-40B4-BE49-F238E27FC236}">
-                <a16:creationId xmlns:a16="http://schemas.microsoft.com/office/drawing/2014/main" id="{DDCBE9F8-1765-4F36-A4DE-1DB136025AC9}"/>
-              </a:ext>
-            </a:extLst>
-          </p:cNvPr>
+          <p:cNvPr id="3" name="Footer Placeholder 2"/>
           <p:cNvSpPr>
             <a:spLocks noGrp="1"/>
           </p:cNvSpPr>
@@ -2376,13 +1872,7 @@
       </p:sp>
       <p:sp>
         <p:nvSpPr>
-          <p:cNvPr id="4" name="Slide Number Placeholder 3">
-            <a:extLst>
-              <a:ext uri="{FF2B5EF4-FFF2-40B4-BE49-F238E27FC236}">
-                <a16:creationId xmlns:a16="http://schemas.microsoft.com/office/drawing/2014/main" id="{7790CF9E-A6C6-4873-ADBE-7A2939319E58}"/>
-              </a:ext>
-            </a:extLst>
-          </p:cNvPr>
+          <p:cNvPr id="4" name="Slide Number Placeholder 3"/>
           <p:cNvSpPr>
             <a:spLocks noGrp="1"/>
           </p:cNvSpPr>
@@ -2406,19 +1896,20 @@
     </p:spTree>
     <p:extLst>
       <p:ext uri="{BB962C8B-B14F-4D97-AF65-F5344CB8AC3E}">
-        <p14:creationId xmlns:p14="http://schemas.microsoft.com/office/powerpoint/2010/main" val="2371483868"/>
+        <p14:creationId xmlns:p14="http://schemas.microsoft.com/office/powerpoint/2010/main" val="4155961836"/>
       </p:ext>
     </p:extLst>
   </p:cSld>
   <p:clrMapOvr>
     <a:masterClrMapping/>
   </p:clrMapOvr>
+  <p:hf sldNum="0" hdr="0" ftr="0" dt="0"/>
 </p:sldLayout>
 </file>
 
 <file path=ppt/slideLayouts/slideLayout8.xml><?xml version="1.0" encoding="utf-8"?>
 <p:sldLayout xmlns:a="http://schemas.openxmlformats.org/drawingml/2006/main" xmlns:r="http://schemas.openxmlformats.org/officeDocument/2006/relationships" xmlns:p="http://schemas.openxmlformats.org/presentationml/2006/main" type="objTx" preserve="1">
-  <p:cSld name="Content with Caption">
+  <p:cSld name="Contenuto con didascalia">
     <p:spTree>
       <p:nvGrpSpPr>
         <p:cNvPr id="1" name=""/>
@@ -2435,13 +1926,7 @@
       </p:grpSpPr>
       <p:sp>
         <p:nvSpPr>
-          <p:cNvPr id="2" name="Title 1">
-            <a:extLst>
-              <a:ext uri="{FF2B5EF4-FFF2-40B4-BE49-F238E27FC236}">
-                <a16:creationId xmlns:a16="http://schemas.microsoft.com/office/drawing/2014/main" id="{2F08CDF8-00AD-4441-A6D5-9D7A659EB6C0}"/>
-              </a:ext>
-            </a:extLst>
-          </p:cNvPr>
+          <p:cNvPr id="2" name="Title 1"/>
           <p:cNvSpPr>
             <a:spLocks noGrp="1"/>
           </p:cNvSpPr>
@@ -2451,23 +1936,21 @@
         </p:nvSpPr>
         <p:spPr>
           <a:xfrm>
-            <a:off x="640080" y="1371600"/>
-            <a:ext cx="3859397" cy="1451723"/>
+            <a:off x="839788" y="457200"/>
+            <a:ext cx="3932237" cy="1600200"/>
           </a:xfrm>
         </p:spPr>
         <p:txBody>
-          <a:bodyPr anchor="t">
-            <a:normAutofit/>
-          </a:bodyPr>
+          <a:bodyPr anchor="b"/>
           <a:lstStyle>
             <a:lvl1pPr>
-              <a:defRPr sz="3600"/>
+              <a:defRPr sz="3200"/>
             </a:lvl1pPr>
           </a:lstStyle>
           <a:p>
             <a:r>
-              <a:rPr lang="en-US"/>
-              <a:t>Click to edit Master title style</a:t>
+              <a:rPr lang="it-IT"/>
+              <a:t>Fare clic per modificare lo stile del titolo dello schema</a:t>
             </a:r>
             <a:endParaRPr lang="en-US" dirty="0"/>
           </a:p>
@@ -2475,13 +1958,7 @@
       </p:sp>
       <p:sp>
         <p:nvSpPr>
-          <p:cNvPr id="3" name="Content Placeholder 2">
-            <a:extLst>
-              <a:ext uri="{FF2B5EF4-FFF2-40B4-BE49-F238E27FC236}">
-                <a16:creationId xmlns:a16="http://schemas.microsoft.com/office/drawing/2014/main" id="{28C330AF-CB7E-420A-AE8A-E02E90325885}"/>
-              </a:ext>
-            </a:extLst>
-          </p:cNvPr>
+          <p:cNvPr id="3" name="Content Placeholder 2"/>
           <p:cNvSpPr>
             <a:spLocks noGrp="1"/>
           </p:cNvSpPr>
@@ -2491,29 +1968,27 @@
         </p:nvSpPr>
         <p:spPr>
           <a:xfrm>
-            <a:off x="4936519" y="1031001"/>
-            <a:ext cx="6594490" cy="5166360"/>
+            <a:off x="5183188" y="987425"/>
+            <a:ext cx="6172200" cy="4873625"/>
           </a:xfrm>
         </p:spPr>
         <p:txBody>
-          <a:bodyPr>
-            <a:normAutofit/>
-          </a:bodyPr>
+          <a:bodyPr/>
           <a:lstStyle>
             <a:lvl1pPr>
-              <a:defRPr sz="2800"/>
+              <a:defRPr sz="3200"/>
             </a:lvl1pPr>
             <a:lvl2pPr>
-              <a:defRPr sz="2400"/>
+              <a:defRPr sz="2800"/>
             </a:lvl2pPr>
             <a:lvl3pPr>
-              <a:defRPr sz="2000"/>
+              <a:defRPr sz="2400"/>
             </a:lvl3pPr>
             <a:lvl4pPr>
-              <a:defRPr sz="1800"/>
+              <a:defRPr sz="2000"/>
             </a:lvl4pPr>
             <a:lvl5pPr>
-              <a:defRPr sz="1800"/>
+              <a:defRPr sz="2000"/>
             </a:lvl5pPr>
             <a:lvl6pPr>
               <a:defRPr sz="2000"/>
@@ -2531,36 +2006,36 @@
           <a:p>
             <a:pPr lvl="0"/>
             <a:r>
-              <a:rPr lang="en-US"/>
-              <a:t>Click to edit Master text styles</a:t>
+              <a:rPr lang="it-IT"/>
+              <a:t>Fare clic per modificare gli stili del testo dello schema</a:t>
             </a:r>
           </a:p>
           <a:p>
             <a:pPr lvl="1"/>
             <a:r>
-              <a:rPr lang="en-US"/>
-              <a:t>Second level</a:t>
+              <a:rPr lang="it-IT"/>
+              <a:t>Secondo livello</a:t>
             </a:r>
           </a:p>
           <a:p>
             <a:pPr lvl="2"/>
             <a:r>
-              <a:rPr lang="en-US"/>
-              <a:t>Third level</a:t>
+              <a:rPr lang="it-IT"/>
+              <a:t>Terzo livello</a:t>
             </a:r>
           </a:p>
           <a:p>
             <a:pPr lvl="3"/>
             <a:r>
-              <a:rPr lang="en-US"/>
-              <a:t>Fourth level</a:t>
+              <a:rPr lang="it-IT"/>
+              <a:t>Quarto livello</a:t>
             </a:r>
           </a:p>
           <a:p>
             <a:pPr lvl="4"/>
             <a:r>
-              <a:rPr lang="en-US"/>
-              <a:t>Fifth level</a:t>
+              <a:rPr lang="it-IT"/>
+              <a:t>Quinto livello</a:t>
             </a:r>
             <a:endParaRPr lang="en-US" dirty="0"/>
           </a:p>
@@ -2568,13 +2043,7 @@
       </p:sp>
       <p:sp>
         <p:nvSpPr>
-          <p:cNvPr id="4" name="Text Placeholder 3">
-            <a:extLst>
-              <a:ext uri="{FF2B5EF4-FFF2-40B4-BE49-F238E27FC236}">
-                <a16:creationId xmlns:a16="http://schemas.microsoft.com/office/drawing/2014/main" id="{F43257AD-2422-4CDA-9C55-700F4B5BF251}"/>
-              </a:ext>
-            </a:extLst>
-          </p:cNvPr>
+          <p:cNvPr id="4" name="Text Placeholder 3"/>
           <p:cNvSpPr>
             <a:spLocks noGrp="1"/>
           </p:cNvSpPr>
@@ -2584,8 +2053,8 @@
         </p:nvSpPr>
         <p:spPr>
           <a:xfrm>
-            <a:off x="640080" y="2972168"/>
-            <a:ext cx="3859397" cy="3226826"/>
+            <a:off x="839788" y="2057400"/>
+            <a:ext cx="3932237" cy="3811588"/>
           </a:xfrm>
         </p:spPr>
         <p:txBody>
@@ -2631,21 +2100,15 @@
           <a:p>
             <a:pPr lvl="0"/>
             <a:r>
-              <a:rPr lang="en-US"/>
-              <a:t>Click to edit Master text styles</a:t>
-            </a:r>
-          </a:p>
-        </p:txBody>
-      </p:sp>
-      <p:sp>
-        <p:nvSpPr>
-          <p:cNvPr id="5" name="Date Placeholder 4">
-            <a:extLst>
-              <a:ext uri="{FF2B5EF4-FFF2-40B4-BE49-F238E27FC236}">
-                <a16:creationId xmlns:a16="http://schemas.microsoft.com/office/drawing/2014/main" id="{E51B7454-C1CC-46F2-A6FB-1FE786C48F49}"/>
-              </a:ext>
-            </a:extLst>
-          </p:cNvPr>
+              <a:rPr lang="it-IT"/>
+              <a:t>Fare clic per modificare gli stili del testo dello schema</a:t>
+            </a:r>
+          </a:p>
+        </p:txBody>
+      </p:sp>
+      <p:sp>
+        <p:nvSpPr>
+          <p:cNvPr id="5" name="Date Placeholder 4"/>
           <p:cNvSpPr>
             <a:spLocks noGrp="1"/>
           </p:cNvSpPr>
@@ -2658,9 +2121,9 @@
           <a:bodyPr/>
           <a:lstStyle/>
           <a:p>
-            <a:fld id="{558E7897-33C5-4F1A-9307-D068E37F3DC7}" type="datetime1">
+            <a:fld id="{7DA38F49-B3E2-4BF0-BEC7-C30D34ABBB8D}" type="datetime1">
               <a:rPr lang="en-US" smtClean="0"/>
-              <a:t>7/20/2025</a:t>
+              <a:t>7/21/2025</a:t>
             </a:fld>
             <a:endParaRPr lang="en-US"/>
           </a:p>
@@ -2668,13 +2131,7 @@
       </p:sp>
       <p:sp>
         <p:nvSpPr>
-          <p:cNvPr id="6" name="Footer Placeholder 5">
-            <a:extLst>
-              <a:ext uri="{FF2B5EF4-FFF2-40B4-BE49-F238E27FC236}">
-                <a16:creationId xmlns:a16="http://schemas.microsoft.com/office/drawing/2014/main" id="{49077DBE-6CC7-421B-AB5E-341E20BD922B}"/>
-              </a:ext>
-            </a:extLst>
-          </p:cNvPr>
+          <p:cNvPr id="6" name="Footer Placeholder 5"/>
           <p:cNvSpPr>
             <a:spLocks noGrp="1"/>
           </p:cNvSpPr>
@@ -2693,13 +2150,7 @@
       </p:sp>
       <p:sp>
         <p:nvSpPr>
-          <p:cNvPr id="7" name="Slide Number Placeholder 6">
-            <a:extLst>
-              <a:ext uri="{FF2B5EF4-FFF2-40B4-BE49-F238E27FC236}">
-                <a16:creationId xmlns:a16="http://schemas.microsoft.com/office/drawing/2014/main" id="{FD6EAB8F-7526-4CDB-B782-FAD8B3E70B0A}"/>
-              </a:ext>
-            </a:extLst>
-          </p:cNvPr>
+          <p:cNvPr id="7" name="Slide Number Placeholder 6"/>
           <p:cNvSpPr>
             <a:spLocks noGrp="1"/>
           </p:cNvSpPr>
@@ -2723,19 +2174,20 @@
     </p:spTree>
     <p:extLst>
       <p:ext uri="{BB962C8B-B14F-4D97-AF65-F5344CB8AC3E}">
-        <p14:creationId xmlns:p14="http://schemas.microsoft.com/office/powerpoint/2010/main" val="3800227424"/>
+        <p14:creationId xmlns:p14="http://schemas.microsoft.com/office/powerpoint/2010/main" val="3778620960"/>
       </p:ext>
     </p:extLst>
   </p:cSld>
   <p:clrMapOvr>
     <a:masterClrMapping/>
   </p:clrMapOvr>
+  <p:hf sldNum="0" hdr="0" ftr="0" dt="0"/>
 </p:sldLayout>
 </file>
 
 <file path=ppt/slideLayouts/slideLayout9.xml><?xml version="1.0" encoding="utf-8"?>
 <p:sldLayout xmlns:a="http://schemas.openxmlformats.org/drawingml/2006/main" xmlns:r="http://schemas.openxmlformats.org/officeDocument/2006/relationships" xmlns:p="http://schemas.openxmlformats.org/presentationml/2006/main" type="picTx" preserve="1">
-  <p:cSld name="Picture with Caption">
+  <p:cSld name="Immagine con didascalia">
     <p:spTree>
       <p:nvGrpSpPr>
         <p:cNvPr id="1" name=""/>
@@ -2752,13 +2204,7 @@
       </p:grpSpPr>
       <p:sp>
         <p:nvSpPr>
-          <p:cNvPr id="2" name="Title 1">
-            <a:extLst>
-              <a:ext uri="{FF2B5EF4-FFF2-40B4-BE49-F238E27FC236}">
-                <a16:creationId xmlns:a16="http://schemas.microsoft.com/office/drawing/2014/main" id="{1231647F-5A61-44C9-81DC-331C9AE5DDAE}"/>
-              </a:ext>
-            </a:extLst>
-          </p:cNvPr>
+          <p:cNvPr id="2" name="Title 1"/>
           <p:cNvSpPr>
             <a:spLocks noGrp="1"/>
           </p:cNvSpPr>
@@ -2768,23 +2214,21 @@
         </p:nvSpPr>
         <p:spPr>
           <a:xfrm>
-            <a:off x="640080" y="1371600"/>
-            <a:ext cx="3859397" cy="1451723"/>
+            <a:off x="839788" y="457200"/>
+            <a:ext cx="3932237" cy="1600200"/>
           </a:xfrm>
         </p:spPr>
         <p:txBody>
-          <a:bodyPr anchor="t">
-            <a:normAutofit/>
-          </a:bodyPr>
+          <a:bodyPr anchor="b"/>
           <a:lstStyle>
             <a:lvl1pPr>
-              <a:defRPr sz="3600"/>
+              <a:defRPr sz="3200"/>
             </a:lvl1pPr>
           </a:lstStyle>
           <a:p>
             <a:r>
-              <a:rPr lang="en-US"/>
-              <a:t>Click to edit Master title style</a:t>
+              <a:rPr lang="it-IT"/>
+              <a:t>Fare clic per modificare lo stile del titolo dello schema</a:t>
             </a:r>
             <a:endParaRPr lang="en-US" dirty="0"/>
           </a:p>
@@ -2792,15 +2236,9 @@
       </p:sp>
       <p:sp>
         <p:nvSpPr>
-          <p:cNvPr id="3" name="Picture Placeholder 2">
-            <a:extLst>
-              <a:ext uri="{FF2B5EF4-FFF2-40B4-BE49-F238E27FC236}">
-                <a16:creationId xmlns:a16="http://schemas.microsoft.com/office/drawing/2014/main" id="{31627A0F-F1B8-49BE-A0FF-7FE16E3BDCC1}"/>
-              </a:ext>
-            </a:extLst>
-          </p:cNvPr>
-          <p:cNvSpPr>
-            <a:spLocks noGrp="1"/>
+          <p:cNvPr id="3" name="Picture Placeholder 2"/>
+          <p:cNvSpPr>
+            <a:spLocks noGrp="1" noChangeAspect="1"/>
           </p:cNvSpPr>
           <p:nvPr>
             <p:ph type="pic" idx="1"/>
@@ -2808,12 +2246,12 @@
         </p:nvSpPr>
         <p:spPr>
           <a:xfrm>
-            <a:off x="4937760" y="1033271"/>
-            <a:ext cx="6592824" cy="5166360"/>
+            <a:off x="5183188" y="987425"/>
+            <a:ext cx="6172200" cy="4873625"/>
           </a:xfrm>
         </p:spPr>
         <p:txBody>
-          <a:bodyPr/>
+          <a:bodyPr anchor="t"/>
           <a:lstStyle>
             <a:lvl1pPr marL="0" indent="0">
               <a:buNone/>
@@ -2854,8 +2292,8 @@
           </a:lstStyle>
           <a:p>
             <a:r>
-              <a:rPr lang="en-US"/>
-              <a:t>Click icon to add picture</a:t>
+              <a:rPr lang="it-IT"/>
+              <a:t>Fare clic sull'icona per inserire un'immagine</a:t>
             </a:r>
             <a:endParaRPr lang="en-US" dirty="0"/>
           </a:p>
@@ -2863,13 +2301,7 @@
       </p:sp>
       <p:sp>
         <p:nvSpPr>
-          <p:cNvPr id="4" name="Text Placeholder 3">
-            <a:extLst>
-              <a:ext uri="{FF2B5EF4-FFF2-40B4-BE49-F238E27FC236}">
-                <a16:creationId xmlns:a16="http://schemas.microsoft.com/office/drawing/2014/main" id="{C86D1BD6-1519-4431-9FAF-7D4F4129972C}"/>
-              </a:ext>
-            </a:extLst>
-          </p:cNvPr>
+          <p:cNvPr id="4" name="Text Placeholder 3"/>
           <p:cNvSpPr>
             <a:spLocks noGrp="1"/>
           </p:cNvSpPr>
@@ -2879,8 +2311,8 @@
         </p:nvSpPr>
         <p:spPr>
           <a:xfrm>
-            <a:off x="640080" y="2972167"/>
-            <a:ext cx="3859397" cy="3226825"/>
+            <a:off x="839788" y="2057400"/>
+            <a:ext cx="3932237" cy="3811588"/>
           </a:xfrm>
         </p:spPr>
         <p:txBody>
@@ -2926,21 +2358,15 @@
           <a:p>
             <a:pPr lvl="0"/>
             <a:r>
-              <a:rPr lang="en-US"/>
-              <a:t>Click to edit Master text styles</a:t>
-            </a:r>
-          </a:p>
-        </p:txBody>
-      </p:sp>
-      <p:sp>
-        <p:nvSpPr>
-          <p:cNvPr id="5" name="Date Placeholder 4">
-            <a:extLst>
-              <a:ext uri="{FF2B5EF4-FFF2-40B4-BE49-F238E27FC236}">
-                <a16:creationId xmlns:a16="http://schemas.microsoft.com/office/drawing/2014/main" id="{25A587A0-353B-42C2-BA96-B1ADEDF642BE}"/>
-              </a:ext>
-            </a:extLst>
-          </p:cNvPr>
+              <a:rPr lang="it-IT"/>
+              <a:t>Fare clic per modificare gli stili del testo dello schema</a:t>
+            </a:r>
+          </a:p>
+        </p:txBody>
+      </p:sp>
+      <p:sp>
+        <p:nvSpPr>
+          <p:cNvPr id="5" name="Date Placeholder 4"/>
           <p:cNvSpPr>
             <a:spLocks noGrp="1"/>
           </p:cNvSpPr>
@@ -2953,9 +2379,9 @@
           <a:bodyPr/>
           <a:lstStyle/>
           <a:p>
-            <a:fld id="{82E171BA-CC09-47C8-A6DF-F5C5CB59CEEC}" type="datetime1">
+            <a:fld id="{7DA38F49-B3E2-4BF0-BEC7-C30D34ABBB8D}" type="datetime1">
               <a:rPr lang="en-US" smtClean="0"/>
-              <a:t>7/20/2025</a:t>
+              <a:t>7/21/2025</a:t>
             </a:fld>
             <a:endParaRPr lang="en-US"/>
           </a:p>
@@ -2963,13 +2389,7 @@
       </p:sp>
       <p:sp>
         <p:nvSpPr>
-          <p:cNvPr id="6" name="Footer Placeholder 5">
-            <a:extLst>
-              <a:ext uri="{FF2B5EF4-FFF2-40B4-BE49-F238E27FC236}">
-                <a16:creationId xmlns:a16="http://schemas.microsoft.com/office/drawing/2014/main" id="{44D5A88E-3957-4B76-B1BE-4164029217B5}"/>
-              </a:ext>
-            </a:extLst>
-          </p:cNvPr>
+          <p:cNvPr id="6" name="Footer Placeholder 5"/>
           <p:cNvSpPr>
             <a:spLocks noGrp="1"/>
           </p:cNvSpPr>
@@ -2988,13 +2408,7 @@
       </p:sp>
       <p:sp>
         <p:nvSpPr>
-          <p:cNvPr id="7" name="Slide Number Placeholder 6">
-            <a:extLst>
-              <a:ext uri="{FF2B5EF4-FFF2-40B4-BE49-F238E27FC236}">
-                <a16:creationId xmlns:a16="http://schemas.microsoft.com/office/drawing/2014/main" id="{A5F7C5FD-E56A-4C66-8F23-087F95A2FD0E}"/>
-              </a:ext>
-            </a:extLst>
-          </p:cNvPr>
+          <p:cNvPr id="7" name="Slide Number Placeholder 6"/>
           <p:cNvSpPr>
             <a:spLocks noGrp="1"/>
           </p:cNvSpPr>
@@ -3018,13 +2432,14 @@
     </p:spTree>
     <p:extLst>
       <p:ext uri="{BB962C8B-B14F-4D97-AF65-F5344CB8AC3E}">
-        <p14:creationId xmlns:p14="http://schemas.microsoft.com/office/powerpoint/2010/main" val="3467512665"/>
+        <p14:creationId xmlns:p14="http://schemas.microsoft.com/office/powerpoint/2010/main" val="2682964234"/>
       </p:ext>
     </p:extLst>
   </p:cSld>
   <p:clrMapOvr>
     <a:masterClrMapping/>
   </p:clrMapOvr>
+  <p:hf sldNum="0" hdr="0" ftr="0" dt="0"/>
 </p:sldLayout>
 </file>
 
@@ -3052,13 +2467,7 @@
       </p:grpSpPr>
       <p:sp>
         <p:nvSpPr>
-          <p:cNvPr id="2" name="Title Placeholder 1">
-            <a:extLst>
-              <a:ext uri="{FF2B5EF4-FFF2-40B4-BE49-F238E27FC236}">
-                <a16:creationId xmlns:a16="http://schemas.microsoft.com/office/drawing/2014/main" id="{1AB4E786-7636-4278-8595-D365D28A796A}"/>
-              </a:ext>
-            </a:extLst>
-          </p:cNvPr>
+          <p:cNvPr id="2" name="Title Placeholder 1"/>
           <p:cNvSpPr>
             <a:spLocks noGrp="1"/>
           </p:cNvSpPr>
@@ -3068,22 +2477,22 @@
         </p:nvSpPr>
         <p:spPr>
           <a:xfrm>
-            <a:off x="640079" y="1371601"/>
-            <a:ext cx="10890929" cy="1097280"/>
+            <a:off x="838200" y="365125"/>
+            <a:ext cx="10515600" cy="1325563"/>
           </a:xfrm>
           <a:prstGeom prst="rect">
             <a:avLst/>
           </a:prstGeom>
         </p:spPr>
         <p:txBody>
-          <a:bodyPr vert="horz" lIns="91440" tIns="45720" rIns="91440" bIns="45720" rtlCol="0" anchor="t">
+          <a:bodyPr vert="horz" lIns="91440" tIns="45720" rIns="91440" bIns="45720" rtlCol="0" anchor="ctr">
             <a:normAutofit/>
           </a:bodyPr>
           <a:lstStyle/>
           <a:p>
             <a:r>
-              <a:rPr lang="en-US"/>
-              <a:t>Click to edit Master title style</a:t>
+              <a:rPr lang="it-IT"/>
+              <a:t>Fare clic per modificare lo stile del titolo dello schema</a:t>
             </a:r>
             <a:endParaRPr lang="en-US" dirty="0"/>
           </a:p>
@@ -3091,13 +2500,7 @@
       </p:sp>
       <p:sp>
         <p:nvSpPr>
-          <p:cNvPr id="3" name="Text Placeholder 2">
-            <a:extLst>
-              <a:ext uri="{FF2B5EF4-FFF2-40B4-BE49-F238E27FC236}">
-                <a16:creationId xmlns:a16="http://schemas.microsoft.com/office/drawing/2014/main" id="{EA740849-7059-4C70-992B-5304D2EE9BAB}"/>
-              </a:ext>
-            </a:extLst>
-          </p:cNvPr>
+          <p:cNvPr id="3" name="Text Placeholder 2"/>
           <p:cNvSpPr>
             <a:spLocks noGrp="1"/>
           </p:cNvSpPr>
@@ -3107,8 +2510,8 @@
         </p:nvSpPr>
         <p:spPr>
           <a:xfrm>
-            <a:off x="640080" y="2633472"/>
-            <a:ext cx="10890928" cy="3566160"/>
+            <a:off x="838200" y="1825625"/>
+            <a:ext cx="10515600" cy="4351338"/>
           </a:xfrm>
           <a:prstGeom prst="rect">
             <a:avLst/>
@@ -3122,36 +2525,36 @@
           <a:p>
             <a:pPr lvl="0"/>
             <a:r>
-              <a:rPr lang="en-US"/>
-              <a:t>Click to edit Master text styles</a:t>
+              <a:rPr lang="it-IT"/>
+              <a:t>Fare clic per modificare gli stili del testo dello schema</a:t>
             </a:r>
           </a:p>
           <a:p>
             <a:pPr lvl="1"/>
             <a:r>
-              <a:rPr lang="en-US"/>
-              <a:t>Second level</a:t>
+              <a:rPr lang="it-IT"/>
+              <a:t>Secondo livello</a:t>
             </a:r>
           </a:p>
           <a:p>
             <a:pPr lvl="2"/>
             <a:r>
-              <a:rPr lang="en-US"/>
-              <a:t>Third level</a:t>
+              <a:rPr lang="it-IT"/>
+              <a:t>Terzo livello</a:t>
             </a:r>
           </a:p>
           <a:p>
             <a:pPr lvl="3"/>
             <a:r>
-              <a:rPr lang="en-US"/>
-              <a:t>Fourth level</a:t>
+              <a:rPr lang="it-IT"/>
+              <a:t>Quarto livello</a:t>
             </a:r>
           </a:p>
           <a:p>
             <a:pPr lvl="4"/>
             <a:r>
-              <a:rPr lang="en-US"/>
-              <a:t>Fifth level</a:t>
+              <a:rPr lang="it-IT"/>
+              <a:t>Quinto livello</a:t>
             </a:r>
             <a:endParaRPr lang="en-US" dirty="0"/>
           </a:p>
@@ -3159,13 +2562,7 @@
       </p:sp>
       <p:sp>
         <p:nvSpPr>
-          <p:cNvPr id="4" name="Date Placeholder 3">
-            <a:extLst>
-              <a:ext uri="{FF2B5EF4-FFF2-40B4-BE49-F238E27FC236}">
-                <a16:creationId xmlns:a16="http://schemas.microsoft.com/office/drawing/2014/main" id="{D09FEBF6-CEA6-4332-87B3-697807571C84}"/>
-              </a:ext>
-            </a:extLst>
-          </p:cNvPr>
+          <p:cNvPr id="4" name="Date Placeholder 3"/>
           <p:cNvSpPr>
             <a:spLocks noGrp="1"/>
           </p:cNvSpPr>
@@ -3175,7 +2572,7 @@
         </p:nvSpPr>
         <p:spPr>
           <a:xfrm>
-            <a:off x="640080" y="6356350"/>
+            <a:off x="838200" y="6356350"/>
             <a:ext cx="2743200" cy="365125"/>
           </a:xfrm>
           <a:prstGeom prst="rect">
@@ -3186,9 +2583,11 @@
           <a:bodyPr vert="horz" lIns="91440" tIns="45720" rIns="91440" bIns="45720" rtlCol="0" anchor="ctr"/>
           <a:lstStyle>
             <a:lvl1pPr algn="l">
-              <a:defRPr sz="900" b="1" cap="all" spc="300" baseline="0">
+              <a:defRPr sz="1200">
                 <a:solidFill>
-                  <a:schemeClr val="tx1"/>
+                  <a:schemeClr val="tx1">
+                    <a:tint val="75000"/>
+                  </a:schemeClr>
                 </a:solidFill>
               </a:defRPr>
             </a:lvl1pPr>
@@ -3196,7 +2595,7 @@
           <a:p>
             <a:fld id="{7DA38F49-B3E2-4BF0-BEC7-C30D34ABBB8D}" type="datetime1">
               <a:rPr lang="en-US" smtClean="0"/>
-              <a:t>7/20/2025</a:t>
+              <a:t>7/21/2025</a:t>
             </a:fld>
             <a:endParaRPr lang="en-US"/>
           </a:p>
@@ -3204,13 +2603,7 @@
       </p:sp>
       <p:sp>
         <p:nvSpPr>
-          <p:cNvPr id="5" name="Footer Placeholder 4">
-            <a:extLst>
-              <a:ext uri="{FF2B5EF4-FFF2-40B4-BE49-F238E27FC236}">
-                <a16:creationId xmlns:a16="http://schemas.microsoft.com/office/drawing/2014/main" id="{BC6BAF94-621C-43E1-BA0C-410A6899031B}"/>
-              </a:ext>
-            </a:extLst>
-          </p:cNvPr>
+          <p:cNvPr id="5" name="Footer Placeholder 4"/>
           <p:cNvSpPr>
             <a:spLocks noGrp="1"/>
           </p:cNvSpPr>
@@ -3220,8 +2613,8 @@
         </p:nvSpPr>
         <p:spPr>
           <a:xfrm>
-            <a:off x="6767622" y="6356350"/>
-            <a:ext cx="4040373" cy="365125"/>
+            <a:off x="4038600" y="6356350"/>
+            <a:ext cx="4114800" cy="365125"/>
           </a:xfrm>
           <a:prstGeom prst="rect">
             <a:avLst/>
@@ -3230,10 +2623,12 @@
         <p:txBody>
           <a:bodyPr vert="horz" lIns="91440" tIns="45720" rIns="91440" bIns="45720" rtlCol="0" anchor="ctr"/>
           <a:lstStyle>
-            <a:lvl1pPr algn="r">
-              <a:defRPr sz="900" b="1" cap="all" spc="300" baseline="0">
+            <a:lvl1pPr algn="ctr">
+              <a:defRPr sz="1200">
                 <a:solidFill>
-                  <a:schemeClr val="tx1"/>
+                  <a:schemeClr val="tx1">
+                    <a:tint val="75000"/>
+                  </a:schemeClr>
                 </a:solidFill>
               </a:defRPr>
             </a:lvl1pPr>
@@ -3245,13 +2640,7 @@
       </p:sp>
       <p:sp>
         <p:nvSpPr>
-          <p:cNvPr id="6" name="Slide Number Placeholder 5">
-            <a:extLst>
-              <a:ext uri="{FF2B5EF4-FFF2-40B4-BE49-F238E27FC236}">
-                <a16:creationId xmlns:a16="http://schemas.microsoft.com/office/drawing/2014/main" id="{137D19E5-9E16-48C9-AAE2-0C70679A8D7B}"/>
-              </a:ext>
-            </a:extLst>
-          </p:cNvPr>
+          <p:cNvPr id="6" name="Slide Number Placeholder 5"/>
           <p:cNvSpPr>
             <a:spLocks noGrp="1"/>
           </p:cNvSpPr>
@@ -3261,8 +2650,8 @@
         </p:nvSpPr>
         <p:spPr>
           <a:xfrm>
-            <a:off x="10807995" y="6356350"/>
-            <a:ext cx="723014" cy="365125"/>
+            <a:off x="8610600" y="6356350"/>
+            <a:ext cx="2743200" cy="365125"/>
           </a:xfrm>
           <a:prstGeom prst="rect">
             <a:avLst/>
@@ -3272,9 +2661,11 @@
           <a:bodyPr vert="horz" lIns="91440" tIns="45720" rIns="91440" bIns="45720" rtlCol="0" anchor="ctr"/>
           <a:lstStyle>
             <a:lvl1pPr algn="r">
-              <a:defRPr sz="900" b="1" cap="all" spc="300" baseline="0">
+              <a:defRPr sz="1200">
                 <a:solidFill>
-                  <a:schemeClr val="tx1"/>
+                  <a:schemeClr val="tx1">
+                    <a:tint val="75000"/>
+                  </a:schemeClr>
                 </a:solidFill>
               </a:defRPr>
             </a:lvl1pPr>
@@ -3288,81 +2679,39 @@
           </a:p>
         </p:txBody>
       </p:sp>
-      <p:cxnSp>
-        <p:nvCxnSpPr>
-          <p:cNvPr id="9" name="Straight Connector 8">
-            <a:extLst>
-              <a:ext uri="{FF2B5EF4-FFF2-40B4-BE49-F238E27FC236}">
-                <a16:creationId xmlns:a16="http://schemas.microsoft.com/office/drawing/2014/main" id="{118E06E4-607B-144B-382B-AD3D06B1EE8C}"/>
-              </a:ext>
-              <a:ext uri="{C183D7F6-B498-43B3-948B-1728B52AA6E4}">
-                <adec:decorative xmlns:adec="http://schemas.microsoft.com/office/drawing/2017/decorative" val="1"/>
-              </a:ext>
-            </a:extLst>
-          </p:cNvPr>
-          <p:cNvCxnSpPr>
-            <a:cxnSpLocks/>
-          </p:cNvCxnSpPr>
-          <p:nvPr/>
-        </p:nvCxnSpPr>
-        <p:spPr>
-          <a:xfrm>
-            <a:off x="713232" y="1031001"/>
-            <a:ext cx="978862" cy="0"/>
-          </a:xfrm>
-          <a:prstGeom prst="line">
-            <a:avLst/>
-          </a:prstGeom>
-          <a:ln w="76200"/>
-        </p:spPr>
-        <p:style>
-          <a:lnRef idx="1">
-            <a:schemeClr val="accent1"/>
-          </a:lnRef>
-          <a:fillRef idx="0">
-            <a:schemeClr val="accent1"/>
-          </a:fillRef>
-          <a:effectRef idx="0">
-            <a:schemeClr val="accent1"/>
-          </a:effectRef>
-          <a:fontRef idx="minor">
-            <a:schemeClr val="tx1"/>
-          </a:fontRef>
-        </p:style>
-      </p:cxnSp>
     </p:spTree>
     <p:extLst>
       <p:ext uri="{BB962C8B-B14F-4D97-AF65-F5344CB8AC3E}">
-        <p14:creationId xmlns:p14="http://schemas.microsoft.com/office/powerpoint/2010/main" val="943375524"/>
+        <p14:creationId xmlns:p14="http://schemas.microsoft.com/office/powerpoint/2010/main" val="637324892"/>
       </p:ext>
     </p:extLst>
   </p:cSld>
   <p:clrMap bg1="lt1" tx1="dk1" bg2="lt2" tx2="dk2" accent1="accent1" accent2="accent2" accent3="accent3" accent4="accent4" accent5="accent5" accent6="accent6" hlink="hlink" folHlink="folHlink"/>
   <p:sldLayoutIdLst>
-    <p:sldLayoutId id="2147483668" r:id="rId1"/>
-    <p:sldLayoutId id="2147483669" r:id="rId2"/>
-    <p:sldLayoutId id="2147483670" r:id="rId3"/>
-    <p:sldLayoutId id="2147483671" r:id="rId4"/>
-    <p:sldLayoutId id="2147483672" r:id="rId5"/>
-    <p:sldLayoutId id="2147483666" r:id="rId6"/>
-    <p:sldLayoutId id="2147483662" r:id="rId7"/>
-    <p:sldLayoutId id="2147483663" r:id="rId8"/>
-    <p:sldLayoutId id="2147483664" r:id="rId9"/>
-    <p:sldLayoutId id="2147483665" r:id="rId10"/>
-    <p:sldLayoutId id="2147483667" r:id="rId11"/>
+    <p:sldLayoutId id="2147483716" r:id="rId1"/>
+    <p:sldLayoutId id="2147483717" r:id="rId2"/>
+    <p:sldLayoutId id="2147483718" r:id="rId3"/>
+    <p:sldLayoutId id="2147483719" r:id="rId4"/>
+    <p:sldLayoutId id="2147483720" r:id="rId5"/>
+    <p:sldLayoutId id="2147483721" r:id="rId6"/>
+    <p:sldLayoutId id="2147483722" r:id="rId7"/>
+    <p:sldLayoutId id="2147483723" r:id="rId8"/>
+    <p:sldLayoutId id="2147483724" r:id="rId9"/>
+    <p:sldLayoutId id="2147483725" r:id="rId10"/>
+    <p:sldLayoutId id="2147483726" r:id="rId11"/>
   </p:sldLayoutIdLst>
   <p:hf sldNum="0" hdr="0" ftr="0" dt="0"/>
   <p:txStyles>
     <p:titleStyle>
       <a:lvl1pPr algn="l" defTabSz="914400" rtl="0" eaLnBrk="1" latinLnBrk="0" hangingPunct="1">
         <a:lnSpc>
-          <a:spcPct val="100000"/>
+          <a:spcPct val="90000"/>
         </a:lnSpc>
         <a:spcBef>
           <a:spcPct val="0"/>
         </a:spcBef>
         <a:buNone/>
-        <a:defRPr sz="4000" b="1" kern="1200">
+        <a:defRPr sz="4400" kern="1200">
           <a:solidFill>
             <a:schemeClr val="tx1"/>
           </a:solidFill>
@@ -3375,12 +2724,47 @@
     <p:bodyStyle>
       <a:lvl1pPr marL="228600" indent="-228600" algn="l" defTabSz="914400" rtl="0" eaLnBrk="1" latinLnBrk="0" hangingPunct="1">
         <a:lnSpc>
-          <a:spcPct val="120000"/>
+          <a:spcPct val="90000"/>
         </a:lnSpc>
         <a:spcBef>
           <a:spcPts val="1000"/>
         </a:spcBef>
-        <a:buSzPct val="87000"/>
+        <a:buFont typeface="Arial" panose="020B0604020202020204" pitchFamily="34" charset="0"/>
+        <a:buChar char="•"/>
+        <a:defRPr sz="2800" kern="1200">
+          <a:solidFill>
+            <a:schemeClr val="tx1"/>
+          </a:solidFill>
+          <a:latin typeface="+mn-lt"/>
+          <a:ea typeface="+mn-ea"/>
+          <a:cs typeface="+mn-cs"/>
+        </a:defRPr>
+      </a:lvl1pPr>
+      <a:lvl2pPr marL="685800" indent="-228600" algn="l" defTabSz="914400" rtl="0" eaLnBrk="1" latinLnBrk="0" hangingPunct="1">
+        <a:lnSpc>
+          <a:spcPct val="90000"/>
+        </a:lnSpc>
+        <a:spcBef>
+          <a:spcPts val="500"/>
+        </a:spcBef>
+        <a:buFont typeface="Arial" panose="020B0604020202020204" pitchFamily="34" charset="0"/>
+        <a:buChar char="•"/>
+        <a:defRPr sz="2400" kern="1200">
+          <a:solidFill>
+            <a:schemeClr val="tx1"/>
+          </a:solidFill>
+          <a:latin typeface="+mn-lt"/>
+          <a:ea typeface="+mn-ea"/>
+          <a:cs typeface="+mn-cs"/>
+        </a:defRPr>
+      </a:lvl2pPr>
+      <a:lvl3pPr marL="1143000" indent="-228600" algn="l" defTabSz="914400" rtl="0" eaLnBrk="1" latinLnBrk="0" hangingPunct="1">
+        <a:lnSpc>
+          <a:spcPct val="90000"/>
+        </a:lnSpc>
+        <a:spcBef>
+          <a:spcPts val="500"/>
+        </a:spcBef>
         <a:buFont typeface="Arial" panose="020B0604020202020204" pitchFamily="34" charset="0"/>
         <a:buChar char="•"/>
         <a:defRPr sz="2000" kern="1200">
@@ -3391,15 +2775,14 @@
           <a:ea typeface="+mn-ea"/>
           <a:cs typeface="+mn-cs"/>
         </a:defRPr>
-      </a:lvl1pPr>
-      <a:lvl2pPr marL="493776" indent="-228600" algn="l" defTabSz="914400" rtl="0" eaLnBrk="1" latinLnBrk="0" hangingPunct="1">
+      </a:lvl3pPr>
+      <a:lvl4pPr marL="1600200" indent="-228600" algn="l" defTabSz="914400" rtl="0" eaLnBrk="1" latinLnBrk="0" hangingPunct="1">
         <a:lnSpc>
-          <a:spcPct val="120000"/>
+          <a:spcPct val="90000"/>
         </a:lnSpc>
         <a:spcBef>
           <a:spcPts val="500"/>
         </a:spcBef>
-        <a:buSzPct val="87000"/>
         <a:buFont typeface="Arial" panose="020B0604020202020204" pitchFamily="34" charset="0"/>
         <a:buChar char="•"/>
         <a:defRPr sz="1800" kern="1200">
@@ -3410,56 +2793,17 @@
           <a:ea typeface="+mn-ea"/>
           <a:cs typeface="+mn-cs"/>
         </a:defRPr>
-      </a:lvl2pPr>
-      <a:lvl3pPr marL="731520" indent="-228600" algn="l" defTabSz="914400" rtl="0" eaLnBrk="1" latinLnBrk="0" hangingPunct="1">
+      </a:lvl4pPr>
+      <a:lvl5pPr marL="2057400" indent="-228600" algn="l" defTabSz="914400" rtl="0" eaLnBrk="1" latinLnBrk="0" hangingPunct="1">
         <a:lnSpc>
-          <a:spcPct val="120000"/>
+          <a:spcPct val="90000"/>
         </a:lnSpc>
         <a:spcBef>
           <a:spcPts val="500"/>
         </a:spcBef>
-        <a:buSzPct val="87000"/>
         <a:buFont typeface="Arial" panose="020B0604020202020204" pitchFamily="34" charset="0"/>
         <a:buChar char="•"/>
-        <a:defRPr sz="1600" kern="1200">
-          <a:solidFill>
-            <a:schemeClr val="tx1"/>
-          </a:solidFill>
-          <a:latin typeface="+mn-lt"/>
-          <a:ea typeface="+mn-ea"/>
-          <a:cs typeface="+mn-cs"/>
-        </a:defRPr>
-      </a:lvl3pPr>
-      <a:lvl4pPr marL="1051560" indent="-285750" algn="l" defTabSz="914400" rtl="0" eaLnBrk="1" latinLnBrk="0" hangingPunct="1">
-        <a:lnSpc>
-          <a:spcPct val="120000"/>
-        </a:lnSpc>
-        <a:spcBef>
-          <a:spcPts val="500"/>
-        </a:spcBef>
-        <a:buSzPct val="87000"/>
-        <a:buFont typeface="Arial" panose="020B0604020202020204" pitchFamily="34" charset="0"/>
-        <a:buChar char="•"/>
-        <a:defRPr sz="1400" kern="1200">
-          <a:solidFill>
-            <a:schemeClr val="tx1"/>
-          </a:solidFill>
-          <a:latin typeface="+mn-lt"/>
-          <a:ea typeface="+mn-ea"/>
-          <a:cs typeface="+mn-cs"/>
-        </a:defRPr>
-      </a:lvl4pPr>
-      <a:lvl5pPr marL="1298448" indent="-228600" algn="l" defTabSz="914400" rtl="0" eaLnBrk="1" latinLnBrk="0" hangingPunct="1">
-        <a:lnSpc>
-          <a:spcPct val="120000"/>
-        </a:lnSpc>
-        <a:spcBef>
-          <a:spcPts val="500"/>
-        </a:spcBef>
-        <a:buSzPct val="87000"/>
-        <a:buFont typeface="Arial" panose="020B0604020202020204" pitchFamily="34" charset="0"/>
-        <a:buChar char="•"/>
-        <a:defRPr sz="1400" kern="1200">
+        <a:defRPr sz="1800" kern="1200">
           <a:solidFill>
             <a:schemeClr val="tx1"/>
           </a:solidFill>
@@ -3665,111 +3009,6 @@
           <a:chExt cx="0" cy="0"/>
         </a:xfrm>
       </p:grpSpPr>
-      <p:sp useBgFill="1">
-        <p:nvSpPr>
-          <p:cNvPr id="9" name="Rectangle 8">
-            <a:extLst>
-              <a:ext uri="{FF2B5EF4-FFF2-40B4-BE49-F238E27FC236}">
-                <a16:creationId xmlns:a16="http://schemas.microsoft.com/office/drawing/2014/main" id="{CFD1D2CD-954D-4C4D-B505-05EAD159B230}"/>
-              </a:ext>
-              <a:ext uri="{C183D7F6-B498-43B3-948B-1728B52AA6E4}">
-                <adec:decorative xmlns:adec="http://schemas.microsoft.com/office/drawing/2017/decorative" val="1"/>
-              </a:ext>
-            </a:extLst>
-          </p:cNvPr>
-          <p:cNvSpPr>
-            <a:spLocks noGrp="1" noRot="1" noChangeAspect="1" noMove="1" noResize="1" noEditPoints="1" noAdjustHandles="1" noChangeArrowheads="1" noChangeShapeType="1" noTextEdit="1"/>
-          </p:cNvSpPr>
-          <p:nvPr>
-            <p:extLst>
-              <p:ext uri="{386F3935-93C4-4BCD-93E2-E3B085C9AB24}">
-                <p16:designElem xmlns:p16="http://schemas.microsoft.com/office/powerpoint/2015/main" val="1"/>
-              </p:ext>
-            </p:extLst>
-          </p:nvPr>
-        </p:nvSpPr>
-        <p:spPr>
-          <a:xfrm>
-            <a:off x="0" y="0"/>
-            <a:ext cx="12192000" cy="6858000"/>
-          </a:xfrm>
-          <a:prstGeom prst="rect">
-            <a:avLst/>
-          </a:prstGeom>
-          <a:ln w="12700" cap="flat" cmpd="sng" algn="ctr">
-            <a:noFill/>
-            <a:prstDash val="solid"/>
-            <a:miter lim="800000"/>
-          </a:ln>
-          <a:effectLst/>
-          <a:extLst>
-            <a:ext uri="{91240B29-F687-4F45-9708-019B960494DF}">
-              <a14:hiddenLine xmlns:a14="http://schemas.microsoft.com/office/drawing/2010/main" w="12700" cap="flat" cmpd="sng" algn="ctr">
-                <a:solidFill>
-                  <a:schemeClr val="accent1">
-                    <a:shade val="50000"/>
-                  </a:schemeClr>
-                </a:solidFill>
-                <a:prstDash val="solid"/>
-                <a:miter lim="800000"/>
-              </a14:hiddenLine>
-            </a:ext>
-          </a:extLst>
-        </p:spPr>
-        <p:style>
-          <a:lnRef idx="2">
-            <a:schemeClr val="accent1">
-              <a:shade val="50000"/>
-            </a:schemeClr>
-          </a:lnRef>
-          <a:fillRef idx="1">
-            <a:schemeClr val="accent1"/>
-          </a:fillRef>
-          <a:effectRef idx="0">
-            <a:schemeClr val="accent1"/>
-          </a:effectRef>
-          <a:fontRef idx="minor">
-            <a:schemeClr val="lt1"/>
-          </a:fontRef>
-        </p:style>
-        <p:txBody>
-          <a:bodyPr rtlCol="0" anchor="ctr"/>
-          <a:lstStyle/>
-          <a:p>
-            <a:pPr marL="0" marR="0" lvl="0" indent="0" algn="ctr" defTabSz="914400" rtl="0" eaLnBrk="1" fontAlgn="auto" latinLnBrk="0" hangingPunct="1">
-              <a:lnSpc>
-                <a:spcPct val="100000"/>
-              </a:lnSpc>
-              <a:spcBef>
-                <a:spcPts val="0"/>
-              </a:spcBef>
-              <a:spcAft>
-                <a:spcPts val="0"/>
-              </a:spcAft>
-              <a:buClrTx/>
-              <a:buSzTx/>
-              <a:buFontTx/>
-              <a:buNone/>
-              <a:tabLst/>
-              <a:defRPr/>
-            </a:pPr>
-            <a:endParaRPr kumimoji="0" lang="en-US" sz="1800" b="0" i="0" u="none" strike="noStrike" kern="1200" cap="none" spc="0" normalizeH="0" baseline="0" noProof="0">
-              <a:ln>
-                <a:noFill/>
-              </a:ln>
-              <a:solidFill>
-                <a:prstClr val="white"/>
-              </a:solidFill>
-              <a:effectLst/>
-              <a:uLnTx/>
-              <a:uFillTx/>
-              <a:latin typeface="Grandview Display"/>
-              <a:ea typeface="+mn-ea"/>
-              <a:cs typeface="+mn-cs"/>
-            </a:endParaRPr>
-          </a:p>
-        </p:txBody>
-      </p:sp>
       <p:sp>
         <p:nvSpPr>
           <p:cNvPr id="2" name="Titolo 1">
@@ -3813,54 +3052,59 @@
           </a:p>
         </p:txBody>
       </p:sp>
-      <p:cxnSp>
-        <p:nvCxnSpPr>
-          <p:cNvPr id="11" name="Straight Connector 10">
+      <p:sp>
+        <p:nvSpPr>
+          <p:cNvPr id="8" name="Sottotitolo 7">
             <a:extLst>
               <a:ext uri="{FF2B5EF4-FFF2-40B4-BE49-F238E27FC236}">
-                <a16:creationId xmlns:a16="http://schemas.microsoft.com/office/drawing/2014/main" id="{A2D508B3-A66C-833E-D929-8DC211635676}"/>
-              </a:ext>
-              <a:ext uri="{C183D7F6-B498-43B3-948B-1728B52AA6E4}">
-                <adec:decorative xmlns:adec="http://schemas.microsoft.com/office/drawing/2017/decorative" val="1"/>
+                <a16:creationId xmlns:a16="http://schemas.microsoft.com/office/drawing/2014/main" id="{65B04A67-AAF5-3BBA-8F7F-AE078195E8CD}"/>
               </a:ext>
             </a:extLst>
           </p:cNvPr>
-          <p:cNvCxnSpPr>
-            <a:cxnSpLocks noGrp="1" noRot="1" noChangeAspect="1" noMove="1" noResize="1" noEditPoints="1" noAdjustHandles="1" noChangeArrowheads="1" noChangeShapeType="1"/>
-          </p:cNvCxnSpPr>
-          <p:nvPr>
-            <p:extLst>
-              <p:ext uri="{386F3935-93C4-4BCD-93E2-E3B085C9AB24}">
-                <p16:designElem xmlns:p16="http://schemas.microsoft.com/office/powerpoint/2015/main" val="1"/>
-              </p:ext>
-            </p:extLst>
-          </p:nvPr>
-        </p:nvCxnSpPr>
+          <p:cNvSpPr>
+            <a:spLocks noGrp="1"/>
+          </p:cNvSpPr>
+          <p:nvPr>
+            <p:ph type="subTitle" idx="1"/>
+          </p:nvPr>
+        </p:nvSpPr>
         <p:spPr>
           <a:xfrm>
-            <a:off x="592088" y="4882722"/>
-            <a:ext cx="978862" cy="0"/>
+            <a:off x="514117" y="5023431"/>
+            <a:ext cx="5833674" cy="1287887"/>
           </a:xfrm>
-          <a:prstGeom prst="line">
-            <a:avLst/>
-          </a:prstGeom>
-          <a:ln w="76200"/>
         </p:spPr>
-        <p:style>
-          <a:lnRef idx="1">
-            <a:schemeClr val="accent1"/>
-          </a:lnRef>
-          <a:fillRef idx="0">
-            <a:schemeClr val="accent1"/>
-          </a:fillRef>
-          <a:effectRef idx="0">
-            <a:schemeClr val="accent1"/>
-          </a:effectRef>
-          <a:fontRef idx="minor">
-            <a:schemeClr val="tx1"/>
-          </a:fontRef>
-        </p:style>
-      </p:cxnSp>
+        <p:txBody>
+          <a:bodyPr>
+            <a:normAutofit lnSpcReduction="10000"/>
+          </a:bodyPr>
+          <a:lstStyle/>
+          <a:p>
+            <a:r>
+              <a:rPr lang="it-IT" cap="none" spc="0" dirty="0">
+                <a:latin typeface="Arial Nova Light" panose="020B0304020202020204" pitchFamily="34" charset="0"/>
+              </a:rPr>
+              <a:t>Computer Vision – A.A. 2024-2025</a:t>
+            </a:r>
+          </a:p>
+          <a:p>
+            <a:r>
+              <a:rPr lang="it-IT" b="0" cap="none" spc="0" dirty="0">
+                <a:latin typeface="Arial Nova Light" panose="020B0304020202020204" pitchFamily="34" charset="0"/>
+              </a:rPr>
+              <a:t>Flavio Corsetti – 1997818</a:t>
+            </a:r>
+          </a:p>
+          <a:p>
+            <a:r>
+              <a:rPr lang="it-IT" b="0" cap="none" spc="0" dirty="0">
+                <a:latin typeface="Arial Nova Light" panose="020B0304020202020204" pitchFamily="34" charset="0"/>
+              </a:rPr>
+              <a:t>Federica Sardo - 1760539</a:t>
+            </a:r>
+          </a:p>
+        </p:txBody>
+      </p:sp>
       <p:pic>
         <p:nvPicPr>
           <p:cNvPr id="4" name="Picture 3" descr="Sfondo tecnologia di rete">
@@ -3892,59 +3136,6 @@
           </a:prstGeom>
         </p:spPr>
       </p:pic>
-      <p:sp>
-        <p:nvSpPr>
-          <p:cNvPr id="8" name="Sottotitolo 7">
-            <a:extLst>
-              <a:ext uri="{FF2B5EF4-FFF2-40B4-BE49-F238E27FC236}">
-                <a16:creationId xmlns:a16="http://schemas.microsoft.com/office/drawing/2014/main" id="{65B04A67-AAF5-3BBA-8F7F-AE078195E8CD}"/>
-              </a:ext>
-            </a:extLst>
-          </p:cNvPr>
-          <p:cNvSpPr>
-            <a:spLocks noGrp="1"/>
-          </p:cNvSpPr>
-          <p:nvPr>
-            <p:ph type="subTitle" idx="1"/>
-          </p:nvPr>
-        </p:nvSpPr>
-        <p:spPr>
-          <a:xfrm>
-            <a:off x="514117" y="5023431"/>
-            <a:ext cx="5833674" cy="1287887"/>
-          </a:xfrm>
-        </p:spPr>
-        <p:txBody>
-          <a:bodyPr>
-            <a:normAutofit fontScale="92500" lnSpcReduction="10000"/>
-          </a:bodyPr>
-          <a:lstStyle/>
-          <a:p>
-            <a:r>
-              <a:rPr lang="it-IT" cap="none" spc="0" dirty="0">
-                <a:latin typeface="Arial Nova Light" panose="020B0304020202020204" pitchFamily="34" charset="0"/>
-              </a:rPr>
-              <a:t>Computer Vision – A.A. 2024-2025</a:t>
-            </a:r>
-          </a:p>
-          <a:p>
-            <a:r>
-              <a:rPr lang="it-IT" b="0" cap="none" spc="0" dirty="0">
-                <a:latin typeface="Arial Nova Light" panose="020B0304020202020204" pitchFamily="34" charset="0"/>
-              </a:rPr>
-              <a:t>Flavio Corsetti – 1997818</a:t>
-            </a:r>
-          </a:p>
-          <a:p>
-            <a:r>
-              <a:rPr lang="it-IT" b="0" cap="none" spc="0" dirty="0">
-                <a:latin typeface="Arial Nova Light" panose="020B0304020202020204" pitchFamily="34" charset="0"/>
-              </a:rPr>
-              <a:t>Federica Sardo - 1760539</a:t>
-            </a:r>
-          </a:p>
-        </p:txBody>
-      </p:sp>
     </p:spTree>
     <p:extLst>
       <p:ext uri="{BB962C8B-B14F-4D97-AF65-F5344CB8AC3E}">
@@ -4668,8 +3859,8 @@
           </p:nvPr>
         </p:nvGraphicFramePr>
         <p:xfrm>
-          <a:off x="639763" y="2633663"/>
-          <a:ext cx="10891832" cy="1854200"/>
+          <a:off x="838200" y="1825625"/>
+          <a:ext cx="10515600" cy="4351338"/>
         </p:xfrm>
         <a:graphic>
           <a:graphicData uri="http://schemas.openxmlformats.org/drawingml/2006/table">
@@ -4678,56 +3869,56 @@
                 <a:tableStyleId>{00A15C55-8517-42AA-B614-E9B94910E393}</a:tableStyleId>
               </a:tblPr>
               <a:tblGrid>
-                <a:gridCol w="1361479">
+                <a:gridCol w="1314449">
                   <a:extLst>
                     <a:ext uri="{9D8B030D-6E8A-4147-A177-3AD203B41FA5}">
                       <a16:colId xmlns:a16="http://schemas.microsoft.com/office/drawing/2014/main" val="3826079438"/>
                     </a:ext>
                   </a:extLst>
                 </a:gridCol>
-                <a:gridCol w="1361479">
+                <a:gridCol w="1314449">
                   <a:extLst>
                     <a:ext uri="{9D8B030D-6E8A-4147-A177-3AD203B41FA5}">
                       <a16:colId xmlns:a16="http://schemas.microsoft.com/office/drawing/2014/main" val="3607718456"/>
                     </a:ext>
                   </a:extLst>
                 </a:gridCol>
-                <a:gridCol w="1361479">
+                <a:gridCol w="1314449">
                   <a:extLst>
                     <a:ext uri="{9D8B030D-6E8A-4147-A177-3AD203B41FA5}">
                       <a16:colId xmlns:a16="http://schemas.microsoft.com/office/drawing/2014/main" val="2879001292"/>
                     </a:ext>
                   </a:extLst>
                 </a:gridCol>
-                <a:gridCol w="1361479">
+                <a:gridCol w="1314449">
                   <a:extLst>
                     <a:ext uri="{9D8B030D-6E8A-4147-A177-3AD203B41FA5}">
                       <a16:colId xmlns:a16="http://schemas.microsoft.com/office/drawing/2014/main" val="1366314030"/>
                     </a:ext>
                   </a:extLst>
                 </a:gridCol>
-                <a:gridCol w="1361479">
+                <a:gridCol w="1314449">
                   <a:extLst>
                     <a:ext uri="{9D8B030D-6E8A-4147-A177-3AD203B41FA5}">
                       <a16:colId xmlns:a16="http://schemas.microsoft.com/office/drawing/2014/main" val="3745959777"/>
                     </a:ext>
                   </a:extLst>
                 </a:gridCol>
-                <a:gridCol w="1361479">
+                <a:gridCol w="1314449">
                   <a:extLst>
                     <a:ext uri="{9D8B030D-6E8A-4147-A177-3AD203B41FA5}">
                       <a16:colId xmlns:a16="http://schemas.microsoft.com/office/drawing/2014/main" val="88174228"/>
                     </a:ext>
                   </a:extLst>
                 </a:gridCol>
-                <a:gridCol w="1361479">
+                <a:gridCol w="1314449">
                   <a:extLst>
                     <a:ext uri="{9D8B030D-6E8A-4147-A177-3AD203B41FA5}">
                       <a16:colId xmlns:a16="http://schemas.microsoft.com/office/drawing/2014/main" val="3272165040"/>
                     </a:ext>
                   </a:extLst>
                 </a:gridCol>
-                <a:gridCol w="1361479">
+                <a:gridCol w="1314449">
                   <a:extLst>
                     <a:ext uri="{9D8B030D-6E8A-4147-A177-3AD203B41FA5}">
                       <a16:colId xmlns:a16="http://schemas.microsoft.com/office/drawing/2014/main" val="2378510156"/>
@@ -4744,7 +3935,7 @@
                       <a:endParaRPr lang="it-IT"/>
                     </a:p>
                   </a:txBody>
-                  <a:tcPr/>
+                  <a:tcPr marL="88281" marR="88281"/>
                 </a:tc>
                 <a:tc>
                   <a:txBody>
@@ -4754,7 +3945,7 @@
                       <a:endParaRPr lang="it-IT"/>
                     </a:p>
                   </a:txBody>
-                  <a:tcPr/>
+                  <a:tcPr marL="88281" marR="88281"/>
                 </a:tc>
                 <a:tc>
                   <a:txBody>
@@ -4764,7 +3955,7 @@
                       <a:endParaRPr lang="it-IT"/>
                     </a:p>
                   </a:txBody>
-                  <a:tcPr/>
+                  <a:tcPr marL="88281" marR="88281"/>
                 </a:tc>
                 <a:tc>
                   <a:txBody>
@@ -4774,7 +3965,7 @@
                       <a:endParaRPr lang="it-IT"/>
                     </a:p>
                   </a:txBody>
-                  <a:tcPr/>
+                  <a:tcPr marL="88281" marR="88281"/>
                 </a:tc>
                 <a:tc>
                   <a:txBody>
@@ -4784,7 +3975,7 @@
                       <a:endParaRPr lang="it-IT"/>
                     </a:p>
                   </a:txBody>
-                  <a:tcPr/>
+                  <a:tcPr marL="88281" marR="88281"/>
                 </a:tc>
                 <a:tc>
                   <a:txBody>
@@ -4794,7 +3985,7 @@
                       <a:endParaRPr lang="it-IT"/>
                     </a:p>
                   </a:txBody>
-                  <a:tcPr/>
+                  <a:tcPr marL="88281" marR="88281"/>
                 </a:tc>
                 <a:tc>
                   <a:txBody>
@@ -4804,7 +3995,7 @@
                       <a:endParaRPr lang="it-IT"/>
                     </a:p>
                   </a:txBody>
-                  <a:tcPr/>
+                  <a:tcPr marL="88281" marR="88281"/>
                 </a:tc>
                 <a:tc>
                   <a:txBody>
@@ -4814,7 +4005,7 @@
                       <a:endParaRPr lang="it-IT"/>
                     </a:p>
                   </a:txBody>
-                  <a:tcPr/>
+                  <a:tcPr marL="88281" marR="88281"/>
                 </a:tc>
                 <a:extLst>
                   <a:ext uri="{0D108BD9-81ED-4DB2-BD59-A6C34878D82A}">
@@ -4831,7 +4022,7 @@
                       <a:endParaRPr lang="it-IT"/>
                     </a:p>
                   </a:txBody>
-                  <a:tcPr/>
+                  <a:tcPr marL="88281" marR="88281"/>
                 </a:tc>
                 <a:tc>
                   <a:txBody>
@@ -4841,7 +4032,7 @@
                       <a:endParaRPr lang="it-IT"/>
                     </a:p>
                   </a:txBody>
-                  <a:tcPr/>
+                  <a:tcPr marL="88281" marR="88281"/>
                 </a:tc>
                 <a:tc>
                   <a:txBody>
@@ -4851,7 +4042,7 @@
                       <a:endParaRPr lang="it-IT"/>
                     </a:p>
                   </a:txBody>
-                  <a:tcPr/>
+                  <a:tcPr marL="88281" marR="88281"/>
                 </a:tc>
                 <a:tc>
                   <a:txBody>
@@ -4861,7 +4052,7 @@
                       <a:endParaRPr lang="it-IT"/>
                     </a:p>
                   </a:txBody>
-                  <a:tcPr/>
+                  <a:tcPr marL="88281" marR="88281"/>
                 </a:tc>
                 <a:tc>
                   <a:txBody>
@@ -4871,7 +4062,7 @@
                       <a:endParaRPr lang="it-IT"/>
                     </a:p>
                   </a:txBody>
-                  <a:tcPr/>
+                  <a:tcPr marL="88281" marR="88281"/>
                 </a:tc>
                 <a:tc>
                   <a:txBody>
@@ -4881,7 +4072,7 @@
                       <a:endParaRPr lang="it-IT"/>
                     </a:p>
                   </a:txBody>
-                  <a:tcPr/>
+                  <a:tcPr marL="88281" marR="88281"/>
                 </a:tc>
                 <a:tc>
                   <a:txBody>
@@ -4891,7 +4082,7 @@
                       <a:endParaRPr lang="it-IT"/>
                     </a:p>
                   </a:txBody>
-                  <a:tcPr/>
+                  <a:tcPr marL="88281" marR="88281"/>
                 </a:tc>
                 <a:tc>
                   <a:txBody>
@@ -4901,7 +4092,7 @@
                       <a:endParaRPr lang="it-IT"/>
                     </a:p>
                   </a:txBody>
-                  <a:tcPr/>
+                  <a:tcPr marL="88281" marR="88281"/>
                 </a:tc>
                 <a:extLst>
                   <a:ext uri="{0D108BD9-81ED-4DB2-BD59-A6C34878D82A}">
@@ -4918,7 +4109,7 @@
                       <a:endParaRPr lang="it-IT"/>
                     </a:p>
                   </a:txBody>
-                  <a:tcPr/>
+                  <a:tcPr marL="88281" marR="88281"/>
                 </a:tc>
                 <a:tc>
                   <a:txBody>
@@ -4928,7 +4119,7 @@
                       <a:endParaRPr lang="it-IT"/>
                     </a:p>
                   </a:txBody>
-                  <a:tcPr/>
+                  <a:tcPr marL="88281" marR="88281"/>
                 </a:tc>
                 <a:tc>
                   <a:txBody>
@@ -4938,7 +4129,7 @@
                       <a:endParaRPr lang="it-IT"/>
                     </a:p>
                   </a:txBody>
-                  <a:tcPr/>
+                  <a:tcPr marL="88281" marR="88281"/>
                 </a:tc>
                 <a:tc>
                   <a:txBody>
@@ -4948,7 +4139,7 @@
                       <a:endParaRPr lang="it-IT"/>
                     </a:p>
                   </a:txBody>
-                  <a:tcPr/>
+                  <a:tcPr marL="88281" marR="88281"/>
                 </a:tc>
                 <a:tc>
                   <a:txBody>
@@ -4958,7 +4149,7 @@
                       <a:endParaRPr lang="it-IT"/>
                     </a:p>
                   </a:txBody>
-                  <a:tcPr/>
+                  <a:tcPr marL="88281" marR="88281"/>
                 </a:tc>
                 <a:tc>
                   <a:txBody>
@@ -4968,7 +4159,7 @@
                       <a:endParaRPr lang="it-IT"/>
                     </a:p>
                   </a:txBody>
-                  <a:tcPr/>
+                  <a:tcPr marL="88281" marR="88281"/>
                 </a:tc>
                 <a:tc>
                   <a:txBody>
@@ -4978,7 +4169,7 @@
                       <a:endParaRPr lang="it-IT"/>
                     </a:p>
                   </a:txBody>
-                  <a:tcPr/>
+                  <a:tcPr marL="88281" marR="88281"/>
                 </a:tc>
                 <a:tc>
                   <a:txBody>
@@ -4988,7 +4179,7 @@
                       <a:endParaRPr lang="it-IT"/>
                     </a:p>
                   </a:txBody>
-                  <a:tcPr/>
+                  <a:tcPr marL="88281" marR="88281"/>
                 </a:tc>
                 <a:extLst>
                   <a:ext uri="{0D108BD9-81ED-4DB2-BD59-A6C34878D82A}">
@@ -5005,7 +4196,7 @@
                       <a:endParaRPr lang="it-IT"/>
                     </a:p>
                   </a:txBody>
-                  <a:tcPr/>
+                  <a:tcPr marL="88281" marR="88281"/>
                 </a:tc>
                 <a:tc>
                   <a:txBody>
@@ -5015,7 +4206,7 @@
                       <a:endParaRPr lang="it-IT"/>
                     </a:p>
                   </a:txBody>
-                  <a:tcPr/>
+                  <a:tcPr marL="88281" marR="88281"/>
                 </a:tc>
                 <a:tc>
                   <a:txBody>
@@ -5025,7 +4216,7 @@
                       <a:endParaRPr lang="it-IT"/>
                     </a:p>
                   </a:txBody>
-                  <a:tcPr/>
+                  <a:tcPr marL="88281" marR="88281"/>
                 </a:tc>
                 <a:tc>
                   <a:txBody>
@@ -5035,7 +4226,7 @@
                       <a:endParaRPr lang="it-IT"/>
                     </a:p>
                   </a:txBody>
-                  <a:tcPr/>
+                  <a:tcPr marL="88281" marR="88281"/>
                 </a:tc>
                 <a:tc>
                   <a:txBody>
@@ -5045,7 +4236,7 @@
                       <a:endParaRPr lang="it-IT"/>
                     </a:p>
                   </a:txBody>
-                  <a:tcPr/>
+                  <a:tcPr marL="88281" marR="88281"/>
                 </a:tc>
                 <a:tc>
                   <a:txBody>
@@ -5055,7 +4246,7 @@
                       <a:endParaRPr lang="it-IT"/>
                     </a:p>
                   </a:txBody>
-                  <a:tcPr/>
+                  <a:tcPr marL="88281" marR="88281"/>
                 </a:tc>
                 <a:tc>
                   <a:txBody>
@@ -5065,7 +4256,7 @@
                       <a:endParaRPr lang="it-IT"/>
                     </a:p>
                   </a:txBody>
-                  <a:tcPr/>
+                  <a:tcPr marL="88281" marR="88281"/>
                 </a:tc>
                 <a:tc>
                   <a:txBody>
@@ -5075,7 +4266,7 @@
                       <a:endParaRPr lang="it-IT"/>
                     </a:p>
                   </a:txBody>
-                  <a:tcPr/>
+                  <a:tcPr marL="88281" marR="88281"/>
                 </a:tc>
                 <a:extLst>
                   <a:ext uri="{0D108BD9-81ED-4DB2-BD59-A6C34878D82A}">
@@ -5092,7 +4283,7 @@
                       <a:endParaRPr lang="it-IT"/>
                     </a:p>
                   </a:txBody>
-                  <a:tcPr/>
+                  <a:tcPr marL="88281" marR="88281"/>
                 </a:tc>
                 <a:tc>
                   <a:txBody>
@@ -5102,7 +4293,7 @@
                       <a:endParaRPr lang="it-IT"/>
                     </a:p>
                   </a:txBody>
-                  <a:tcPr/>
+                  <a:tcPr marL="88281" marR="88281"/>
                 </a:tc>
                 <a:tc>
                   <a:txBody>
@@ -5112,7 +4303,7 @@
                       <a:endParaRPr lang="it-IT"/>
                     </a:p>
                   </a:txBody>
-                  <a:tcPr/>
+                  <a:tcPr marL="88281" marR="88281"/>
                 </a:tc>
                 <a:tc>
                   <a:txBody>
@@ -5122,7 +4313,7 @@
                       <a:endParaRPr lang="it-IT"/>
                     </a:p>
                   </a:txBody>
-                  <a:tcPr/>
+                  <a:tcPr marL="88281" marR="88281"/>
                 </a:tc>
                 <a:tc>
                   <a:txBody>
@@ -5132,7 +4323,7 @@
                       <a:endParaRPr lang="it-IT"/>
                     </a:p>
                   </a:txBody>
-                  <a:tcPr/>
+                  <a:tcPr marL="88281" marR="88281"/>
                 </a:tc>
                 <a:tc>
                   <a:txBody>
@@ -5142,7 +4333,7 @@
                       <a:endParaRPr lang="it-IT"/>
                     </a:p>
                   </a:txBody>
-                  <a:tcPr/>
+                  <a:tcPr marL="88281" marR="88281"/>
                 </a:tc>
                 <a:tc>
                   <a:txBody>
@@ -5152,7 +4343,7 @@
                       <a:endParaRPr lang="it-IT"/>
                     </a:p>
                   </a:txBody>
-                  <a:tcPr/>
+                  <a:tcPr marL="88281" marR="88281"/>
                 </a:tc>
                 <a:tc>
                   <a:txBody>
@@ -5162,7 +4353,7 @@
                       <a:endParaRPr lang="it-IT" dirty="0"/>
                     </a:p>
                   </a:txBody>
-                  <a:tcPr/>
+                  <a:tcPr marL="88281" marR="88281"/>
                 </a:tc>
                 <a:extLst>
                   <a:ext uri="{0D108BD9-81ED-4DB2-BD59-A6C34878D82A}">
@@ -5678,7 +4869,7 @@
         <p:spPr/>
         <p:txBody>
           <a:bodyPr>
-            <a:normAutofit fontScale="70000" lnSpcReduction="20000"/>
+            <a:normAutofit fontScale="92500" lnSpcReduction="20000"/>
           </a:bodyPr>
           <a:lstStyle/>
           <a:p>
@@ -6375,7 +5566,7 @@
         <p:spPr/>
         <p:txBody>
           <a:bodyPr>
-            <a:normAutofit fontScale="62500" lnSpcReduction="20000"/>
+            <a:normAutofit fontScale="85000" lnSpcReduction="20000"/>
           </a:bodyPr>
           <a:lstStyle/>
           <a:p>
@@ -6511,61 +5702,829 @@
           <a:chExt cx="0" cy="0"/>
         </a:xfrm>
       </p:grpSpPr>
-      <p:sp>
-        <p:nvSpPr>
-          <p:cNvPr id="2" name="Titolo 1">
+      <p:pic>
+        <p:nvPicPr>
+          <p:cNvPr id="5" name="Immagine 4" descr="Immagine che contiene testo, Targa di veicolo, veicolo, Veicolo terrestre&#10;&#10;Il contenuto generato dall'IA potrebbe non essere corretto.">
             <a:extLst>
               <a:ext uri="{FF2B5EF4-FFF2-40B4-BE49-F238E27FC236}">
-                <a16:creationId xmlns:a16="http://schemas.microsoft.com/office/drawing/2014/main" id="{064732CD-FFB0-1CB4-DB56-5367F3584A9C}"/>
+                <a16:creationId xmlns:a16="http://schemas.microsoft.com/office/drawing/2014/main" id="{B97DDB17-7F2B-21C0-B821-FB77EFD01F12}"/>
               </a:ext>
             </a:extLst>
           </p:cNvPr>
-          <p:cNvSpPr>
-            <a:spLocks noGrp="1"/>
-          </p:cNvSpPr>
-          <p:nvPr>
-            <p:ph type="title"/>
-          </p:nvPr>
-        </p:nvSpPr>
-        <p:spPr/>
-        <p:txBody>
-          <a:bodyPr>
-            <a:normAutofit fontScale="90000"/>
-          </a:bodyPr>
-          <a:lstStyle/>
-          <a:p>
-            <a:r>
-              <a:rPr lang="it-IT" dirty="0"/>
-              <a:t>Immaginette per spiegare come funziona il nostro algoritmo</a:t>
-            </a:r>
-          </a:p>
-        </p:txBody>
-      </p:sp>
-      <p:sp>
-        <p:nvSpPr>
-          <p:cNvPr id="3" name="Segnaposto contenuto 2">
+          <p:cNvPicPr>
+            <a:picLocks noChangeAspect="1"/>
+          </p:cNvPicPr>
+          <p:nvPr/>
+        </p:nvPicPr>
+        <p:blipFill>
+          <a:blip r:embed="rId2">
+            <a:extLst>
+              <a:ext uri="{28A0092B-C50C-407E-A947-70E740481C1C}">
+                <a14:useLocalDpi xmlns:a14="http://schemas.microsoft.com/office/drawing/2010/main" val="0"/>
+              </a:ext>
+            </a:extLst>
+          </a:blip>
+          <a:stretch>
+            <a:fillRect/>
+          </a:stretch>
+        </p:blipFill>
+        <p:spPr>
+          <a:xfrm>
+            <a:off x="1325428" y="1941443"/>
+            <a:ext cx="1484115" cy="2391074"/>
+          </a:xfrm>
+          <a:prstGeom prst="rect">
+            <a:avLst/>
+          </a:prstGeom>
+        </p:spPr>
+      </p:pic>
+      <p:cxnSp>
+        <p:nvCxnSpPr>
+          <p:cNvPr id="9" name="Connettore 2 8">
             <a:extLst>
               <a:ext uri="{FF2B5EF4-FFF2-40B4-BE49-F238E27FC236}">
-                <a16:creationId xmlns:a16="http://schemas.microsoft.com/office/drawing/2014/main" id="{1787E97B-DB02-B85C-BD92-7EED3A5E54E5}"/>
+                <a16:creationId xmlns:a16="http://schemas.microsoft.com/office/drawing/2014/main" id="{5D70E19D-BF72-1DDD-7A17-73D6E1EB4454}"/>
               </a:ext>
             </a:extLst>
           </p:cNvPr>
-          <p:cNvSpPr>
-            <a:spLocks noGrp="1"/>
-          </p:cNvSpPr>
-          <p:nvPr>
-            <p:ph idx="1"/>
-          </p:nvPr>
-        </p:nvSpPr>
-        <p:spPr/>
-        <p:txBody>
-          <a:bodyPr/>
-          <a:lstStyle/>
-          <a:p>
-            <a:endParaRPr lang="it-IT"/>
-          </a:p>
-        </p:txBody>
-      </p:sp>
+          <p:cNvCxnSpPr>
+            <a:cxnSpLocks/>
+          </p:cNvCxnSpPr>
+          <p:nvPr/>
+        </p:nvCxnSpPr>
+        <p:spPr>
+          <a:xfrm>
+            <a:off x="2829422" y="3074502"/>
+            <a:ext cx="1066717" cy="0"/>
+          </a:xfrm>
+          <a:prstGeom prst="straightConnector1">
+            <a:avLst/>
+          </a:prstGeom>
+          <a:ln>
+            <a:tailEnd type="triangle"/>
+          </a:ln>
+        </p:spPr>
+        <p:style>
+          <a:lnRef idx="1">
+            <a:schemeClr val="accent1"/>
+          </a:lnRef>
+          <a:fillRef idx="0">
+            <a:schemeClr val="accent1"/>
+          </a:fillRef>
+          <a:effectRef idx="0">
+            <a:schemeClr val="accent1"/>
+          </a:effectRef>
+          <a:fontRef idx="minor">
+            <a:schemeClr val="tx1"/>
+          </a:fontRef>
+        </p:style>
+      </p:cxnSp>
+      <p:sp>
+        <p:nvSpPr>
+          <p:cNvPr id="10" name="Rettangolo 9">
+            <a:extLst>
+              <a:ext uri="{FF2B5EF4-FFF2-40B4-BE49-F238E27FC236}">
+                <a16:creationId xmlns:a16="http://schemas.microsoft.com/office/drawing/2014/main" id="{A028B7F4-8D5B-ADA8-ED27-B44C588283C7}"/>
+              </a:ext>
+            </a:extLst>
+          </p:cNvPr>
+          <p:cNvSpPr/>
+          <p:nvPr/>
+        </p:nvSpPr>
+        <p:spPr>
+          <a:xfrm>
+            <a:off x="3889512" y="2176668"/>
+            <a:ext cx="2073965" cy="1795669"/>
+          </a:xfrm>
+          <a:prstGeom prst="rect">
+            <a:avLst/>
+          </a:prstGeom>
+        </p:spPr>
+        <p:style>
+          <a:lnRef idx="2">
+            <a:schemeClr val="accent6"/>
+          </a:lnRef>
+          <a:fillRef idx="1">
+            <a:schemeClr val="lt1"/>
+          </a:fillRef>
+          <a:effectRef idx="0">
+            <a:schemeClr val="accent6"/>
+          </a:effectRef>
+          <a:fontRef idx="minor">
+            <a:schemeClr val="dk1"/>
+          </a:fontRef>
+        </p:style>
+        <p:txBody>
+          <a:bodyPr rtlCol="0" anchor="ctr"/>
+          <a:lstStyle/>
+          <a:p>
+            <a:pPr algn="ctr"/>
+            <a:r>
+              <a:rPr lang="it-IT" dirty="0" err="1"/>
+              <a:t>Shared</a:t>
+            </a:r>
+            <a:r>
+              <a:rPr lang="it-IT" dirty="0"/>
+              <a:t> </a:t>
+            </a:r>
+            <a:r>
+              <a:rPr lang="it-IT" dirty="0" err="1"/>
+              <a:t>Convolutional</a:t>
+            </a:r>
+            <a:r>
+              <a:rPr lang="it-IT" dirty="0"/>
+              <a:t> Architecture</a:t>
+            </a:r>
+            <a:r>
+              <a:rPr lang="it-IT" dirty="0">
+                <a:ln w="0"/>
+                <a:solidFill>
+                  <a:schemeClr val="tx1"/>
+                </a:solidFill>
+                <a:effectLst>
+                  <a:outerShdw blurRad="38100" dist="19050" dir="2700000" algn="tl" rotWithShape="0">
+                    <a:schemeClr val="dk1">
+                      <a:alpha val="40000"/>
+                    </a:schemeClr>
+                  </a:outerShdw>
+                </a:effectLst>
+              </a:rPr>
+              <a:t>:</a:t>
+            </a:r>
+          </a:p>
+          <a:p>
+            <a:pPr algn="ctr"/>
+            <a:r>
+              <a:rPr lang="it-IT" dirty="0">
+                <a:ln w="0"/>
+                <a:solidFill>
+                  <a:schemeClr val="tx1"/>
+                </a:solidFill>
+                <a:effectLst>
+                  <a:outerShdw blurRad="38100" dist="19050" dir="2700000" algn="tl" rotWithShape="0">
+                    <a:schemeClr val="dk1">
+                      <a:alpha val="40000"/>
+                    </a:schemeClr>
+                  </a:outerShdw>
+                </a:effectLst>
+              </a:rPr>
+              <a:t>ResNet18</a:t>
+            </a:r>
+          </a:p>
+        </p:txBody>
+      </p:sp>
+      <p:cxnSp>
+        <p:nvCxnSpPr>
+          <p:cNvPr id="14" name="Connettore diritto 13">
+            <a:extLst>
+              <a:ext uri="{FF2B5EF4-FFF2-40B4-BE49-F238E27FC236}">
+                <a16:creationId xmlns:a16="http://schemas.microsoft.com/office/drawing/2014/main" id="{45A3A4EC-3D9F-52D6-69A3-EF3300D4284C}"/>
+              </a:ext>
+            </a:extLst>
+          </p:cNvPr>
+          <p:cNvCxnSpPr>
+            <a:cxnSpLocks/>
+          </p:cNvCxnSpPr>
+          <p:nvPr/>
+        </p:nvCxnSpPr>
+        <p:spPr>
+          <a:xfrm flipV="1">
+            <a:off x="5963477" y="3074503"/>
+            <a:ext cx="834887" cy="1"/>
+          </a:xfrm>
+          <a:prstGeom prst="line">
+            <a:avLst/>
+          </a:prstGeom>
+        </p:spPr>
+        <p:style>
+          <a:lnRef idx="1">
+            <a:schemeClr val="accent1"/>
+          </a:lnRef>
+          <a:fillRef idx="0">
+            <a:schemeClr val="accent1"/>
+          </a:fillRef>
+          <a:effectRef idx="0">
+            <a:schemeClr val="accent1"/>
+          </a:effectRef>
+          <a:fontRef idx="minor">
+            <a:schemeClr val="tx1"/>
+          </a:fontRef>
+        </p:style>
+      </p:cxnSp>
+      <p:cxnSp>
+        <p:nvCxnSpPr>
+          <p:cNvPr id="16" name="Connettore diritto 15">
+            <a:extLst>
+              <a:ext uri="{FF2B5EF4-FFF2-40B4-BE49-F238E27FC236}">
+                <a16:creationId xmlns:a16="http://schemas.microsoft.com/office/drawing/2014/main" id="{801CB036-E0B3-513B-D54F-D27E408C0F36}"/>
+              </a:ext>
+            </a:extLst>
+          </p:cNvPr>
+          <p:cNvCxnSpPr>
+            <a:cxnSpLocks/>
+          </p:cNvCxnSpPr>
+          <p:nvPr/>
+        </p:nvCxnSpPr>
+        <p:spPr>
+          <a:xfrm>
+            <a:off x="6798364" y="1530626"/>
+            <a:ext cx="19879" cy="3101009"/>
+          </a:xfrm>
+          <a:prstGeom prst="line">
+            <a:avLst/>
+          </a:prstGeom>
+        </p:spPr>
+        <p:style>
+          <a:lnRef idx="1">
+            <a:schemeClr val="accent1"/>
+          </a:lnRef>
+          <a:fillRef idx="0">
+            <a:schemeClr val="accent1"/>
+          </a:fillRef>
+          <a:effectRef idx="0">
+            <a:schemeClr val="accent1"/>
+          </a:effectRef>
+          <a:fontRef idx="minor">
+            <a:schemeClr val="tx1"/>
+          </a:fontRef>
+        </p:style>
+      </p:cxnSp>
+      <p:cxnSp>
+        <p:nvCxnSpPr>
+          <p:cNvPr id="19" name="Connettore 2 18">
+            <a:extLst>
+              <a:ext uri="{FF2B5EF4-FFF2-40B4-BE49-F238E27FC236}">
+                <a16:creationId xmlns:a16="http://schemas.microsoft.com/office/drawing/2014/main" id="{507777FA-A7DD-8C69-01D0-17B902B730C4}"/>
+              </a:ext>
+            </a:extLst>
+          </p:cNvPr>
+          <p:cNvCxnSpPr/>
+          <p:nvPr/>
+        </p:nvCxnSpPr>
+        <p:spPr>
+          <a:xfrm>
+            <a:off x="6785111" y="1517373"/>
+            <a:ext cx="1345096" cy="0"/>
+          </a:xfrm>
+          <a:prstGeom prst="straightConnector1">
+            <a:avLst/>
+          </a:prstGeom>
+          <a:ln>
+            <a:tailEnd type="triangle"/>
+          </a:ln>
+        </p:spPr>
+        <p:style>
+          <a:lnRef idx="1">
+            <a:schemeClr val="accent1"/>
+          </a:lnRef>
+          <a:fillRef idx="0">
+            <a:schemeClr val="accent1"/>
+          </a:fillRef>
+          <a:effectRef idx="0">
+            <a:schemeClr val="accent1"/>
+          </a:effectRef>
+          <a:fontRef idx="minor">
+            <a:schemeClr val="tx1"/>
+          </a:fontRef>
+        </p:style>
+      </p:cxnSp>
+      <p:cxnSp>
+        <p:nvCxnSpPr>
+          <p:cNvPr id="20" name="Connettore 2 19">
+            <a:extLst>
+              <a:ext uri="{FF2B5EF4-FFF2-40B4-BE49-F238E27FC236}">
+                <a16:creationId xmlns:a16="http://schemas.microsoft.com/office/drawing/2014/main" id="{31363814-257C-120E-1F0E-47A701205B5A}"/>
+              </a:ext>
+            </a:extLst>
+          </p:cNvPr>
+          <p:cNvCxnSpPr>
+            <a:cxnSpLocks/>
+          </p:cNvCxnSpPr>
+          <p:nvPr/>
+        </p:nvCxnSpPr>
+        <p:spPr>
+          <a:xfrm>
+            <a:off x="6818243" y="4631635"/>
+            <a:ext cx="1311964" cy="0"/>
+          </a:xfrm>
+          <a:prstGeom prst="straightConnector1">
+            <a:avLst/>
+          </a:prstGeom>
+          <a:ln>
+            <a:tailEnd type="triangle"/>
+          </a:ln>
+        </p:spPr>
+        <p:style>
+          <a:lnRef idx="1">
+            <a:schemeClr val="accent1"/>
+          </a:lnRef>
+          <a:fillRef idx="0">
+            <a:schemeClr val="accent1"/>
+          </a:fillRef>
+          <a:effectRef idx="0">
+            <a:schemeClr val="accent1"/>
+          </a:effectRef>
+          <a:fontRef idx="minor">
+            <a:schemeClr val="tx1"/>
+          </a:fontRef>
+        </p:style>
+      </p:cxnSp>
+      <p:sp>
+        <p:nvSpPr>
+          <p:cNvPr id="21" name="Rettangolo 20">
+            <a:extLst>
+              <a:ext uri="{FF2B5EF4-FFF2-40B4-BE49-F238E27FC236}">
+                <a16:creationId xmlns:a16="http://schemas.microsoft.com/office/drawing/2014/main" id="{E7509DD0-50CB-89FE-059E-F440D806F1A6}"/>
+              </a:ext>
+            </a:extLst>
+          </p:cNvPr>
+          <p:cNvSpPr/>
+          <p:nvPr/>
+        </p:nvSpPr>
+        <p:spPr>
+          <a:xfrm>
+            <a:off x="8150086" y="4272480"/>
+            <a:ext cx="2365513" cy="954559"/>
+          </a:xfrm>
+          <a:prstGeom prst="rect">
+            <a:avLst/>
+          </a:prstGeom>
+        </p:spPr>
+        <p:style>
+          <a:lnRef idx="2">
+            <a:schemeClr val="accent6"/>
+          </a:lnRef>
+          <a:fillRef idx="1">
+            <a:schemeClr val="lt1"/>
+          </a:fillRef>
+          <a:effectRef idx="0">
+            <a:schemeClr val="accent6"/>
+          </a:effectRef>
+          <a:fontRef idx="minor">
+            <a:schemeClr val="dk1"/>
+          </a:fontRef>
+        </p:style>
+        <p:txBody>
+          <a:bodyPr rtlCol="0" anchor="ctr"/>
+          <a:lstStyle/>
+          <a:p>
+            <a:pPr algn="ctr"/>
+            <a:r>
+              <a:rPr lang="it-IT" b="1" dirty="0"/>
+              <a:t>OCR </a:t>
+            </a:r>
+            <a:r>
+              <a:rPr lang="it-IT" dirty="0"/>
+              <a:t>linear part</a:t>
+            </a:r>
+          </a:p>
+        </p:txBody>
+      </p:sp>
+      <p:sp>
+        <p:nvSpPr>
+          <p:cNvPr id="22" name="Rettangolo 21">
+            <a:extLst>
+              <a:ext uri="{FF2B5EF4-FFF2-40B4-BE49-F238E27FC236}">
+                <a16:creationId xmlns:a16="http://schemas.microsoft.com/office/drawing/2014/main" id="{20C3CC9C-C3B1-51A9-3EAD-241069657C85}"/>
+              </a:ext>
+            </a:extLst>
+          </p:cNvPr>
+          <p:cNvSpPr/>
+          <p:nvPr/>
+        </p:nvSpPr>
+        <p:spPr>
+          <a:xfrm>
+            <a:off x="8143456" y="1040093"/>
+            <a:ext cx="2365513" cy="954559"/>
+          </a:xfrm>
+          <a:prstGeom prst="rect">
+            <a:avLst/>
+          </a:prstGeom>
+        </p:spPr>
+        <p:style>
+          <a:lnRef idx="2">
+            <a:schemeClr val="accent6"/>
+          </a:lnRef>
+          <a:fillRef idx="1">
+            <a:schemeClr val="lt1"/>
+          </a:fillRef>
+          <a:effectRef idx="0">
+            <a:schemeClr val="accent6"/>
+          </a:effectRef>
+          <a:fontRef idx="minor">
+            <a:schemeClr val="dk1"/>
+          </a:fontRef>
+        </p:style>
+        <p:txBody>
+          <a:bodyPr rtlCol="0" anchor="ctr"/>
+          <a:lstStyle/>
+          <a:p>
+            <a:pPr algn="ctr"/>
+            <a:r>
+              <a:rPr lang="it-IT" b="1" dirty="0" err="1"/>
+              <a:t>Bounding</a:t>
+            </a:r>
+            <a:r>
+              <a:rPr lang="it-IT" b="1" dirty="0"/>
+              <a:t> Box </a:t>
+            </a:r>
+            <a:r>
+              <a:rPr lang="it-IT" dirty="0"/>
+              <a:t>linear part</a:t>
+            </a:r>
+          </a:p>
+        </p:txBody>
+      </p:sp>
+      <p:sp>
+        <p:nvSpPr>
+          <p:cNvPr id="33" name="CasellaDiTesto 32">
+            <a:extLst>
+              <a:ext uri="{FF2B5EF4-FFF2-40B4-BE49-F238E27FC236}">
+                <a16:creationId xmlns:a16="http://schemas.microsoft.com/office/drawing/2014/main" id="{1FAF735B-6006-97BA-00C1-1CDD2B92D9EB}"/>
+              </a:ext>
+            </a:extLst>
+          </p:cNvPr>
+          <p:cNvSpPr txBox="1"/>
+          <p:nvPr/>
+        </p:nvSpPr>
+        <p:spPr>
+          <a:xfrm>
+            <a:off x="6765236" y="1161293"/>
+            <a:ext cx="371061" cy="369332"/>
+          </a:xfrm>
+          <a:prstGeom prst="rect">
+            <a:avLst/>
+          </a:prstGeom>
+          <a:noFill/>
+        </p:spPr>
+        <p:txBody>
+          <a:bodyPr wrap="square" rtlCol="0">
+            <a:spAutoFit/>
+          </a:bodyPr>
+          <a:lstStyle/>
+          <a:p>
+            <a:r>
+              <a:rPr lang="it-IT" b="1" dirty="0"/>
+              <a:t>1</a:t>
+            </a:r>
+          </a:p>
+        </p:txBody>
+      </p:sp>
+      <p:sp>
+        <p:nvSpPr>
+          <p:cNvPr id="34" name="CasellaDiTesto 33">
+            <a:extLst>
+              <a:ext uri="{FF2B5EF4-FFF2-40B4-BE49-F238E27FC236}">
+                <a16:creationId xmlns:a16="http://schemas.microsoft.com/office/drawing/2014/main" id="{3E839ED9-3315-C146-8B99-A2AD718AC4F3}"/>
+              </a:ext>
+            </a:extLst>
+          </p:cNvPr>
+          <p:cNvSpPr txBox="1"/>
+          <p:nvPr/>
+        </p:nvSpPr>
+        <p:spPr>
+          <a:xfrm>
+            <a:off x="6818243" y="4644887"/>
+            <a:ext cx="371061" cy="369332"/>
+          </a:xfrm>
+          <a:prstGeom prst="rect">
+            <a:avLst/>
+          </a:prstGeom>
+          <a:noFill/>
+        </p:spPr>
+        <p:txBody>
+          <a:bodyPr wrap="square" rtlCol="0">
+            <a:spAutoFit/>
+          </a:bodyPr>
+          <a:lstStyle/>
+          <a:p>
+            <a:r>
+              <a:rPr lang="it-IT" b="1" dirty="0"/>
+              <a:t>2</a:t>
+            </a:r>
+          </a:p>
+        </p:txBody>
+      </p:sp>
+      <p:pic>
+        <p:nvPicPr>
+          <p:cNvPr id="37" name="Immagine 36" descr="Immagine che contiene testo, segnaletica, Carattere, cartello&#10;&#10;Il contenuto generato dall'IA potrebbe non essere corretto.">
+            <a:extLst>
+              <a:ext uri="{FF2B5EF4-FFF2-40B4-BE49-F238E27FC236}">
+                <a16:creationId xmlns:a16="http://schemas.microsoft.com/office/drawing/2014/main" id="{F7CA31B2-DC73-AF65-F1FB-96834F382340}"/>
+              </a:ext>
+            </a:extLst>
+          </p:cNvPr>
+          <p:cNvPicPr>
+            <a:picLocks noChangeAspect="1"/>
+          </p:cNvPicPr>
+          <p:nvPr/>
+        </p:nvPicPr>
+        <p:blipFill>
+          <a:blip r:embed="rId3">
+            <a:extLst>
+              <a:ext uri="{28A0092B-C50C-407E-A947-70E740481C1C}">
+                <a14:useLocalDpi xmlns:a14="http://schemas.microsoft.com/office/drawing/2010/main" val="0"/>
+              </a:ext>
+            </a:extLst>
+          </a:blip>
+          <a:stretch>
+            <a:fillRect/>
+          </a:stretch>
+        </p:blipFill>
+        <p:spPr>
+          <a:xfrm>
+            <a:off x="8435624" y="2948821"/>
+            <a:ext cx="1781175" cy="542925"/>
+          </a:xfrm>
+          <a:prstGeom prst="rect">
+            <a:avLst/>
+          </a:prstGeom>
+        </p:spPr>
+      </p:pic>
+      <p:cxnSp>
+        <p:nvCxnSpPr>
+          <p:cNvPr id="57" name="Connettore 2 56">
+            <a:extLst>
+              <a:ext uri="{FF2B5EF4-FFF2-40B4-BE49-F238E27FC236}">
+                <a16:creationId xmlns:a16="http://schemas.microsoft.com/office/drawing/2014/main" id="{EFF032B7-6453-3E3A-FD77-FA1E4A69D586}"/>
+              </a:ext>
+            </a:extLst>
+          </p:cNvPr>
+          <p:cNvCxnSpPr>
+            <a:stCxn id="22" idx="2"/>
+            <a:endCxn id="37" idx="0"/>
+          </p:cNvCxnSpPr>
+          <p:nvPr/>
+        </p:nvCxnSpPr>
+        <p:spPr>
+          <a:xfrm flipH="1">
+            <a:off x="9326212" y="1994652"/>
+            <a:ext cx="1" cy="954169"/>
+          </a:xfrm>
+          <a:prstGeom prst="straightConnector1">
+            <a:avLst/>
+          </a:prstGeom>
+          <a:ln>
+            <a:tailEnd type="triangle"/>
+          </a:ln>
+        </p:spPr>
+        <p:style>
+          <a:lnRef idx="1">
+            <a:schemeClr val="accent1"/>
+          </a:lnRef>
+          <a:fillRef idx="0">
+            <a:schemeClr val="accent1"/>
+          </a:fillRef>
+          <a:effectRef idx="0">
+            <a:schemeClr val="accent1"/>
+          </a:effectRef>
+          <a:fontRef idx="minor">
+            <a:schemeClr val="tx1"/>
+          </a:fontRef>
+        </p:style>
+      </p:cxnSp>
+      <p:cxnSp>
+        <p:nvCxnSpPr>
+          <p:cNvPr id="59" name="Connettore 2 58">
+            <a:extLst>
+              <a:ext uri="{FF2B5EF4-FFF2-40B4-BE49-F238E27FC236}">
+                <a16:creationId xmlns:a16="http://schemas.microsoft.com/office/drawing/2014/main" id="{79890C39-69B6-54B2-D572-22586F201252}"/>
+              </a:ext>
+            </a:extLst>
+          </p:cNvPr>
+          <p:cNvCxnSpPr>
+            <a:stCxn id="37" idx="2"/>
+            <a:endCxn id="21" idx="0"/>
+          </p:cNvCxnSpPr>
+          <p:nvPr/>
+        </p:nvCxnSpPr>
+        <p:spPr>
+          <a:xfrm>
+            <a:off x="9326212" y="3491746"/>
+            <a:ext cx="6631" cy="780734"/>
+          </a:xfrm>
+          <a:prstGeom prst="straightConnector1">
+            <a:avLst/>
+          </a:prstGeom>
+          <a:ln>
+            <a:tailEnd type="triangle"/>
+          </a:ln>
+        </p:spPr>
+        <p:style>
+          <a:lnRef idx="1">
+            <a:schemeClr val="accent1"/>
+          </a:lnRef>
+          <a:fillRef idx="0">
+            <a:schemeClr val="accent1"/>
+          </a:fillRef>
+          <a:effectRef idx="0">
+            <a:schemeClr val="accent1"/>
+          </a:effectRef>
+          <a:fontRef idx="minor">
+            <a:schemeClr val="tx1"/>
+          </a:fontRef>
+        </p:style>
+      </p:cxnSp>
+      <p:cxnSp>
+        <p:nvCxnSpPr>
+          <p:cNvPr id="61" name="Connettore 2 60">
+            <a:extLst>
+              <a:ext uri="{FF2B5EF4-FFF2-40B4-BE49-F238E27FC236}">
+                <a16:creationId xmlns:a16="http://schemas.microsoft.com/office/drawing/2014/main" id="{07DADC82-EAFD-0195-AF64-E095B85EF174}"/>
+              </a:ext>
+            </a:extLst>
+          </p:cNvPr>
+          <p:cNvCxnSpPr>
+            <a:stCxn id="21" idx="2"/>
+          </p:cNvCxnSpPr>
+          <p:nvPr/>
+        </p:nvCxnSpPr>
+        <p:spPr>
+          <a:xfrm>
+            <a:off x="9332843" y="5227039"/>
+            <a:ext cx="0" cy="729813"/>
+          </a:xfrm>
+          <a:prstGeom prst="straightConnector1">
+            <a:avLst/>
+          </a:prstGeom>
+          <a:ln>
+            <a:tailEnd type="triangle"/>
+          </a:ln>
+        </p:spPr>
+        <p:style>
+          <a:lnRef idx="1">
+            <a:schemeClr val="accent1"/>
+          </a:lnRef>
+          <a:fillRef idx="0">
+            <a:schemeClr val="accent1"/>
+          </a:fillRef>
+          <a:effectRef idx="0">
+            <a:schemeClr val="accent1"/>
+          </a:effectRef>
+          <a:fontRef idx="minor">
+            <a:schemeClr val="tx1"/>
+          </a:fontRef>
+        </p:style>
+      </p:cxnSp>
+      <p:sp>
+        <p:nvSpPr>
+          <p:cNvPr id="62" name="CasellaDiTesto 61">
+            <a:extLst>
+              <a:ext uri="{FF2B5EF4-FFF2-40B4-BE49-F238E27FC236}">
+                <a16:creationId xmlns:a16="http://schemas.microsoft.com/office/drawing/2014/main" id="{C1D28CE9-35E8-8061-52EA-3350F4290381}"/>
+              </a:ext>
+            </a:extLst>
+          </p:cNvPr>
+          <p:cNvSpPr txBox="1"/>
+          <p:nvPr/>
+        </p:nvSpPr>
+        <p:spPr>
+          <a:xfrm>
+            <a:off x="8660597" y="5996932"/>
+            <a:ext cx="1331228" cy="369332"/>
+          </a:xfrm>
+          <a:prstGeom prst="rect">
+            <a:avLst/>
+          </a:prstGeom>
+          <a:noFill/>
+        </p:spPr>
+        <p:txBody>
+          <a:bodyPr wrap="square" rtlCol="0">
+            <a:spAutoFit/>
+          </a:bodyPr>
+          <a:lstStyle/>
+          <a:p>
+            <a:r>
+              <a:rPr lang="it-IT" dirty="0"/>
+              <a:t> </a:t>
+            </a:r>
+            <a:r>
+              <a:rPr lang="ja-JP" altLang="it-IT" dirty="0"/>
+              <a:t>皖</a:t>
+            </a:r>
+            <a:r>
+              <a:rPr lang="it-IT" dirty="0"/>
+              <a:t>AR0011</a:t>
+            </a:r>
+          </a:p>
+        </p:txBody>
+      </p:sp>
+      <p:sp>
+        <p:nvSpPr>
+          <p:cNvPr id="63" name="Titolo 1">
+            <a:extLst>
+              <a:ext uri="{FF2B5EF4-FFF2-40B4-BE49-F238E27FC236}">
+                <a16:creationId xmlns:a16="http://schemas.microsoft.com/office/drawing/2014/main" id="{45FFD718-1FCF-15BD-0F77-D9F294A04632}"/>
+              </a:ext>
+            </a:extLst>
+          </p:cNvPr>
+          <p:cNvSpPr>
+            <a:spLocks noGrp="1"/>
+          </p:cNvSpPr>
+          <p:nvPr>
+            <p:ph type="title"/>
+          </p:nvPr>
+        </p:nvSpPr>
+        <p:spPr>
+          <a:xfrm>
+            <a:off x="462454" y="352505"/>
+            <a:ext cx="4268571" cy="1097280"/>
+          </a:xfrm>
+        </p:spPr>
+        <p:txBody>
+          <a:bodyPr>
+            <a:normAutofit/>
+          </a:bodyPr>
+          <a:lstStyle/>
+          <a:p>
+            <a:r>
+              <a:rPr lang="it-IT" dirty="0" err="1"/>
+              <a:t>Unified</a:t>
+            </a:r>
+            <a:r>
+              <a:rPr lang="it-IT" dirty="0"/>
+              <a:t> ResNet18</a:t>
+            </a:r>
+          </a:p>
+        </p:txBody>
+      </p:sp>
+      <p:pic>
+        <p:nvPicPr>
+          <p:cNvPr id="66" name="Immagine 65" descr="Immagine che contiene design, penna&#10;&#10;Il contenuto generato dall'IA potrebbe non essere corretto.">
+            <a:extLst>
+              <a:ext uri="{FF2B5EF4-FFF2-40B4-BE49-F238E27FC236}">
+                <a16:creationId xmlns:a16="http://schemas.microsoft.com/office/drawing/2014/main" id="{0D06060A-86F4-40E1-0EA2-51346F637C0C}"/>
+              </a:ext>
+            </a:extLst>
+          </p:cNvPr>
+          <p:cNvPicPr>
+            <a:picLocks noChangeAspect="1"/>
+          </p:cNvPicPr>
+          <p:nvPr/>
+        </p:nvPicPr>
+        <p:blipFill>
+          <a:blip r:embed="rId4">
+            <a:extLst>
+              <a:ext uri="{28A0092B-C50C-407E-A947-70E740481C1C}">
+                <a14:useLocalDpi xmlns:a14="http://schemas.microsoft.com/office/drawing/2010/main" val="0"/>
+              </a:ext>
+            </a:extLst>
+          </a:blip>
+          <a:stretch>
+            <a:fillRect/>
+          </a:stretch>
+        </p:blipFill>
+        <p:spPr>
+          <a:xfrm>
+            <a:off x="729305" y="4749759"/>
+            <a:ext cx="5651616" cy="1522612"/>
+          </a:xfrm>
+          <a:prstGeom prst="rect">
+            <a:avLst/>
+          </a:prstGeom>
+        </p:spPr>
+      </p:pic>
+      <p:cxnSp>
+        <p:nvCxnSpPr>
+          <p:cNvPr id="68" name="Connettore 2 67">
+            <a:extLst>
+              <a:ext uri="{FF2B5EF4-FFF2-40B4-BE49-F238E27FC236}">
+                <a16:creationId xmlns:a16="http://schemas.microsoft.com/office/drawing/2014/main" id="{C191C586-9620-38C4-4753-9D0501B569CF}"/>
+              </a:ext>
+            </a:extLst>
+          </p:cNvPr>
+          <p:cNvCxnSpPr>
+            <a:stCxn id="10" idx="2"/>
+          </p:cNvCxnSpPr>
+          <p:nvPr/>
+        </p:nvCxnSpPr>
+        <p:spPr>
+          <a:xfrm flipH="1">
+            <a:off x="4926494" y="3972337"/>
+            <a:ext cx="1" cy="777422"/>
+          </a:xfrm>
+          <a:prstGeom prst="straightConnector1">
+            <a:avLst/>
+          </a:prstGeom>
+          <a:ln>
+            <a:tailEnd type="triangle"/>
+          </a:ln>
+        </p:spPr>
+        <p:style>
+          <a:lnRef idx="1">
+            <a:schemeClr val="accent1"/>
+          </a:lnRef>
+          <a:fillRef idx="0">
+            <a:schemeClr val="accent1"/>
+          </a:fillRef>
+          <a:effectRef idx="0">
+            <a:schemeClr val="accent1"/>
+          </a:effectRef>
+          <a:fontRef idx="minor">
+            <a:schemeClr val="tx1"/>
+          </a:fontRef>
+        </p:style>
+      </p:cxnSp>
     </p:spTree>
     <p:extLst>
       <p:ext uri="{BB962C8B-B14F-4D97-AF65-F5344CB8AC3E}">
@@ -6651,7 +6610,7 @@
         <p:spPr/>
         <p:txBody>
           <a:bodyPr>
-            <a:normAutofit fontScale="47500" lnSpcReduction="20000"/>
+            <a:normAutofit fontScale="70000" lnSpcReduction="20000"/>
           </a:bodyPr>
           <a:lstStyle/>
           <a:p>
@@ -6827,61 +6786,701 @@
           <a:chExt cx="0" cy="0"/>
         </a:xfrm>
       </p:grpSpPr>
-      <p:sp>
-        <p:nvSpPr>
-          <p:cNvPr id="2" name="Titolo 1">
+      <p:pic>
+        <p:nvPicPr>
+          <p:cNvPr id="6" name="Immagine 5" descr="Immagine che contiene testo, Targa di veicolo, veicolo, Veicolo terrestre&#10;&#10;Il contenuto generato dall'IA potrebbe non essere corretto.">
             <a:extLst>
               <a:ext uri="{FF2B5EF4-FFF2-40B4-BE49-F238E27FC236}">
-                <a16:creationId xmlns:a16="http://schemas.microsoft.com/office/drawing/2014/main" id="{114FFCF9-7D0C-2402-1C3D-1BE64F441602}"/>
+                <a16:creationId xmlns:a16="http://schemas.microsoft.com/office/drawing/2014/main" id="{718C0D28-2DC5-2CFB-6665-1B041D764D4E}"/>
               </a:ext>
             </a:extLst>
           </p:cNvPr>
-          <p:cNvSpPr>
-            <a:spLocks noGrp="1"/>
-          </p:cNvSpPr>
-          <p:nvPr>
-            <p:ph type="title"/>
-          </p:nvPr>
-        </p:nvSpPr>
-        <p:spPr/>
-        <p:txBody>
-          <a:bodyPr/>
-          <a:lstStyle/>
-          <a:p>
-            <a:r>
-              <a:rPr lang="it-IT" dirty="0"/>
-              <a:t>Immaginetta che spiega </a:t>
-            </a:r>
-            <a:r>
-              <a:rPr lang="it-IT" dirty="0" err="1"/>
-              <a:t>pdlpr</a:t>
-            </a:r>
-            <a:endParaRPr lang="it-IT" dirty="0"/>
-          </a:p>
-        </p:txBody>
-      </p:sp>
-      <p:sp>
-        <p:nvSpPr>
-          <p:cNvPr id="3" name="Segnaposto contenuto 2">
+          <p:cNvPicPr>
+            <a:picLocks noChangeAspect="1"/>
+          </p:cNvPicPr>
+          <p:nvPr/>
+        </p:nvPicPr>
+        <p:blipFill>
+          <a:blip r:embed="rId2">
+            <a:extLst>
+              <a:ext uri="{28A0092B-C50C-407E-A947-70E740481C1C}">
+                <a14:useLocalDpi xmlns:a14="http://schemas.microsoft.com/office/drawing/2010/main" val="0"/>
+              </a:ext>
+            </a:extLst>
+          </a:blip>
+          <a:stretch>
+            <a:fillRect/>
+          </a:stretch>
+        </p:blipFill>
+        <p:spPr>
+          <a:xfrm>
+            <a:off x="2107308" y="2011485"/>
+            <a:ext cx="1484115" cy="2391074"/>
+          </a:xfrm>
+          <a:prstGeom prst="rect">
+            <a:avLst/>
+          </a:prstGeom>
+        </p:spPr>
+      </p:pic>
+      <p:cxnSp>
+        <p:nvCxnSpPr>
+          <p:cNvPr id="7" name="Connettore 2 6">
             <a:extLst>
               <a:ext uri="{FF2B5EF4-FFF2-40B4-BE49-F238E27FC236}">
-                <a16:creationId xmlns:a16="http://schemas.microsoft.com/office/drawing/2014/main" id="{0EC8836F-C7E2-2208-DDE7-1878B6ADA928}"/>
+                <a16:creationId xmlns:a16="http://schemas.microsoft.com/office/drawing/2014/main" id="{7B55C34A-17F2-FF2A-AA1B-C0D8DFE1BDA9}"/>
               </a:ext>
             </a:extLst>
           </p:cNvPr>
-          <p:cNvSpPr>
-            <a:spLocks noGrp="1"/>
-          </p:cNvSpPr>
-          <p:nvPr>
-            <p:ph idx="1"/>
-          </p:nvPr>
-        </p:nvSpPr>
-        <p:spPr/>
-        <p:txBody>
-          <a:bodyPr/>
-          <a:lstStyle/>
-          <a:p>
-            <a:endParaRPr lang="it-IT"/>
+          <p:cNvCxnSpPr>
+            <a:cxnSpLocks/>
+          </p:cNvCxnSpPr>
+          <p:nvPr/>
+        </p:nvCxnSpPr>
+        <p:spPr>
+          <a:xfrm>
+            <a:off x="3591423" y="3207022"/>
+            <a:ext cx="669151" cy="0"/>
+          </a:xfrm>
+          <a:prstGeom prst="straightConnector1">
+            <a:avLst/>
+          </a:prstGeom>
+          <a:ln>
+            <a:tailEnd type="triangle"/>
+          </a:ln>
+        </p:spPr>
+        <p:style>
+          <a:lnRef idx="1">
+            <a:schemeClr val="accent1"/>
+          </a:lnRef>
+          <a:fillRef idx="0">
+            <a:schemeClr val="accent1"/>
+          </a:fillRef>
+          <a:effectRef idx="0">
+            <a:schemeClr val="accent1"/>
+          </a:effectRef>
+          <a:fontRef idx="minor">
+            <a:schemeClr val="tx1"/>
+          </a:fontRef>
+        </p:style>
+      </p:cxnSp>
+      <p:sp>
+        <p:nvSpPr>
+          <p:cNvPr id="8" name="Rettangolo 7">
+            <a:extLst>
+              <a:ext uri="{FF2B5EF4-FFF2-40B4-BE49-F238E27FC236}">
+                <a16:creationId xmlns:a16="http://schemas.microsoft.com/office/drawing/2014/main" id="{FF047ACC-B9A0-6DA6-BEE2-CADAE0EF66E6}"/>
+              </a:ext>
+            </a:extLst>
+          </p:cNvPr>
+          <p:cNvSpPr/>
+          <p:nvPr/>
+        </p:nvSpPr>
+        <p:spPr>
+          <a:xfrm>
+            <a:off x="4260574" y="2309188"/>
+            <a:ext cx="2073965" cy="1795669"/>
+          </a:xfrm>
+          <a:prstGeom prst="rect">
+            <a:avLst/>
+          </a:prstGeom>
+        </p:spPr>
+        <p:style>
+          <a:lnRef idx="2">
+            <a:schemeClr val="accent6"/>
+          </a:lnRef>
+          <a:fillRef idx="1">
+            <a:schemeClr val="lt1"/>
+          </a:fillRef>
+          <a:effectRef idx="0">
+            <a:schemeClr val="accent6"/>
+          </a:effectRef>
+          <a:fontRef idx="minor">
+            <a:schemeClr val="dk1"/>
+          </a:fontRef>
+        </p:style>
+        <p:txBody>
+          <a:bodyPr rtlCol="0" anchor="ctr"/>
+          <a:lstStyle/>
+          <a:p>
+            <a:pPr algn="ctr"/>
+            <a:r>
+              <a:rPr lang="it-IT" dirty="0"/>
+              <a:t>Object </a:t>
+            </a:r>
+            <a:r>
+              <a:rPr lang="it-IT" dirty="0" err="1"/>
+              <a:t>detection</a:t>
+            </a:r>
+            <a:r>
+              <a:rPr lang="it-IT" dirty="0">
+                <a:ln w="0"/>
+                <a:solidFill>
+                  <a:schemeClr val="tx1"/>
+                </a:solidFill>
+                <a:effectLst>
+                  <a:outerShdw blurRad="38100" dist="19050" dir="2700000" algn="tl" rotWithShape="0">
+                    <a:schemeClr val="dk1">
+                      <a:alpha val="40000"/>
+                    </a:schemeClr>
+                  </a:outerShdw>
+                </a:effectLst>
+              </a:rPr>
+              <a:t>:</a:t>
+            </a:r>
+          </a:p>
+          <a:p>
+            <a:pPr algn="ctr"/>
+            <a:r>
+              <a:rPr lang="it-IT" dirty="0">
+                <a:ln w="0"/>
+                <a:solidFill>
+                  <a:schemeClr val="tx1"/>
+                </a:solidFill>
+                <a:effectLst>
+                  <a:outerShdw blurRad="38100" dist="19050" dir="2700000" algn="tl" rotWithShape="0">
+                    <a:schemeClr val="dk1">
+                      <a:alpha val="40000"/>
+                    </a:schemeClr>
+                  </a:outerShdw>
+                </a:effectLst>
+              </a:rPr>
+              <a:t>Yolov5</a:t>
+            </a:r>
+          </a:p>
+        </p:txBody>
+      </p:sp>
+      <p:sp>
+        <p:nvSpPr>
+          <p:cNvPr id="14" name="Rettangolo 13">
+            <a:extLst>
+              <a:ext uri="{FF2B5EF4-FFF2-40B4-BE49-F238E27FC236}">
+                <a16:creationId xmlns:a16="http://schemas.microsoft.com/office/drawing/2014/main" id="{042EF113-A38C-D0BD-B680-E92E209BB71D}"/>
+              </a:ext>
+            </a:extLst>
+          </p:cNvPr>
+          <p:cNvSpPr/>
+          <p:nvPr/>
+        </p:nvSpPr>
+        <p:spPr>
+          <a:xfrm>
+            <a:off x="8143456" y="1040093"/>
+            <a:ext cx="1563761" cy="954559"/>
+          </a:xfrm>
+          <a:prstGeom prst="rect">
+            <a:avLst/>
+          </a:prstGeom>
+        </p:spPr>
+        <p:style>
+          <a:lnRef idx="2">
+            <a:schemeClr val="accent6"/>
+          </a:lnRef>
+          <a:fillRef idx="1">
+            <a:schemeClr val="lt1"/>
+          </a:fillRef>
+          <a:effectRef idx="0">
+            <a:schemeClr val="accent6"/>
+          </a:effectRef>
+          <a:fontRef idx="minor">
+            <a:schemeClr val="dk1"/>
+          </a:fontRef>
+        </p:style>
+        <p:txBody>
+          <a:bodyPr rtlCol="0" anchor="ctr"/>
+          <a:lstStyle/>
+          <a:p>
+            <a:pPr algn="ctr"/>
+            <a:r>
+              <a:rPr lang="it-IT" b="1" dirty="0"/>
+              <a:t>IGFE</a:t>
+            </a:r>
+            <a:endParaRPr lang="it-IT" dirty="0"/>
+          </a:p>
+        </p:txBody>
+      </p:sp>
+      <p:pic>
+        <p:nvPicPr>
+          <p:cNvPr id="17" name="Immagine 16" descr="Immagine che contiene testo, segnaletica, Carattere, cartello&#10;&#10;Il contenuto generato dall'IA potrebbe non essere corretto.">
+            <a:extLst>
+              <a:ext uri="{FF2B5EF4-FFF2-40B4-BE49-F238E27FC236}">
+                <a16:creationId xmlns:a16="http://schemas.microsoft.com/office/drawing/2014/main" id="{EDD52D5A-3797-2BE9-DCB0-F92B3CFAF9D4}"/>
+              </a:ext>
+            </a:extLst>
+          </p:cNvPr>
+          <p:cNvPicPr>
+            <a:picLocks noChangeAspect="1"/>
+          </p:cNvPicPr>
+          <p:nvPr/>
+        </p:nvPicPr>
+        <p:blipFill>
+          <a:blip r:embed="rId3">
+            <a:extLst>
+              <a:ext uri="{28A0092B-C50C-407E-A947-70E740481C1C}">
+                <a14:useLocalDpi xmlns:a14="http://schemas.microsoft.com/office/drawing/2010/main" val="0"/>
+              </a:ext>
+            </a:extLst>
+          </a:blip>
+          <a:stretch>
+            <a:fillRect/>
+          </a:stretch>
+        </p:blipFill>
+        <p:spPr>
+          <a:xfrm>
+            <a:off x="6334539" y="983726"/>
+            <a:ext cx="1463120" cy="445978"/>
+          </a:xfrm>
+          <a:prstGeom prst="rect">
+            <a:avLst/>
+          </a:prstGeom>
+        </p:spPr>
+      </p:pic>
+      <p:sp>
+        <p:nvSpPr>
+          <p:cNvPr id="21" name="Titolo 1">
+            <a:extLst>
+              <a:ext uri="{FF2B5EF4-FFF2-40B4-BE49-F238E27FC236}">
+                <a16:creationId xmlns:a16="http://schemas.microsoft.com/office/drawing/2014/main" id="{FD00B692-C870-163E-E8AA-A63C6B5D0A11}"/>
+              </a:ext>
+            </a:extLst>
+          </p:cNvPr>
+          <p:cNvSpPr>
+            <a:spLocks noGrp="1"/>
+          </p:cNvSpPr>
+          <p:nvPr>
+            <p:ph type="title"/>
+          </p:nvPr>
+        </p:nvSpPr>
+        <p:spPr>
+          <a:xfrm>
+            <a:off x="462454" y="352505"/>
+            <a:ext cx="4268571" cy="1097280"/>
+          </a:xfrm>
+        </p:spPr>
+        <p:txBody>
+          <a:bodyPr>
+            <a:normAutofit/>
+          </a:bodyPr>
+          <a:lstStyle/>
+          <a:p>
+            <a:r>
+              <a:rPr lang="it-IT" dirty="0"/>
+              <a:t>Yolov5 + PLDPR</a:t>
+            </a:r>
+          </a:p>
+        </p:txBody>
+      </p:sp>
+      <p:sp>
+        <p:nvSpPr>
+          <p:cNvPr id="33" name="Rettangolo 32">
+            <a:extLst>
+              <a:ext uri="{FF2B5EF4-FFF2-40B4-BE49-F238E27FC236}">
+                <a16:creationId xmlns:a16="http://schemas.microsoft.com/office/drawing/2014/main" id="{03FD725E-F12C-A4DC-E305-DD217E70876D}"/>
+              </a:ext>
+            </a:extLst>
+          </p:cNvPr>
+          <p:cNvSpPr/>
+          <p:nvPr/>
+        </p:nvSpPr>
+        <p:spPr>
+          <a:xfrm>
+            <a:off x="8143451" y="2760289"/>
+            <a:ext cx="1563761" cy="954559"/>
+          </a:xfrm>
+          <a:prstGeom prst="rect">
+            <a:avLst/>
+          </a:prstGeom>
+        </p:spPr>
+        <p:style>
+          <a:lnRef idx="2">
+            <a:schemeClr val="accent6"/>
+          </a:lnRef>
+          <a:fillRef idx="1">
+            <a:schemeClr val="lt1"/>
+          </a:fillRef>
+          <a:effectRef idx="0">
+            <a:schemeClr val="accent6"/>
+          </a:effectRef>
+          <a:fontRef idx="minor">
+            <a:schemeClr val="dk1"/>
+          </a:fontRef>
+        </p:style>
+        <p:txBody>
+          <a:bodyPr rtlCol="0" anchor="ctr"/>
+          <a:lstStyle/>
+          <a:p>
+            <a:pPr algn="ctr"/>
+            <a:r>
+              <a:rPr lang="it-IT" b="1" dirty="0"/>
+              <a:t>Encoder</a:t>
+            </a:r>
+            <a:endParaRPr lang="it-IT" dirty="0"/>
+          </a:p>
+        </p:txBody>
+      </p:sp>
+      <p:sp>
+        <p:nvSpPr>
+          <p:cNvPr id="34" name="Rettangolo 33">
+            <a:extLst>
+              <a:ext uri="{FF2B5EF4-FFF2-40B4-BE49-F238E27FC236}">
+                <a16:creationId xmlns:a16="http://schemas.microsoft.com/office/drawing/2014/main" id="{A90A64C3-1FC2-1C02-50A4-6A0ED0E4FC64}"/>
+              </a:ext>
+            </a:extLst>
+          </p:cNvPr>
+          <p:cNvSpPr/>
+          <p:nvPr/>
+        </p:nvSpPr>
+        <p:spPr>
+          <a:xfrm>
+            <a:off x="8143451" y="4562583"/>
+            <a:ext cx="1563761" cy="954559"/>
+          </a:xfrm>
+          <a:prstGeom prst="rect">
+            <a:avLst/>
+          </a:prstGeom>
+        </p:spPr>
+        <p:style>
+          <a:lnRef idx="2">
+            <a:schemeClr val="accent6"/>
+          </a:lnRef>
+          <a:fillRef idx="1">
+            <a:schemeClr val="lt1"/>
+          </a:fillRef>
+          <a:effectRef idx="0">
+            <a:schemeClr val="accent6"/>
+          </a:effectRef>
+          <a:fontRef idx="minor">
+            <a:schemeClr val="dk1"/>
+          </a:fontRef>
+        </p:style>
+        <p:txBody>
+          <a:bodyPr rtlCol="0" anchor="ctr"/>
+          <a:lstStyle/>
+          <a:p>
+            <a:pPr algn="ctr"/>
+            <a:r>
+              <a:rPr lang="it-IT" b="1" dirty="0" err="1"/>
+              <a:t>Parallel</a:t>
+            </a:r>
+            <a:r>
+              <a:rPr lang="it-IT" b="1" dirty="0"/>
+              <a:t> Decoder</a:t>
+            </a:r>
+            <a:endParaRPr lang="it-IT" dirty="0"/>
+          </a:p>
+        </p:txBody>
+      </p:sp>
+      <p:cxnSp>
+        <p:nvCxnSpPr>
+          <p:cNvPr id="37" name="Connettore a gomito 36">
+            <a:extLst>
+              <a:ext uri="{FF2B5EF4-FFF2-40B4-BE49-F238E27FC236}">
+                <a16:creationId xmlns:a16="http://schemas.microsoft.com/office/drawing/2014/main" id="{793DFC5B-4108-7123-98E3-D4D15EA5EE3B}"/>
+              </a:ext>
+            </a:extLst>
+          </p:cNvPr>
+          <p:cNvCxnSpPr>
+            <a:stCxn id="8" idx="3"/>
+            <a:endCxn id="14" idx="1"/>
+          </p:cNvCxnSpPr>
+          <p:nvPr/>
+        </p:nvCxnSpPr>
+        <p:spPr>
+          <a:xfrm flipV="1">
+            <a:off x="6334539" y="1517373"/>
+            <a:ext cx="1808917" cy="1689650"/>
+          </a:xfrm>
+          <a:prstGeom prst="bentConnector3">
+            <a:avLst/>
+          </a:prstGeom>
+          <a:ln>
+            <a:tailEnd type="triangle"/>
+          </a:ln>
+        </p:spPr>
+        <p:style>
+          <a:lnRef idx="1">
+            <a:schemeClr val="accent1"/>
+          </a:lnRef>
+          <a:fillRef idx="0">
+            <a:schemeClr val="accent1"/>
+          </a:fillRef>
+          <a:effectRef idx="0">
+            <a:schemeClr val="accent1"/>
+          </a:effectRef>
+          <a:fontRef idx="minor">
+            <a:schemeClr val="tx1"/>
+          </a:fontRef>
+        </p:style>
+      </p:cxnSp>
+      <p:sp>
+        <p:nvSpPr>
+          <p:cNvPr id="38" name="CasellaDiTesto 37">
+            <a:extLst>
+              <a:ext uri="{FF2B5EF4-FFF2-40B4-BE49-F238E27FC236}">
+                <a16:creationId xmlns:a16="http://schemas.microsoft.com/office/drawing/2014/main" id="{F019F91C-24CD-9B06-749F-0D3B06348A78}"/>
+              </a:ext>
+            </a:extLst>
+          </p:cNvPr>
+          <p:cNvSpPr txBox="1"/>
+          <p:nvPr/>
+        </p:nvSpPr>
+        <p:spPr>
+          <a:xfrm>
+            <a:off x="10075266" y="5824653"/>
+            <a:ext cx="1331228" cy="369332"/>
+          </a:xfrm>
+          <a:prstGeom prst="rect">
+            <a:avLst/>
+          </a:prstGeom>
+          <a:noFill/>
+        </p:spPr>
+        <p:txBody>
+          <a:bodyPr wrap="square" rtlCol="0">
+            <a:spAutoFit/>
+          </a:bodyPr>
+          <a:lstStyle/>
+          <a:p>
+            <a:r>
+              <a:rPr lang="it-IT" dirty="0"/>
+              <a:t> </a:t>
+            </a:r>
+            <a:r>
+              <a:rPr lang="ja-JP" altLang="it-IT" dirty="0"/>
+              <a:t>皖</a:t>
+            </a:r>
+            <a:r>
+              <a:rPr lang="it-IT" dirty="0"/>
+              <a:t>AR0011</a:t>
+            </a:r>
+          </a:p>
+        </p:txBody>
+      </p:sp>
+      <p:cxnSp>
+        <p:nvCxnSpPr>
+          <p:cNvPr id="40" name="Connettore a gomito 39">
+            <a:extLst>
+              <a:ext uri="{FF2B5EF4-FFF2-40B4-BE49-F238E27FC236}">
+                <a16:creationId xmlns:a16="http://schemas.microsoft.com/office/drawing/2014/main" id="{BE85A48F-87B7-A4CA-B728-AB9135E31875}"/>
+              </a:ext>
+            </a:extLst>
+          </p:cNvPr>
+          <p:cNvCxnSpPr>
+            <a:stCxn id="34" idx="2"/>
+            <a:endCxn id="38" idx="1"/>
+          </p:cNvCxnSpPr>
+          <p:nvPr/>
+        </p:nvCxnSpPr>
+        <p:spPr>
+          <a:xfrm rot="16200000" flipH="1">
+            <a:off x="9254211" y="5188263"/>
+            <a:ext cx="492177" cy="1149934"/>
+          </a:xfrm>
+          <a:prstGeom prst="bentConnector2">
+            <a:avLst/>
+          </a:prstGeom>
+          <a:ln>
+            <a:tailEnd type="triangle"/>
+          </a:ln>
+        </p:spPr>
+        <p:style>
+          <a:lnRef idx="1">
+            <a:schemeClr val="accent1"/>
+          </a:lnRef>
+          <a:fillRef idx="0">
+            <a:schemeClr val="accent1"/>
+          </a:fillRef>
+          <a:effectRef idx="0">
+            <a:schemeClr val="accent1"/>
+          </a:effectRef>
+          <a:fontRef idx="minor">
+            <a:schemeClr val="tx1"/>
+          </a:fontRef>
+        </p:style>
+      </p:cxnSp>
+      <p:cxnSp>
+        <p:nvCxnSpPr>
+          <p:cNvPr id="43" name="Connettore 2 42">
+            <a:extLst>
+              <a:ext uri="{FF2B5EF4-FFF2-40B4-BE49-F238E27FC236}">
+                <a16:creationId xmlns:a16="http://schemas.microsoft.com/office/drawing/2014/main" id="{195393C4-C676-E94A-EDAF-179ECDA4BC87}"/>
+              </a:ext>
+            </a:extLst>
+          </p:cNvPr>
+          <p:cNvCxnSpPr>
+            <a:stCxn id="14" idx="2"/>
+            <a:endCxn id="33" idx="0"/>
+          </p:cNvCxnSpPr>
+          <p:nvPr/>
+        </p:nvCxnSpPr>
+        <p:spPr>
+          <a:xfrm flipH="1">
+            <a:off x="8925332" y="1994652"/>
+            <a:ext cx="5" cy="765637"/>
+          </a:xfrm>
+          <a:prstGeom prst="straightConnector1">
+            <a:avLst/>
+          </a:prstGeom>
+          <a:ln>
+            <a:tailEnd type="triangle"/>
+          </a:ln>
+        </p:spPr>
+        <p:style>
+          <a:lnRef idx="1">
+            <a:schemeClr val="accent1"/>
+          </a:lnRef>
+          <a:fillRef idx="0">
+            <a:schemeClr val="accent1"/>
+          </a:fillRef>
+          <a:effectRef idx="0">
+            <a:schemeClr val="accent1"/>
+          </a:effectRef>
+          <a:fontRef idx="minor">
+            <a:schemeClr val="tx1"/>
+          </a:fontRef>
+        </p:style>
+      </p:cxnSp>
+      <p:cxnSp>
+        <p:nvCxnSpPr>
+          <p:cNvPr id="46" name="Connettore 2 45">
+            <a:extLst>
+              <a:ext uri="{FF2B5EF4-FFF2-40B4-BE49-F238E27FC236}">
+                <a16:creationId xmlns:a16="http://schemas.microsoft.com/office/drawing/2014/main" id="{56D9FFC2-6B3E-B949-7238-E9CDC13F24D9}"/>
+              </a:ext>
+            </a:extLst>
+          </p:cNvPr>
+          <p:cNvCxnSpPr>
+            <a:stCxn id="33" idx="2"/>
+            <a:endCxn id="34" idx="0"/>
+          </p:cNvCxnSpPr>
+          <p:nvPr/>
+        </p:nvCxnSpPr>
+        <p:spPr>
+          <a:xfrm>
+            <a:off x="8925332" y="3714848"/>
+            <a:ext cx="0" cy="847735"/>
+          </a:xfrm>
+          <a:prstGeom prst="straightConnector1">
+            <a:avLst/>
+          </a:prstGeom>
+          <a:ln>
+            <a:tailEnd type="triangle"/>
+          </a:ln>
+        </p:spPr>
+        <p:style>
+          <a:lnRef idx="1">
+            <a:schemeClr val="accent1"/>
+          </a:lnRef>
+          <a:fillRef idx="0">
+            <a:schemeClr val="accent1"/>
+          </a:fillRef>
+          <a:effectRef idx="0">
+            <a:schemeClr val="accent1"/>
+          </a:effectRef>
+          <a:fontRef idx="minor">
+            <a:schemeClr val="tx1"/>
+          </a:fontRef>
+        </p:style>
+      </p:cxnSp>
+      <p:sp>
+        <p:nvSpPr>
+          <p:cNvPr id="47" name="CasellaDiTesto 46">
+            <a:extLst>
+              <a:ext uri="{FF2B5EF4-FFF2-40B4-BE49-F238E27FC236}">
+                <a16:creationId xmlns:a16="http://schemas.microsoft.com/office/drawing/2014/main" id="{18B75555-802D-4F2B-7610-099CFDA6FAC8}"/>
+              </a:ext>
+            </a:extLst>
+          </p:cNvPr>
+          <p:cNvSpPr txBox="1"/>
+          <p:nvPr/>
+        </p:nvSpPr>
+        <p:spPr>
+          <a:xfrm>
+            <a:off x="9104159" y="2177532"/>
+            <a:ext cx="1289397" cy="369332"/>
+          </a:xfrm>
+          <a:prstGeom prst="rect">
+            <a:avLst/>
+          </a:prstGeom>
+          <a:noFill/>
+        </p:spPr>
+        <p:txBody>
+          <a:bodyPr wrap="square" rtlCol="0">
+            <a:spAutoFit/>
+          </a:bodyPr>
+          <a:lstStyle/>
+          <a:p>
+            <a:r>
+              <a:rPr lang="it-IT" dirty="0"/>
+              <a:t>512 x 6 x 18</a:t>
+            </a:r>
+          </a:p>
+        </p:txBody>
+      </p:sp>
+      <p:sp>
+        <p:nvSpPr>
+          <p:cNvPr id="48" name="CasellaDiTesto 47">
+            <a:extLst>
+              <a:ext uri="{FF2B5EF4-FFF2-40B4-BE49-F238E27FC236}">
+                <a16:creationId xmlns:a16="http://schemas.microsoft.com/office/drawing/2014/main" id="{44D377E1-8E49-4153-2940-05DCF9E3D487}"/>
+              </a:ext>
+            </a:extLst>
+          </p:cNvPr>
+          <p:cNvSpPr txBox="1"/>
+          <p:nvPr/>
+        </p:nvSpPr>
+        <p:spPr>
+          <a:xfrm>
+            <a:off x="6421400" y="614394"/>
+            <a:ext cx="1289397" cy="369332"/>
+          </a:xfrm>
+          <a:prstGeom prst="rect">
+            <a:avLst/>
+          </a:prstGeom>
+          <a:noFill/>
+        </p:spPr>
+        <p:txBody>
+          <a:bodyPr wrap="square" rtlCol="0">
+            <a:spAutoFit/>
+          </a:bodyPr>
+          <a:lstStyle/>
+          <a:p>
+            <a:r>
+              <a:rPr lang="it-IT" dirty="0"/>
+              <a:t>48 x 144 x 3</a:t>
+            </a:r>
+          </a:p>
+        </p:txBody>
+      </p:sp>
+      <p:sp>
+        <p:nvSpPr>
+          <p:cNvPr id="50" name="CasellaDiTesto 49">
+            <a:extLst>
+              <a:ext uri="{FF2B5EF4-FFF2-40B4-BE49-F238E27FC236}">
+                <a16:creationId xmlns:a16="http://schemas.microsoft.com/office/drawing/2014/main" id="{222A0C0A-23D5-FB86-3C9C-EB11E1D4CFDE}"/>
+              </a:ext>
+            </a:extLst>
+          </p:cNvPr>
+          <p:cNvSpPr txBox="1"/>
+          <p:nvPr/>
+        </p:nvSpPr>
+        <p:spPr>
+          <a:xfrm>
+            <a:off x="9104159" y="3979825"/>
+            <a:ext cx="1289397" cy="369332"/>
+          </a:xfrm>
+          <a:prstGeom prst="rect">
+            <a:avLst/>
+          </a:prstGeom>
+          <a:noFill/>
+        </p:spPr>
+        <p:txBody>
+          <a:bodyPr wrap="square" rtlCol="0">
+            <a:spAutoFit/>
+          </a:bodyPr>
+          <a:lstStyle/>
+          <a:p>
+            <a:r>
+              <a:rPr lang="it-IT" dirty="0"/>
+              <a:t>512 x 6 x 18</a:t>
+            </a:r>
           </a:p>
         </p:txBody>
       </p:sp>
@@ -6899,9 +7498,9 @@
 </file>
 
 <file path=ppt/theme/theme1.xml><?xml version="1.0" encoding="utf-8"?>
-<a:theme xmlns:a="http://schemas.openxmlformats.org/drawingml/2006/main" name="DashVTI">
+<a:theme xmlns:a="http://schemas.openxmlformats.org/drawingml/2006/main" name="Office 2013 - Tema 2022">
   <a:themeElements>
-    <a:clrScheme name="Custom 6">
+    <a:clrScheme name="Office 2013 - Tema 2022">
       <a:dk1>
         <a:sysClr val="windowText" lastClr="000000"/>
       </a:dk1>
@@ -6909,49 +7508,109 @@
         <a:sysClr val="window" lastClr="FFFFFF"/>
       </a:lt1>
       <a:dk2>
-        <a:srgbClr val="0D1C3B"/>
+        <a:srgbClr val="44546A"/>
       </a:dk2>
       <a:lt2>
-        <a:srgbClr val="F5F2F9"/>
+        <a:srgbClr val="E7E6E6"/>
       </a:lt2>
       <a:accent1>
-        <a:srgbClr val="1973EB"/>
+        <a:srgbClr val="4472C4"/>
       </a:accent1>
       <a:accent2>
-        <a:srgbClr val="25C8A2"/>
+        <a:srgbClr val="ED7D31"/>
       </a:accent2>
       <a:accent3>
-        <a:srgbClr val="BF8ED1"/>
+        <a:srgbClr val="A5A5A5"/>
       </a:accent3>
       <a:accent4>
-        <a:srgbClr val="FE733C"/>
+        <a:srgbClr val="FFC000"/>
       </a:accent4>
       <a:accent5>
-        <a:srgbClr val="FE5A5A"/>
+        <a:srgbClr val="5B9BD5"/>
       </a:accent5>
       <a:accent6>
-        <a:srgbClr val="1AC16E"/>
+        <a:srgbClr val="70AD47"/>
       </a:accent6>
       <a:hlink>
-        <a:srgbClr val="1AC16E"/>
+        <a:srgbClr val="0563C1"/>
       </a:hlink>
       <a:folHlink>
-        <a:srgbClr val="00B0F0"/>
+        <a:srgbClr val="954F72"/>
       </a:folHlink>
     </a:clrScheme>
-    <a:fontScheme name="grandview display">
+    <a:fontScheme name="Office 2013 - Tema 2022">
       <a:majorFont>
-        <a:latin typeface="Grandview Display"/>
+        <a:latin typeface="Calibri Light" panose="020F0302020204030204"/>
         <a:ea typeface=""/>
         <a:cs typeface=""/>
+        <a:font script="Jpan" typeface="游ゴシック Light"/>
+        <a:font script="Hang" typeface="맑은 고딕"/>
+        <a:font script="Hans" typeface="等线 Light"/>
+        <a:font script="Hant" typeface="新細明體"/>
+        <a:font script="Arab" typeface="Times New Roman"/>
+        <a:font script="Hebr" typeface="Times New Roman"/>
+        <a:font script="Thai" typeface="Angsana New"/>
+        <a:font script="Ethi" typeface="Nyala"/>
+        <a:font script="Beng" typeface="Vrinda"/>
+        <a:font script="Gujr" typeface="Shruti"/>
+        <a:font script="Khmr" typeface="MoolBoran"/>
+        <a:font script="Knda" typeface="Tunga"/>
+        <a:font script="Guru" typeface="Raavi"/>
+        <a:font script="Cans" typeface="Euphemia"/>
+        <a:font script="Cher" typeface="Plantagenet Cherokee"/>
+        <a:font script="Yiii" typeface="Microsoft Yi Baiti"/>
+        <a:font script="Tibt" typeface="Microsoft Himalaya"/>
+        <a:font script="Thaa" typeface="MV Boli"/>
+        <a:font script="Deva" typeface="Mangal"/>
+        <a:font script="Telu" typeface="Gautami"/>
+        <a:font script="Taml" typeface="Latha"/>
+        <a:font script="Syrc" typeface="Estrangelo Edessa"/>
+        <a:font script="Orya" typeface="Kalinga"/>
+        <a:font script="Mlym" typeface="Kartika"/>
+        <a:font script="Laoo" typeface="DokChampa"/>
+        <a:font script="Sinh" typeface="Iskoola Pota"/>
+        <a:font script="Mong" typeface="Mongolian Baiti"/>
+        <a:font script="Viet" typeface="Times New Roman"/>
+        <a:font script="Uigh" typeface="Microsoft Uighur"/>
+        <a:font script="Geor" typeface="Sylfaen"/>
       </a:majorFont>
       <a:minorFont>
-        <a:latin typeface="Grandview Display"/>
+        <a:latin typeface="Calibri" panose="020F0502020204030204"/>
         <a:ea typeface=""/>
         <a:cs typeface=""/>
+        <a:font script="Jpan" typeface="游ゴシック"/>
+        <a:font script="Hang" typeface="맑은 고딕"/>
+        <a:font script="Hans" typeface="等线"/>
+        <a:font script="Hant" typeface="新細明體"/>
+        <a:font script="Arab" typeface="Arial"/>
+        <a:font script="Hebr" typeface="Arial"/>
+        <a:font script="Thai" typeface="Cordia New"/>
+        <a:font script="Ethi" typeface="Nyala"/>
+        <a:font script="Beng" typeface="Vrinda"/>
+        <a:font script="Gujr" typeface="Shruti"/>
+        <a:font script="Khmr" typeface="DaunPenh"/>
+        <a:font script="Knda" typeface="Tunga"/>
+        <a:font script="Guru" typeface="Raavi"/>
+        <a:font script="Cans" typeface="Euphemia"/>
+        <a:font script="Cher" typeface="Plantagenet Cherokee"/>
+        <a:font script="Yiii" typeface="Microsoft Yi Baiti"/>
+        <a:font script="Tibt" typeface="Microsoft Himalaya"/>
+        <a:font script="Thaa" typeface="MV Boli"/>
+        <a:font script="Deva" typeface="Mangal"/>
+        <a:font script="Telu" typeface="Gautami"/>
+        <a:font script="Taml" typeface="Latha"/>
+        <a:font script="Syrc" typeface="Estrangelo Edessa"/>
+        <a:font script="Orya" typeface="Kalinga"/>
+        <a:font script="Mlym" typeface="Kartika"/>
+        <a:font script="Laoo" typeface="DokChampa"/>
+        <a:font script="Sinh" typeface="Iskoola Pota"/>
+        <a:font script="Mong" typeface="Mongolian Baiti"/>
+        <a:font script="Viet" typeface="Arial"/>
+        <a:font script="Uigh" typeface="Microsoft Uighur"/>
+        <a:font script="Geor" typeface="Sylfaen"/>
       </a:minorFont>
     </a:fontScheme>
-    <a:fmtScheme name="Office">
+    <a:fmtScheme name="Office 2013 - Tema 2022">
       <a:fillStyleLst>
         <a:solidFill>
           <a:schemeClr val="phClr"/>
@@ -7093,7 +7752,7 @@
   <a:extraClrSchemeLst/>
   <a:extLst>
     <a:ext uri="{05A4C25C-085E-4340-85A3-A5531E510DB2}">
-      <thm15:themeFamily xmlns:thm15="http://schemas.microsoft.com/office/thememl/2012/main" name="DashVTI" id="{0A75137F-CDEB-4E94-A788-9D255EBE1B91}" vid="{DE9A6A09-5855-45A3-8E99-4290ED24057C}"/>
+      <thm15:themeFamily xmlns:thm15="http://schemas.microsoft.com/office/thememl/2012/main" name="Office 2013 - 2022 Theme" id="{62F939B6-93AF-4DB8-9C6B-D6C7DFDC589F}" vid="{4A3C46E8-61CC-4603-A589-7422A47A8E4A}"/>
     </a:ext>
   </a:extLst>
 </a:theme>

--- a/presentation.pptx
+++ b/presentation.pptx
@@ -3182,14 +3182,27 @@
             <p:ph type="title"/>
           </p:nvPr>
         </p:nvSpPr>
-        <p:spPr/>
+        <p:spPr>
+          <a:xfrm>
+            <a:off x="838200" y="239230"/>
+            <a:ext cx="8637104" cy="1325563"/>
+          </a:xfrm>
+        </p:spPr>
         <p:txBody>
           <a:bodyPr/>
           <a:lstStyle/>
           <a:p>
             <a:r>
               <a:rPr lang="it-IT" dirty="0"/>
-              <a:t>Database</a:t>
+              <a:t>CCPD (</a:t>
+            </a:r>
+            <a:r>
+              <a:rPr lang="it-IT" dirty="0" err="1"/>
+              <a:t>Chinese</a:t>
+            </a:r>
+            <a:r>
+              <a:rPr lang="it-IT" dirty="0"/>
+              <a:t> City Parking Dataset)</a:t>
             </a:r>
           </a:p>
         </p:txBody>
@@ -3211,6 +3224,10 @@
           </p:nvPr>
         </p:nvSpPr>
         <p:spPr bwMode="auto">
+          <a:xfrm>
+            <a:off x="791023" y="1210452"/>
+            <a:ext cx="10515600" cy="2523768"/>
+          </a:xfrm>
           <a:prstGeom prst="rect">
             <a:avLst/>
           </a:prstGeom>
@@ -3249,13 +3266,465 @@
           </a:extLst>
         </p:spPr>
         <p:txBody>
-          <a:bodyPr vert="horz" wrap="none" lIns="91440" tIns="45720" rIns="91440" bIns="45720" numCol="1" anchor="ctr" anchorCtr="0" compatLnSpc="1">
+          <a:bodyPr vert="horz" wrap="square" lIns="91440" tIns="45720" rIns="91440" bIns="45720" numCol="1" anchor="ctr" anchorCtr="0" compatLnSpc="1">
             <a:prstTxWarp prst="textNoShape">
               <a:avLst/>
             </a:prstTxWarp>
             <a:spAutoFit/>
           </a:bodyPr>
           <a:lstStyle/>
+          <a:p>
+            <a:pPr marL="0" marR="0" lvl="0" indent="0" algn="l" defTabSz="914400" rtl="0" eaLnBrk="0" fontAlgn="base" latinLnBrk="0" hangingPunct="0">
+              <a:lnSpc>
+                <a:spcPct val="100000"/>
+              </a:lnSpc>
+              <a:spcBef>
+                <a:spcPct val="0"/>
+              </a:spcBef>
+              <a:spcAft>
+                <a:spcPct val="0"/>
+              </a:spcAft>
+              <a:buClrTx/>
+              <a:buSzTx/>
+              <a:buNone/>
+              <a:tabLst/>
+            </a:pPr>
+            <a:r>
+              <a:rPr kumimoji="0" lang="it-IT" altLang="it-IT" sz="2000" b="0" i="0" u="none" strike="noStrike" cap="none" normalizeH="0" baseline="0" dirty="0">
+                <a:ln>
+                  <a:noFill/>
+                </a:ln>
+                <a:solidFill>
+                  <a:schemeClr val="tx1"/>
+                </a:solidFill>
+                <a:effectLst/>
+                <a:latin typeface="Arial" panose="020B0604020202020204" pitchFamily="34" charset="0"/>
+              </a:rPr>
+              <a:t>A large-scale, </a:t>
+            </a:r>
+            <a:r>
+              <a:rPr kumimoji="0" lang="it-IT" altLang="it-IT" sz="2000" b="0" i="0" u="none" strike="noStrike" cap="none" normalizeH="0" baseline="0" dirty="0" err="1">
+                <a:ln>
+                  <a:noFill/>
+                </a:ln>
+                <a:solidFill>
+                  <a:schemeClr val="tx1"/>
+                </a:solidFill>
+                <a:effectLst/>
+                <a:latin typeface="Arial" panose="020B0604020202020204" pitchFamily="34" charset="0"/>
+              </a:rPr>
+              <a:t>publicly</a:t>
+            </a:r>
+            <a:r>
+              <a:rPr kumimoji="0" lang="it-IT" altLang="it-IT" sz="2000" b="0" i="0" u="none" strike="noStrike" cap="none" normalizeH="0" baseline="0" dirty="0">
+                <a:ln>
+                  <a:noFill/>
+                </a:ln>
+                <a:solidFill>
+                  <a:schemeClr val="tx1"/>
+                </a:solidFill>
+                <a:effectLst/>
+                <a:latin typeface="Arial" panose="020B0604020202020204" pitchFamily="34" charset="0"/>
+              </a:rPr>
+              <a:t> </a:t>
+            </a:r>
+            <a:r>
+              <a:rPr kumimoji="0" lang="it-IT" altLang="it-IT" sz="2000" b="0" i="0" u="none" strike="noStrike" cap="none" normalizeH="0" baseline="0" dirty="0" err="1">
+                <a:ln>
+                  <a:noFill/>
+                </a:ln>
+                <a:solidFill>
+                  <a:schemeClr val="tx1"/>
+                </a:solidFill>
+                <a:effectLst/>
+                <a:latin typeface="Arial" panose="020B0604020202020204" pitchFamily="34" charset="0"/>
+              </a:rPr>
+              <a:t>available</a:t>
+            </a:r>
+            <a:r>
+              <a:rPr kumimoji="0" lang="it-IT" altLang="it-IT" sz="2000" b="0" i="0" u="none" strike="noStrike" cap="none" normalizeH="0" baseline="0" dirty="0">
+                <a:ln>
+                  <a:noFill/>
+                </a:ln>
+                <a:solidFill>
+                  <a:schemeClr val="tx1"/>
+                </a:solidFill>
+                <a:effectLst/>
+                <a:latin typeface="Arial" panose="020B0604020202020204" pitchFamily="34" charset="0"/>
+              </a:rPr>
+              <a:t> dataset for </a:t>
+            </a:r>
+            <a:r>
+              <a:rPr kumimoji="0" lang="it-IT" altLang="it-IT" sz="2000" b="0" i="0" u="none" strike="noStrike" cap="none" normalizeH="0" baseline="0" dirty="0" err="1">
+                <a:ln>
+                  <a:noFill/>
+                </a:ln>
+                <a:solidFill>
+                  <a:schemeClr val="tx1"/>
+                </a:solidFill>
+                <a:effectLst/>
+                <a:latin typeface="Arial" panose="020B0604020202020204" pitchFamily="34" charset="0"/>
+              </a:rPr>
+              <a:t>license</a:t>
+            </a:r>
+            <a:r>
+              <a:rPr kumimoji="0" lang="it-IT" altLang="it-IT" sz="2000" b="0" i="0" u="none" strike="noStrike" cap="none" normalizeH="0" baseline="0" dirty="0">
+                <a:ln>
+                  <a:noFill/>
+                </a:ln>
+                <a:solidFill>
+                  <a:schemeClr val="tx1"/>
+                </a:solidFill>
+                <a:effectLst/>
+                <a:latin typeface="Arial" panose="020B0604020202020204" pitchFamily="34" charset="0"/>
+              </a:rPr>
+              <a:t> </a:t>
+            </a:r>
+            <a:r>
+              <a:rPr kumimoji="0" lang="it-IT" altLang="it-IT" sz="2000" b="0" i="0" u="none" strike="noStrike" cap="none" normalizeH="0" baseline="0" dirty="0" err="1">
+                <a:ln>
+                  <a:noFill/>
+                </a:ln>
+                <a:solidFill>
+                  <a:schemeClr val="tx1"/>
+                </a:solidFill>
+                <a:effectLst/>
+                <a:latin typeface="Arial" panose="020B0604020202020204" pitchFamily="34" charset="0"/>
+              </a:rPr>
+              <a:t>plate</a:t>
+            </a:r>
+            <a:r>
+              <a:rPr kumimoji="0" lang="it-IT" altLang="it-IT" sz="2000" b="0" i="0" u="none" strike="noStrike" cap="none" normalizeH="0" baseline="0" dirty="0">
+                <a:ln>
+                  <a:noFill/>
+                </a:ln>
+                <a:solidFill>
+                  <a:schemeClr val="tx1"/>
+                </a:solidFill>
+                <a:effectLst/>
+                <a:latin typeface="Arial" panose="020B0604020202020204" pitchFamily="34" charset="0"/>
+              </a:rPr>
+              <a:t> </a:t>
+            </a:r>
+            <a:r>
+              <a:rPr kumimoji="0" lang="it-IT" altLang="it-IT" sz="2000" b="0" i="0" u="none" strike="noStrike" cap="none" normalizeH="0" baseline="0" dirty="0" err="1">
+                <a:ln>
+                  <a:noFill/>
+                </a:ln>
+                <a:solidFill>
+                  <a:schemeClr val="tx1"/>
+                </a:solidFill>
+                <a:effectLst/>
+                <a:latin typeface="Arial" panose="020B0604020202020204" pitchFamily="34" charset="0"/>
+              </a:rPr>
+              <a:t>detection</a:t>
+            </a:r>
+            <a:r>
+              <a:rPr kumimoji="0" lang="it-IT" altLang="it-IT" sz="2000" b="0" i="0" u="none" strike="noStrike" cap="none" normalizeH="0" baseline="0" dirty="0">
+                <a:ln>
+                  <a:noFill/>
+                </a:ln>
+                <a:solidFill>
+                  <a:schemeClr val="tx1"/>
+                </a:solidFill>
+                <a:effectLst/>
+                <a:latin typeface="Arial" panose="020B0604020202020204" pitchFamily="34" charset="0"/>
+              </a:rPr>
+              <a:t> and </a:t>
+            </a:r>
+            <a:r>
+              <a:rPr kumimoji="0" lang="it-IT" altLang="it-IT" sz="2000" b="0" i="0" u="none" strike="noStrike" cap="none" normalizeH="0" baseline="0" dirty="0" err="1">
+                <a:ln>
+                  <a:noFill/>
+                </a:ln>
+                <a:solidFill>
+                  <a:schemeClr val="tx1"/>
+                </a:solidFill>
+                <a:effectLst/>
+                <a:latin typeface="Arial" panose="020B0604020202020204" pitchFamily="34" charset="0"/>
+              </a:rPr>
+              <a:t>recognition</a:t>
+            </a:r>
+            <a:r>
+              <a:rPr kumimoji="0" lang="it-IT" altLang="it-IT" sz="2000" b="0" i="0" u="none" strike="noStrike" cap="none" normalizeH="0" baseline="0" dirty="0">
+                <a:ln>
+                  <a:noFill/>
+                </a:ln>
+                <a:solidFill>
+                  <a:schemeClr val="tx1"/>
+                </a:solidFill>
+                <a:effectLst/>
+                <a:latin typeface="Arial" panose="020B0604020202020204" pitchFamily="34" charset="0"/>
+              </a:rPr>
+              <a:t>.</a:t>
+            </a:r>
+          </a:p>
+          <a:p>
+            <a:pPr marL="0" marR="0" lvl="0" indent="0" algn="l" defTabSz="914400" rtl="0" eaLnBrk="0" fontAlgn="base" latinLnBrk="0" hangingPunct="0">
+              <a:lnSpc>
+                <a:spcPct val="100000"/>
+              </a:lnSpc>
+              <a:spcBef>
+                <a:spcPct val="0"/>
+              </a:spcBef>
+              <a:spcAft>
+                <a:spcPct val="0"/>
+              </a:spcAft>
+              <a:buClrTx/>
+              <a:buSzTx/>
+              <a:buNone/>
+              <a:tabLst/>
+            </a:pPr>
+            <a:r>
+              <a:rPr kumimoji="0" lang="it-IT" altLang="it-IT" sz="2000" b="0" i="0" u="none" strike="noStrike" cap="none" normalizeH="0" baseline="0" dirty="0" err="1">
+                <a:ln>
+                  <a:noFill/>
+                </a:ln>
+                <a:solidFill>
+                  <a:schemeClr val="tx1"/>
+                </a:solidFill>
+                <a:effectLst/>
+                <a:latin typeface="Arial" panose="020B0604020202020204" pitchFamily="34" charset="0"/>
+              </a:rPr>
+              <a:t>Contains</a:t>
+            </a:r>
+            <a:r>
+              <a:rPr kumimoji="0" lang="it-IT" altLang="it-IT" sz="2000" b="0" i="0" u="none" strike="noStrike" cap="none" normalizeH="0" baseline="0" dirty="0">
+                <a:ln>
+                  <a:noFill/>
+                </a:ln>
+                <a:solidFill>
+                  <a:schemeClr val="tx1"/>
+                </a:solidFill>
+                <a:effectLst/>
+                <a:latin typeface="Arial" panose="020B0604020202020204" pitchFamily="34" charset="0"/>
+              </a:rPr>
+              <a:t> over </a:t>
+            </a:r>
+            <a:r>
+              <a:rPr kumimoji="0" lang="it-IT" altLang="it-IT" sz="2000" b="1" i="0" u="none" strike="noStrike" cap="none" normalizeH="0" baseline="0" dirty="0">
+                <a:ln>
+                  <a:noFill/>
+                </a:ln>
+                <a:solidFill>
+                  <a:schemeClr val="tx1"/>
+                </a:solidFill>
+                <a:effectLst/>
+                <a:latin typeface="Arial" panose="020B0604020202020204" pitchFamily="34" charset="0"/>
+              </a:rPr>
+              <a:t>250,000</a:t>
+            </a:r>
+            <a:r>
+              <a:rPr kumimoji="0" lang="it-IT" altLang="it-IT" sz="2000" b="0" i="0" u="none" strike="noStrike" cap="none" normalizeH="0" baseline="0" dirty="0">
+                <a:ln>
+                  <a:noFill/>
+                </a:ln>
+                <a:solidFill>
+                  <a:schemeClr val="tx1"/>
+                </a:solidFill>
+                <a:effectLst/>
+                <a:latin typeface="Arial" panose="020B0604020202020204" pitchFamily="34" charset="0"/>
+              </a:rPr>
+              <a:t> images of </a:t>
+            </a:r>
+            <a:r>
+              <a:rPr kumimoji="0" lang="it-IT" altLang="it-IT" sz="2000" b="0" i="0" u="none" strike="noStrike" cap="none" normalizeH="0" baseline="0" dirty="0" err="1">
+                <a:ln>
+                  <a:noFill/>
+                </a:ln>
+                <a:solidFill>
+                  <a:schemeClr val="tx1"/>
+                </a:solidFill>
+                <a:effectLst/>
+                <a:latin typeface="Arial" panose="020B0604020202020204" pitchFamily="34" charset="0"/>
+              </a:rPr>
+              <a:t>vehicles</a:t>
+            </a:r>
+            <a:r>
+              <a:rPr kumimoji="0" lang="it-IT" altLang="it-IT" sz="2000" b="0" i="0" u="none" strike="noStrike" cap="none" normalizeH="0" baseline="0" dirty="0">
+                <a:ln>
+                  <a:noFill/>
+                </a:ln>
+                <a:solidFill>
+                  <a:schemeClr val="tx1"/>
+                </a:solidFill>
+                <a:effectLst/>
+                <a:latin typeface="Arial" panose="020B0604020202020204" pitchFamily="34" charset="0"/>
+              </a:rPr>
+              <a:t> with </a:t>
+            </a:r>
+            <a:r>
+              <a:rPr kumimoji="0" lang="it-IT" altLang="it-IT" sz="2000" b="0" i="0" u="none" strike="noStrike" cap="none" normalizeH="0" baseline="0" dirty="0" err="1">
+                <a:ln>
+                  <a:noFill/>
+                </a:ln>
+                <a:solidFill>
+                  <a:schemeClr val="tx1"/>
+                </a:solidFill>
+                <a:effectLst/>
+                <a:latin typeface="Arial" panose="020B0604020202020204" pitchFamily="34" charset="0"/>
+              </a:rPr>
+              <a:t>annotated</a:t>
+            </a:r>
+            <a:r>
+              <a:rPr kumimoji="0" lang="it-IT" altLang="it-IT" sz="2000" b="0" i="0" u="none" strike="noStrike" cap="none" normalizeH="0" baseline="0" dirty="0">
+                <a:ln>
+                  <a:noFill/>
+                </a:ln>
+                <a:solidFill>
+                  <a:schemeClr val="tx1"/>
+                </a:solidFill>
+                <a:effectLst/>
+                <a:latin typeface="Arial" panose="020B0604020202020204" pitchFamily="34" charset="0"/>
+              </a:rPr>
+              <a:t> </a:t>
+            </a:r>
+            <a:r>
+              <a:rPr kumimoji="0" lang="it-IT" altLang="it-IT" sz="2000" b="0" i="0" u="none" strike="noStrike" cap="none" normalizeH="0" baseline="0" dirty="0" err="1">
+                <a:ln>
+                  <a:noFill/>
+                </a:ln>
+                <a:solidFill>
+                  <a:schemeClr val="tx1"/>
+                </a:solidFill>
+                <a:effectLst/>
+                <a:latin typeface="Arial" panose="020B0604020202020204" pitchFamily="34" charset="0"/>
+              </a:rPr>
+              <a:t>license</a:t>
+            </a:r>
+            <a:r>
+              <a:rPr kumimoji="0" lang="it-IT" altLang="it-IT" sz="2000" b="0" i="0" u="none" strike="noStrike" cap="none" normalizeH="0" baseline="0" dirty="0">
+                <a:ln>
+                  <a:noFill/>
+                </a:ln>
+                <a:solidFill>
+                  <a:schemeClr val="tx1"/>
+                </a:solidFill>
+                <a:effectLst/>
+                <a:latin typeface="Arial" panose="020B0604020202020204" pitchFamily="34" charset="0"/>
+              </a:rPr>
+              <a:t> </a:t>
+            </a:r>
+            <a:r>
+              <a:rPr kumimoji="0" lang="it-IT" altLang="it-IT" sz="2000" b="0" i="0" u="none" strike="noStrike" cap="none" normalizeH="0" baseline="0" dirty="0" err="1">
+                <a:ln>
+                  <a:noFill/>
+                </a:ln>
+                <a:solidFill>
+                  <a:schemeClr val="tx1"/>
+                </a:solidFill>
+                <a:effectLst/>
+                <a:latin typeface="Arial" panose="020B0604020202020204" pitchFamily="34" charset="0"/>
+              </a:rPr>
+              <a:t>plates</a:t>
+            </a:r>
+            <a:r>
+              <a:rPr kumimoji="0" lang="it-IT" altLang="it-IT" sz="2000" b="0" i="0" u="none" strike="noStrike" cap="none" normalizeH="0" baseline="0" dirty="0">
+                <a:ln>
+                  <a:noFill/>
+                </a:ln>
+                <a:solidFill>
+                  <a:schemeClr val="tx1"/>
+                </a:solidFill>
+                <a:effectLst/>
+                <a:latin typeface="Arial" panose="020B0604020202020204" pitchFamily="34" charset="0"/>
+              </a:rPr>
+              <a:t>.</a:t>
+            </a:r>
+          </a:p>
+          <a:p>
+            <a:pPr marL="0" marR="0" lvl="0" indent="0" algn="l" defTabSz="914400" rtl="0" eaLnBrk="0" fontAlgn="base" latinLnBrk="0" hangingPunct="0">
+              <a:lnSpc>
+                <a:spcPct val="100000"/>
+              </a:lnSpc>
+              <a:spcBef>
+                <a:spcPct val="0"/>
+              </a:spcBef>
+              <a:spcAft>
+                <a:spcPct val="0"/>
+              </a:spcAft>
+              <a:buClrTx/>
+              <a:buSzTx/>
+              <a:buNone/>
+              <a:tabLst/>
+            </a:pPr>
+            <a:endParaRPr kumimoji="0" lang="it-IT" altLang="it-IT" sz="2000" b="0" i="0" u="none" strike="noStrike" cap="none" normalizeH="0" baseline="0" dirty="0">
+              <a:ln>
+                <a:noFill/>
+              </a:ln>
+              <a:solidFill>
+                <a:schemeClr val="tx1"/>
+              </a:solidFill>
+              <a:effectLst/>
+              <a:latin typeface="Arial" panose="020B0604020202020204" pitchFamily="34" charset="0"/>
+            </a:endParaRPr>
+          </a:p>
+          <a:p>
+            <a:pPr marL="0" marR="0" lvl="0" indent="0" algn="l" defTabSz="914400" rtl="0" eaLnBrk="0" fontAlgn="base" latinLnBrk="0" hangingPunct="0">
+              <a:lnSpc>
+                <a:spcPct val="100000"/>
+              </a:lnSpc>
+              <a:spcBef>
+                <a:spcPct val="0"/>
+              </a:spcBef>
+              <a:spcAft>
+                <a:spcPct val="0"/>
+              </a:spcAft>
+              <a:buClrTx/>
+              <a:buSzTx/>
+              <a:buNone/>
+              <a:tabLst/>
+            </a:pPr>
+            <a:r>
+              <a:rPr kumimoji="0" lang="it-IT" altLang="it-IT" sz="2000" b="1" i="0" u="none" strike="noStrike" cap="none" normalizeH="0" baseline="0" dirty="0">
+                <a:ln>
+                  <a:noFill/>
+                </a:ln>
+                <a:solidFill>
+                  <a:schemeClr val="tx1"/>
+                </a:solidFill>
+                <a:effectLst/>
+                <a:latin typeface="Arial" panose="020B0604020202020204" pitchFamily="34" charset="0"/>
+              </a:rPr>
+              <a:t>Dataset </a:t>
+            </a:r>
+            <a:r>
+              <a:rPr kumimoji="0" lang="it-IT" altLang="it-IT" sz="2000" b="1" i="0" u="none" strike="noStrike" cap="none" normalizeH="0" baseline="0" dirty="0" err="1">
+                <a:ln>
+                  <a:noFill/>
+                </a:ln>
+                <a:solidFill>
+                  <a:schemeClr val="tx1"/>
+                </a:solidFill>
+                <a:effectLst/>
+                <a:latin typeface="Arial" panose="020B0604020202020204" pitchFamily="34" charset="0"/>
+              </a:rPr>
+              <a:t>Characteristics</a:t>
+            </a:r>
+            <a:r>
+              <a:rPr kumimoji="0" lang="it-IT" altLang="it-IT" sz="2000" b="1" i="0" u="none" strike="noStrike" cap="none" normalizeH="0" baseline="0" dirty="0">
+                <a:ln>
+                  <a:noFill/>
+                </a:ln>
+                <a:solidFill>
+                  <a:schemeClr val="tx1"/>
+                </a:solidFill>
+                <a:effectLst/>
+                <a:latin typeface="Arial" panose="020B0604020202020204" pitchFamily="34" charset="0"/>
+              </a:rPr>
+              <a:t>:</a:t>
+            </a:r>
+            <a:endParaRPr kumimoji="0" lang="it-IT" altLang="it-IT" sz="2000" b="0" i="0" u="none" strike="noStrike" cap="none" normalizeH="0" baseline="0" dirty="0">
+              <a:ln>
+                <a:noFill/>
+              </a:ln>
+              <a:solidFill>
+                <a:schemeClr val="tx1"/>
+              </a:solidFill>
+              <a:effectLst/>
+              <a:latin typeface="Arial" panose="020B0604020202020204" pitchFamily="34" charset="0"/>
+            </a:endParaRPr>
+          </a:p>
           <a:p>
             <a:pPr marL="0" marR="0" lvl="0" indent="0" algn="l" defTabSz="914400" rtl="0" eaLnBrk="0" fontAlgn="base" latinLnBrk="0" hangingPunct="0">
               <a:lnSpc>
@@ -3274,7 +3743,7 @@
               <a:tabLst/>
             </a:pPr>
             <a:r>
-              <a:rPr kumimoji="0" lang="it-IT" altLang="it-IT" sz="1800" b="1" i="0" u="none" strike="noStrike" cap="none" normalizeH="0" baseline="0">
+              <a:rPr kumimoji="0" lang="it-IT" altLang="it-IT" sz="2000" b="0" i="0" u="none" strike="noStrike" cap="none" normalizeH="0" baseline="0" dirty="0">
                 <a:ln>
                   <a:noFill/>
                 </a:ln>
@@ -3284,18 +3753,86 @@
                 <a:effectLst/>
                 <a:latin typeface="Arial" panose="020B0604020202020204" pitchFamily="34" charset="0"/>
               </a:rPr>
-              <a:t>Chinese City Parking Dataset (CCPD):</a:t>
-            </a:r>
-            <a:endParaRPr kumimoji="0" lang="it-IT" altLang="it-IT" sz="1800" b="0" i="0" u="none" strike="noStrike" cap="none" normalizeH="0" baseline="0">
-              <a:ln>
-                <a:noFill/>
-              </a:ln>
-              <a:solidFill>
-                <a:schemeClr val="tx1"/>
-              </a:solidFill>
-              <a:effectLst/>
-              <a:latin typeface="Arial" panose="020B0604020202020204" pitchFamily="34" charset="0"/>
-            </a:endParaRPr>
+              <a:t> Diverse </a:t>
+            </a:r>
+            <a:r>
+              <a:rPr kumimoji="0" lang="it-IT" altLang="it-IT" sz="2000" b="0" i="0" u="none" strike="noStrike" cap="none" normalizeH="0" baseline="0" dirty="0" err="1">
+                <a:ln>
+                  <a:noFill/>
+                </a:ln>
+                <a:solidFill>
+                  <a:schemeClr val="tx1"/>
+                </a:solidFill>
+                <a:effectLst/>
+                <a:latin typeface="Arial" panose="020B0604020202020204" pitchFamily="34" charset="0"/>
+              </a:rPr>
+              <a:t>conditions</a:t>
+            </a:r>
+            <a:r>
+              <a:rPr kumimoji="0" lang="it-IT" altLang="it-IT" sz="2000" b="0" i="0" u="none" strike="noStrike" cap="none" normalizeH="0" baseline="0" dirty="0">
+                <a:ln>
+                  <a:noFill/>
+                </a:ln>
+                <a:solidFill>
+                  <a:schemeClr val="tx1"/>
+                </a:solidFill>
+                <a:effectLst/>
+                <a:latin typeface="Arial" panose="020B0604020202020204" pitchFamily="34" charset="0"/>
+              </a:rPr>
+              <a:t>: </a:t>
+            </a:r>
+            <a:r>
+              <a:rPr kumimoji="0" lang="it-IT" altLang="it-IT" sz="2000" b="0" i="0" u="none" strike="noStrike" cap="none" normalizeH="0" baseline="0" dirty="0" err="1">
+                <a:ln>
+                  <a:noFill/>
+                </a:ln>
+                <a:solidFill>
+                  <a:schemeClr val="tx1"/>
+                </a:solidFill>
+                <a:effectLst/>
+                <a:latin typeface="Arial" panose="020B0604020202020204" pitchFamily="34" charset="0"/>
+              </a:rPr>
+              <a:t>various</a:t>
+            </a:r>
+            <a:r>
+              <a:rPr kumimoji="0" lang="it-IT" altLang="it-IT" sz="2000" b="0" i="0" u="none" strike="noStrike" cap="none" normalizeH="0" baseline="0" dirty="0">
+                <a:ln>
+                  <a:noFill/>
+                </a:ln>
+                <a:solidFill>
+                  <a:schemeClr val="tx1"/>
+                </a:solidFill>
+                <a:effectLst/>
+                <a:latin typeface="Arial" panose="020B0604020202020204" pitchFamily="34" charset="0"/>
+              </a:rPr>
+              <a:t> lighting, </a:t>
+            </a:r>
+            <a:r>
+              <a:rPr kumimoji="0" lang="it-IT" altLang="it-IT" sz="2000" b="0" i="0" u="none" strike="noStrike" cap="none" normalizeH="0" baseline="0" dirty="0" err="1">
+                <a:ln>
+                  <a:noFill/>
+                </a:ln>
+                <a:solidFill>
+                  <a:schemeClr val="tx1"/>
+                </a:solidFill>
+                <a:effectLst/>
+                <a:latin typeface="Arial" panose="020B0604020202020204" pitchFamily="34" charset="0"/>
+              </a:rPr>
+              <a:t>weather</a:t>
+            </a:r>
+            <a:r>
+              <a:rPr kumimoji="0" lang="it-IT" altLang="it-IT" sz="2000" b="0" i="0" u="none" strike="noStrike" cap="none" normalizeH="0" baseline="0" dirty="0">
+                <a:ln>
+                  <a:noFill/>
+                </a:ln>
+                <a:solidFill>
+                  <a:schemeClr val="tx1"/>
+                </a:solidFill>
+                <a:effectLst/>
+                <a:latin typeface="Arial" panose="020B0604020202020204" pitchFamily="34" charset="0"/>
+              </a:rPr>
+              <a:t>, and viewpoints.</a:t>
+            </a:r>
           </a:p>
           <a:p>
             <a:pPr marL="0" marR="0" lvl="0" indent="0" algn="l" defTabSz="914400" rtl="0" eaLnBrk="0" fontAlgn="base" latinLnBrk="0" hangingPunct="0">
@@ -3315,7 +3852,7 @@
               <a:tabLst/>
             </a:pPr>
             <a:r>
-              <a:rPr kumimoji="0" lang="it-IT" altLang="it-IT" sz="1800" b="0" i="0" u="none" strike="noStrike" cap="none" normalizeH="0" baseline="0">
+              <a:rPr kumimoji="0" lang="it-IT" altLang="it-IT" sz="2000" b="0" i="0" u="none" strike="noStrike" cap="none" normalizeH="0" baseline="0" dirty="0">
                 <a:ln>
                   <a:noFill/>
                 </a:ln>
@@ -3325,7 +3862,215 @@
                 <a:effectLst/>
                 <a:latin typeface="Arial" panose="020B0604020202020204" pitchFamily="34" charset="0"/>
               </a:rPr>
-              <a:t>A large-scale, publicly available dataset for license plate detection and recognition.</a:t>
+              <a:t> </a:t>
+            </a:r>
+            <a:r>
+              <a:rPr kumimoji="0" lang="it-IT" altLang="it-IT" sz="2000" b="0" i="0" u="none" strike="noStrike" cap="none" normalizeH="0" baseline="0" dirty="0" err="1">
+                <a:ln>
+                  <a:noFill/>
+                </a:ln>
+                <a:solidFill>
+                  <a:schemeClr val="tx1"/>
+                </a:solidFill>
+                <a:effectLst/>
+                <a:latin typeface="Arial" panose="020B0604020202020204" pitchFamily="34" charset="0"/>
+              </a:rPr>
+              <a:t>Plates</a:t>
+            </a:r>
+            <a:r>
+              <a:rPr kumimoji="0" lang="it-IT" altLang="it-IT" sz="2000" b="0" i="0" u="none" strike="noStrike" cap="none" normalizeH="0" baseline="0" dirty="0">
+                <a:ln>
+                  <a:noFill/>
+                </a:ln>
+                <a:solidFill>
+                  <a:schemeClr val="tx1"/>
+                </a:solidFill>
+                <a:effectLst/>
+                <a:latin typeface="Arial" panose="020B0604020202020204" pitchFamily="34" charset="0"/>
+              </a:rPr>
+              <a:t> </a:t>
+            </a:r>
+            <a:r>
+              <a:rPr kumimoji="0" lang="it-IT" altLang="it-IT" sz="2000" b="0" i="0" u="none" strike="noStrike" cap="none" normalizeH="0" baseline="0" dirty="0" err="1">
+                <a:ln>
+                  <a:noFill/>
+                </a:ln>
+                <a:solidFill>
+                  <a:schemeClr val="tx1"/>
+                </a:solidFill>
+                <a:effectLst/>
+                <a:latin typeface="Arial" panose="020B0604020202020204" pitchFamily="34" charset="0"/>
+              </a:rPr>
+              <a:t>captured</a:t>
+            </a:r>
+            <a:r>
+              <a:rPr kumimoji="0" lang="it-IT" altLang="it-IT" sz="2000" b="0" i="0" u="none" strike="noStrike" cap="none" normalizeH="0" baseline="0" dirty="0">
+                <a:ln>
+                  <a:noFill/>
+                </a:ln>
+                <a:solidFill>
+                  <a:schemeClr val="tx1"/>
+                </a:solidFill>
+                <a:effectLst/>
+                <a:latin typeface="Arial" panose="020B0604020202020204" pitchFamily="34" charset="0"/>
+              </a:rPr>
+              <a:t> in </a:t>
+            </a:r>
+            <a:r>
+              <a:rPr kumimoji="0" lang="it-IT" altLang="it-IT" sz="2000" b="0" i="0" u="none" strike="noStrike" cap="none" normalizeH="0" baseline="0" dirty="0" err="1">
+                <a:ln>
+                  <a:noFill/>
+                </a:ln>
+                <a:solidFill>
+                  <a:schemeClr val="tx1"/>
+                </a:solidFill>
+                <a:effectLst/>
+                <a:latin typeface="Arial" panose="020B0604020202020204" pitchFamily="34" charset="0"/>
+              </a:rPr>
+              <a:t>real</a:t>
+            </a:r>
+            <a:r>
+              <a:rPr kumimoji="0" lang="it-IT" altLang="it-IT" sz="2000" b="0" i="0" u="none" strike="noStrike" cap="none" normalizeH="0" baseline="0" dirty="0">
+                <a:ln>
+                  <a:noFill/>
+                </a:ln>
+                <a:solidFill>
+                  <a:schemeClr val="tx1"/>
+                </a:solidFill>
+                <a:effectLst/>
+                <a:latin typeface="Arial" panose="020B0604020202020204" pitchFamily="34" charset="0"/>
+              </a:rPr>
+              <a:t>-world </a:t>
+            </a:r>
+            <a:r>
+              <a:rPr kumimoji="0" lang="it-IT" altLang="it-IT" sz="2000" b="0" i="0" u="none" strike="noStrike" cap="none" normalizeH="0" baseline="0" dirty="0" err="1">
+                <a:ln>
+                  <a:noFill/>
+                </a:ln>
+                <a:solidFill>
+                  <a:schemeClr val="tx1"/>
+                </a:solidFill>
+                <a:effectLst/>
+                <a:latin typeface="Arial" panose="020B0604020202020204" pitchFamily="34" charset="0"/>
+              </a:rPr>
+              <a:t>scenarios</a:t>
+            </a:r>
+            <a:r>
+              <a:rPr kumimoji="0" lang="it-IT" altLang="it-IT" sz="2000" b="0" i="0" u="none" strike="noStrike" cap="none" normalizeH="0" baseline="0" dirty="0">
+                <a:ln>
+                  <a:noFill/>
+                </a:ln>
+                <a:solidFill>
+                  <a:schemeClr val="tx1"/>
+                </a:solidFill>
+                <a:effectLst/>
+                <a:latin typeface="Arial" panose="020B0604020202020204" pitchFamily="34" charset="0"/>
+              </a:rPr>
+              <a:t> </a:t>
+            </a:r>
+            <a:r>
+              <a:rPr kumimoji="0" lang="it-IT" altLang="it-IT" sz="2000" b="0" i="0" u="none" strike="noStrike" cap="none" normalizeH="0" baseline="0" dirty="0" err="1">
+                <a:ln>
+                  <a:noFill/>
+                </a:ln>
+                <a:solidFill>
+                  <a:schemeClr val="tx1"/>
+                </a:solidFill>
+                <a:effectLst/>
+                <a:latin typeface="Arial" panose="020B0604020202020204" pitchFamily="34" charset="0"/>
+              </a:rPr>
+              <a:t>including</a:t>
+            </a:r>
+            <a:r>
+              <a:rPr kumimoji="0" lang="it-IT" altLang="it-IT" sz="2000" b="0" i="0" u="none" strike="noStrike" cap="none" normalizeH="0" baseline="0" dirty="0">
+                <a:ln>
+                  <a:noFill/>
+                </a:ln>
+                <a:solidFill>
+                  <a:schemeClr val="tx1"/>
+                </a:solidFill>
+                <a:effectLst/>
+                <a:latin typeface="Arial" panose="020B0604020202020204" pitchFamily="34" charset="0"/>
+              </a:rPr>
+              <a:t> </a:t>
+            </a:r>
+            <a:r>
+              <a:rPr kumimoji="0" lang="it-IT" altLang="it-IT" sz="2000" b="0" i="0" u="none" strike="noStrike" cap="none" normalizeH="0" baseline="0" dirty="0" err="1">
+                <a:ln>
+                  <a:noFill/>
+                </a:ln>
+                <a:solidFill>
+                  <a:schemeClr val="tx1"/>
+                </a:solidFill>
+                <a:effectLst/>
+                <a:latin typeface="Arial" panose="020B0604020202020204" pitchFamily="34" charset="0"/>
+              </a:rPr>
+              <a:t>occlusion</a:t>
+            </a:r>
+            <a:r>
+              <a:rPr kumimoji="0" lang="it-IT" altLang="it-IT" sz="2000" b="0" i="0" u="none" strike="noStrike" cap="none" normalizeH="0" baseline="0" dirty="0">
+                <a:ln>
+                  <a:noFill/>
+                </a:ln>
+                <a:solidFill>
+                  <a:schemeClr val="tx1"/>
+                </a:solidFill>
+                <a:effectLst/>
+                <a:latin typeface="Arial" panose="020B0604020202020204" pitchFamily="34" charset="0"/>
+              </a:rPr>
+              <a:t>, </a:t>
+            </a:r>
+            <a:r>
+              <a:rPr kumimoji="0" lang="it-IT" altLang="it-IT" sz="2000" b="0" i="0" u="none" strike="noStrike" cap="none" normalizeH="0" baseline="0" dirty="0" err="1">
+                <a:ln>
+                  <a:noFill/>
+                </a:ln>
+                <a:solidFill>
+                  <a:schemeClr val="tx1"/>
+                </a:solidFill>
+                <a:effectLst/>
+                <a:latin typeface="Arial" panose="020B0604020202020204" pitchFamily="34" charset="0"/>
+              </a:rPr>
+              <a:t>blur</a:t>
+            </a:r>
+            <a:r>
+              <a:rPr kumimoji="0" lang="it-IT" altLang="it-IT" sz="2000" b="0" i="0" u="none" strike="noStrike" cap="none" normalizeH="0" baseline="0" dirty="0">
+                <a:ln>
+                  <a:noFill/>
+                </a:ln>
+                <a:solidFill>
+                  <a:schemeClr val="tx1"/>
+                </a:solidFill>
+                <a:effectLst/>
+                <a:latin typeface="Arial" panose="020B0604020202020204" pitchFamily="34" charset="0"/>
+              </a:rPr>
+              <a:t>, and </a:t>
+            </a:r>
+            <a:r>
+              <a:rPr kumimoji="0" lang="it-IT" altLang="it-IT" sz="2000" b="0" i="0" u="none" strike="noStrike" cap="none" normalizeH="0" baseline="0" dirty="0" err="1">
+                <a:ln>
+                  <a:noFill/>
+                </a:ln>
+                <a:solidFill>
+                  <a:schemeClr val="tx1"/>
+                </a:solidFill>
+                <a:effectLst/>
+                <a:latin typeface="Arial" panose="020B0604020202020204" pitchFamily="34" charset="0"/>
+              </a:rPr>
+              <a:t>distortion</a:t>
+            </a:r>
+            <a:r>
+              <a:rPr kumimoji="0" lang="it-IT" altLang="it-IT" sz="2000" b="0" i="0" u="none" strike="noStrike" cap="none" normalizeH="0" baseline="0" dirty="0">
+                <a:ln>
+                  <a:noFill/>
+                </a:ln>
+                <a:solidFill>
+                  <a:schemeClr val="tx1"/>
+                </a:solidFill>
+                <a:effectLst/>
+                <a:latin typeface="Arial" panose="020B0604020202020204" pitchFamily="34" charset="0"/>
+              </a:rPr>
+              <a:t>.</a:t>
             </a:r>
           </a:p>
           <a:p>
@@ -3346,7 +4091,7 @@
               <a:tabLst/>
             </a:pPr>
             <a:r>
-              <a:rPr kumimoji="0" lang="it-IT" altLang="it-IT" sz="1800" b="0" i="0" u="none" strike="noStrike" cap="none" normalizeH="0" baseline="0">
+              <a:rPr kumimoji="0" lang="it-IT" altLang="it-IT" sz="2000" b="0" i="0" u="none" strike="noStrike" cap="none" normalizeH="0" baseline="0" dirty="0">
                 <a:ln>
                   <a:noFill/>
                 </a:ln>
@@ -3356,10 +4101,10 @@
                 <a:effectLst/>
                 <a:latin typeface="Arial" panose="020B0604020202020204" pitchFamily="34" charset="0"/>
               </a:rPr>
-              <a:t>Contains over </a:t>
-            </a:r>
-            <a:r>
-              <a:rPr kumimoji="0" lang="it-IT" altLang="it-IT" sz="1800" b="1" i="0" u="none" strike="noStrike" cap="none" normalizeH="0" baseline="0">
+              <a:t> </a:t>
+            </a:r>
+            <a:r>
+              <a:rPr kumimoji="0" lang="it-IT" altLang="it-IT" sz="2000" b="0" i="0" u="none" strike="noStrike" cap="none" normalizeH="0" baseline="0" dirty="0" err="1">
                 <a:ln>
                   <a:noFill/>
                 </a:ln>
@@ -3369,10 +4114,10 @@
                 <a:effectLst/>
                 <a:latin typeface="Arial" panose="020B0604020202020204" pitchFamily="34" charset="0"/>
               </a:rPr>
-              <a:t>250,000</a:t>
-            </a:r>
-            <a:r>
-              <a:rPr kumimoji="0" lang="it-IT" altLang="it-IT" sz="1800" b="0" i="0" u="none" strike="noStrike" cap="none" normalizeH="0" baseline="0">
+              <a:t>Annotations</a:t>
+            </a:r>
+            <a:r>
+              <a:rPr kumimoji="0" lang="it-IT" altLang="it-IT" sz="2000" b="0" i="0" u="none" strike="noStrike" cap="none" normalizeH="0" baseline="0" dirty="0">
                 <a:ln>
                   <a:noFill/>
                 </a:ln>
@@ -3382,28 +4127,10 @@
                 <a:effectLst/>
                 <a:latin typeface="Arial" panose="020B0604020202020204" pitchFamily="34" charset="0"/>
               </a:rPr>
-              <a:t> images of vehicles with annotated license plates.</a:t>
-            </a:r>
-          </a:p>
-          <a:p>
-            <a:pPr marL="0" marR="0" lvl="0" indent="0" algn="l" defTabSz="914400" rtl="0" eaLnBrk="0" fontAlgn="base" latinLnBrk="0" hangingPunct="0">
-              <a:lnSpc>
-                <a:spcPct val="100000"/>
-              </a:lnSpc>
-              <a:spcBef>
-                <a:spcPct val="0"/>
-              </a:spcBef>
-              <a:spcAft>
-                <a:spcPct val="0"/>
-              </a:spcAft>
-              <a:buClrTx/>
-              <a:buSzTx/>
-              <a:buFontTx/>
-              <a:buChar char="•"/>
-              <a:tabLst/>
-            </a:pPr>
-            <a:r>
-              <a:rPr kumimoji="0" lang="it-IT" altLang="it-IT" sz="1800" b="1" i="0" u="none" strike="noStrike" cap="none" normalizeH="0" baseline="0">
+              <a:t> include </a:t>
+            </a:r>
+            <a:r>
+              <a:rPr kumimoji="0" lang="it-IT" altLang="it-IT" sz="2000" b="0" i="0" u="none" strike="noStrike" cap="none" normalizeH="0" baseline="0" dirty="0" err="1">
                 <a:ln>
                   <a:noFill/>
                 </a:ln>
@@ -3413,38 +4140,10 @@
                 <a:effectLst/>
                 <a:latin typeface="Arial" panose="020B0604020202020204" pitchFamily="34" charset="0"/>
               </a:rPr>
-              <a:t>Dataset Characteristics:</a:t>
-            </a:r>
-            <a:endParaRPr kumimoji="0" lang="it-IT" altLang="it-IT" sz="1800" b="0" i="0" u="none" strike="noStrike" cap="none" normalizeH="0" baseline="0">
-              <a:ln>
-                <a:noFill/>
-              </a:ln>
-              <a:solidFill>
-                <a:schemeClr val="tx1"/>
-              </a:solidFill>
-              <a:effectLst/>
-              <a:latin typeface="Arial" panose="020B0604020202020204" pitchFamily="34" charset="0"/>
-            </a:endParaRPr>
-          </a:p>
-          <a:p>
-            <a:pPr marL="0" marR="0" lvl="0" indent="0" algn="l" defTabSz="914400" rtl="0" eaLnBrk="0" fontAlgn="base" latinLnBrk="0" hangingPunct="0">
-              <a:lnSpc>
-                <a:spcPct val="100000"/>
-              </a:lnSpc>
-              <a:spcBef>
-                <a:spcPct val="0"/>
-              </a:spcBef>
-              <a:spcAft>
-                <a:spcPct val="0"/>
-              </a:spcAft>
-              <a:buClrTx/>
-              <a:buSzTx/>
-              <a:buFontTx/>
-              <a:buChar char="•"/>
-              <a:tabLst/>
-            </a:pPr>
-            <a:r>
-              <a:rPr kumimoji="0" lang="it-IT" altLang="it-IT" sz="1800" b="0" i="0" u="none" strike="noStrike" cap="none" normalizeH="0" baseline="0">
+              <a:t>bounding</a:t>
+            </a:r>
+            <a:r>
+              <a:rPr kumimoji="0" lang="it-IT" altLang="it-IT" sz="2000" b="0" i="0" u="none" strike="noStrike" cap="none" normalizeH="0" baseline="0" dirty="0">
                 <a:ln>
                   <a:noFill/>
                 </a:ln>
@@ -3454,28 +4153,10 @@
                 <a:effectLst/>
                 <a:latin typeface="Arial" panose="020B0604020202020204" pitchFamily="34" charset="0"/>
               </a:rPr>
-              <a:t>Diverse conditions: various lighting, weather, and viewpoints.</a:t>
-            </a:r>
-          </a:p>
-          <a:p>
-            <a:pPr marL="0" marR="0" lvl="0" indent="0" algn="l" defTabSz="914400" rtl="0" eaLnBrk="0" fontAlgn="base" latinLnBrk="0" hangingPunct="0">
-              <a:lnSpc>
-                <a:spcPct val="100000"/>
-              </a:lnSpc>
-              <a:spcBef>
-                <a:spcPct val="0"/>
-              </a:spcBef>
-              <a:spcAft>
-                <a:spcPct val="0"/>
-              </a:spcAft>
-              <a:buClrTx/>
-              <a:buSzTx/>
-              <a:buFontTx/>
-              <a:buChar char="•"/>
-              <a:tabLst/>
-            </a:pPr>
-            <a:r>
-              <a:rPr kumimoji="0" lang="it-IT" altLang="it-IT" sz="1800" b="0" i="0" u="none" strike="noStrike" cap="none" normalizeH="0" baseline="0">
+              <a:t> boxes for </a:t>
+            </a:r>
+            <a:r>
+              <a:rPr kumimoji="0" lang="it-IT" altLang="it-IT" sz="2000" b="0" i="0" u="none" strike="noStrike" cap="none" normalizeH="0" baseline="0" dirty="0" err="1">
                 <a:ln>
                   <a:noFill/>
                 </a:ln>
@@ -3485,28 +4166,10 @@
                 <a:effectLst/>
                 <a:latin typeface="Arial" panose="020B0604020202020204" pitchFamily="34" charset="0"/>
               </a:rPr>
-              <a:t>Plates captured in real-world scenarios including occlusion, blur, and distortion.</a:t>
-            </a:r>
-          </a:p>
-          <a:p>
-            <a:pPr marL="0" marR="0" lvl="0" indent="0" algn="l" defTabSz="914400" rtl="0" eaLnBrk="0" fontAlgn="base" latinLnBrk="0" hangingPunct="0">
-              <a:lnSpc>
-                <a:spcPct val="100000"/>
-              </a:lnSpc>
-              <a:spcBef>
-                <a:spcPct val="0"/>
-              </a:spcBef>
-              <a:spcAft>
-                <a:spcPct val="0"/>
-              </a:spcAft>
-              <a:buClrTx/>
-              <a:buSzTx/>
-              <a:buFontTx/>
-              <a:buChar char="•"/>
-              <a:tabLst/>
-            </a:pPr>
-            <a:r>
-              <a:rPr kumimoji="0" lang="it-IT" altLang="it-IT" sz="1800" b="0" i="0" u="none" strike="noStrike" cap="none" normalizeH="0" baseline="0">
+              <a:t>plates</a:t>
+            </a:r>
+            <a:r>
+              <a:rPr kumimoji="0" lang="it-IT" altLang="it-IT" sz="2000" b="0" i="0" u="none" strike="noStrike" cap="none" normalizeH="0" baseline="0" dirty="0">
                 <a:ln>
                   <a:noFill/>
                 </a:ln>
@@ -3516,28 +4179,10 @@
                 <a:effectLst/>
                 <a:latin typeface="Arial" panose="020B0604020202020204" pitchFamily="34" charset="0"/>
               </a:rPr>
-              <a:t>Annotations include bounding boxes for plates and character-level labels.</a:t>
-            </a:r>
-          </a:p>
-          <a:p>
-            <a:pPr marL="0" marR="0" lvl="0" indent="0" algn="l" defTabSz="914400" rtl="0" eaLnBrk="0" fontAlgn="base" latinLnBrk="0" hangingPunct="0">
-              <a:lnSpc>
-                <a:spcPct val="100000"/>
-              </a:lnSpc>
-              <a:spcBef>
-                <a:spcPct val="0"/>
-              </a:spcBef>
-              <a:spcAft>
-                <a:spcPct val="0"/>
-              </a:spcAft>
-              <a:buClrTx/>
-              <a:buSzTx/>
-              <a:buFontTx/>
-              <a:buChar char="•"/>
-              <a:tabLst/>
-            </a:pPr>
-            <a:r>
-              <a:rPr kumimoji="0" lang="it-IT" altLang="it-IT" sz="1800" b="1" i="0" u="none" strike="noStrike" cap="none" normalizeH="0" baseline="0">
+              <a:t> and </a:t>
+            </a:r>
+            <a:r>
+              <a:rPr kumimoji="0" lang="it-IT" altLang="it-IT" sz="2000" b="0" i="0" u="none" strike="noStrike" cap="none" normalizeH="0" baseline="0" dirty="0" err="1">
                 <a:ln>
                   <a:noFill/>
                 </a:ln>
@@ -3547,38 +4192,10 @@
                 <a:effectLst/>
                 <a:latin typeface="Arial" panose="020B0604020202020204" pitchFamily="34" charset="0"/>
               </a:rPr>
-              <a:t>Importance for Research:</a:t>
-            </a:r>
-            <a:endParaRPr kumimoji="0" lang="it-IT" altLang="it-IT" sz="1800" b="0" i="0" u="none" strike="noStrike" cap="none" normalizeH="0" baseline="0">
-              <a:ln>
-                <a:noFill/>
-              </a:ln>
-              <a:solidFill>
-                <a:schemeClr val="tx1"/>
-              </a:solidFill>
-              <a:effectLst/>
-              <a:latin typeface="Arial" panose="020B0604020202020204" pitchFamily="34" charset="0"/>
-            </a:endParaRPr>
-          </a:p>
-          <a:p>
-            <a:pPr marL="0" marR="0" lvl="0" indent="0" algn="l" defTabSz="914400" rtl="0" eaLnBrk="0" fontAlgn="base" latinLnBrk="0" hangingPunct="0">
-              <a:lnSpc>
-                <a:spcPct val="100000"/>
-              </a:lnSpc>
-              <a:spcBef>
-                <a:spcPct val="0"/>
-              </a:spcBef>
-              <a:spcAft>
-                <a:spcPct val="0"/>
-              </a:spcAft>
-              <a:buClrTx/>
-              <a:buSzTx/>
-              <a:buFontTx/>
-              <a:buChar char="•"/>
-              <a:tabLst/>
-            </a:pPr>
-            <a:r>
-              <a:rPr kumimoji="0" lang="it-IT" altLang="it-IT" sz="1800" b="0" i="0" u="none" strike="noStrike" cap="none" normalizeH="0" baseline="0">
+              <a:t>character-level</a:t>
+            </a:r>
+            <a:r>
+              <a:rPr kumimoji="0" lang="it-IT" altLang="it-IT" sz="2000" b="0" i="0" u="none" strike="noStrike" cap="none" normalizeH="0" baseline="0" dirty="0">
                 <a:ln>
                   <a:noFill/>
                 </a:ln>
@@ -3588,69 +4205,7 @@
                 <a:effectLst/>
                 <a:latin typeface="Arial" panose="020B0604020202020204" pitchFamily="34" charset="0"/>
               </a:rPr>
-              <a:t>Enables training of robust deep learning models.</a:t>
-            </a:r>
-          </a:p>
-          <a:p>
-            <a:pPr marL="0" marR="0" lvl="0" indent="0" algn="l" defTabSz="914400" rtl="0" eaLnBrk="0" fontAlgn="base" latinLnBrk="0" hangingPunct="0">
-              <a:lnSpc>
-                <a:spcPct val="100000"/>
-              </a:lnSpc>
-              <a:spcBef>
-                <a:spcPct val="0"/>
-              </a:spcBef>
-              <a:spcAft>
-                <a:spcPct val="0"/>
-              </a:spcAft>
-              <a:buClrTx/>
-              <a:buSzTx/>
-              <a:buFontTx/>
-              <a:buChar char="•"/>
-              <a:tabLst/>
-            </a:pPr>
-            <a:r>
-              <a:rPr kumimoji="0" lang="it-IT" altLang="it-IT" sz="1800" b="0" i="0" u="none" strike="noStrike" cap="none" normalizeH="0" baseline="0">
-                <a:ln>
-                  <a:noFill/>
-                </a:ln>
-                <a:solidFill>
-                  <a:schemeClr val="tx1"/>
-                </a:solidFill>
-                <a:effectLst/>
-                <a:latin typeface="Arial" panose="020B0604020202020204" pitchFamily="34" charset="0"/>
-              </a:rPr>
-              <a:t>Standard benchmark for ALPR tasks in academic and industrial research.</a:t>
-            </a:r>
-          </a:p>
-          <a:p>
-            <a:pPr marL="0" marR="0" lvl="0" indent="0" algn="l" defTabSz="914400" rtl="0" eaLnBrk="0" fontAlgn="base" latinLnBrk="0" hangingPunct="0">
-              <a:lnSpc>
-                <a:spcPct val="100000"/>
-              </a:lnSpc>
-              <a:spcBef>
-                <a:spcPct val="0"/>
-              </a:spcBef>
-              <a:spcAft>
-                <a:spcPct val="0"/>
-              </a:spcAft>
-              <a:buClrTx/>
-              <a:buSzTx/>
-              <a:buFontTx/>
-              <a:buChar char="•"/>
-              <a:tabLst/>
-            </a:pPr>
-            <a:r>
-              <a:rPr kumimoji="0" lang="it-IT" altLang="it-IT" sz="1800" b="0" i="0" u="none" strike="noStrike" cap="none" normalizeH="0" baseline="0">
-                <a:ln>
-                  <a:noFill/>
-                </a:ln>
-                <a:solidFill>
-                  <a:schemeClr val="tx1"/>
-                </a:solidFill>
-                <a:effectLst/>
-                <a:latin typeface="Arial" panose="020B0604020202020204" pitchFamily="34" charset="0"/>
-              </a:rPr>
-              <a:t>Supports evaluation of both plate detection and OCR performance.</a:t>
+              <a:t> labels.</a:t>
             </a:r>
           </a:p>
           <a:p>
@@ -3670,7 +4225,7 @@
               <a:buNone/>
               <a:tabLst/>
             </a:pPr>
-            <a:endParaRPr kumimoji="0" lang="it-IT" altLang="it-IT" sz="1800" b="0" i="0" u="none" strike="noStrike" cap="none" normalizeH="0" baseline="0">
+            <a:endParaRPr kumimoji="0" lang="it-IT" altLang="it-IT" sz="1800" b="0" i="0" u="none" strike="noStrike" cap="none" normalizeH="0" baseline="0" dirty="0">
               <a:ln>
                 <a:noFill/>
               </a:ln>
@@ -3680,6 +4235,751 @@
               <a:effectLst/>
               <a:latin typeface="Arial" panose="020B0604020202020204" pitchFamily="34" charset="0"/>
             </a:endParaRPr>
+          </a:p>
+        </p:txBody>
+      </p:sp>
+      <p:pic>
+        <p:nvPicPr>
+          <p:cNvPr id="5" name="Elemento grafico 4" descr="Cartella con riempimento a tinta unita">
+            <a:extLst>
+              <a:ext uri="{FF2B5EF4-FFF2-40B4-BE49-F238E27FC236}">
+                <a16:creationId xmlns:a16="http://schemas.microsoft.com/office/drawing/2014/main" id="{E8B76D4E-ACAE-87BE-427F-3866459C0147}"/>
+              </a:ext>
+            </a:extLst>
+          </p:cNvPr>
+          <p:cNvPicPr>
+            <a:picLocks noChangeAspect="1"/>
+          </p:cNvPicPr>
+          <p:nvPr/>
+        </p:nvPicPr>
+        <p:blipFill>
+          <a:blip r:embed="rId2">
+            <a:extLst>
+              <a:ext uri="{96DAC541-7B7A-43D3-8B79-37D633B846F1}">
+                <asvg:svgBlip xmlns:asvg="http://schemas.microsoft.com/office/drawing/2016/SVG/main" r:embed="rId3"/>
+              </a:ext>
+            </a:extLst>
+          </a:blip>
+          <a:stretch>
+            <a:fillRect/>
+          </a:stretch>
+        </p:blipFill>
+        <p:spPr>
+          <a:xfrm>
+            <a:off x="1308304" y="4342509"/>
+            <a:ext cx="1919390" cy="1919390"/>
+          </a:xfrm>
+          <a:prstGeom prst="rect">
+            <a:avLst/>
+          </a:prstGeom>
+        </p:spPr>
+      </p:pic>
+      <p:sp>
+        <p:nvSpPr>
+          <p:cNvPr id="12" name="CasellaDiTesto 11">
+            <a:extLst>
+              <a:ext uri="{FF2B5EF4-FFF2-40B4-BE49-F238E27FC236}">
+                <a16:creationId xmlns:a16="http://schemas.microsoft.com/office/drawing/2014/main" id="{9AFF6FBE-52BE-37D9-3EC7-EF32CC22B7C5}"/>
+              </a:ext>
+            </a:extLst>
+          </p:cNvPr>
+          <p:cNvSpPr txBox="1"/>
+          <p:nvPr/>
+        </p:nvSpPr>
+        <p:spPr>
+          <a:xfrm>
+            <a:off x="1897163" y="5173194"/>
+            <a:ext cx="741671" cy="369332"/>
+          </a:xfrm>
+          <a:prstGeom prst="rect">
+            <a:avLst/>
+          </a:prstGeom>
+          <a:noFill/>
+        </p:spPr>
+        <p:txBody>
+          <a:bodyPr wrap="square" rtlCol="0">
+            <a:spAutoFit/>
+          </a:bodyPr>
+          <a:lstStyle/>
+          <a:p>
+            <a:pPr algn="ctr"/>
+            <a:r>
+              <a:rPr lang="it-IT" dirty="0">
+                <a:latin typeface="Cascadia Code Light" panose="020B0609020000020004" pitchFamily="49" charset="0"/>
+                <a:ea typeface="Cascadia Code Light" panose="020B0609020000020004" pitchFamily="49" charset="0"/>
+                <a:cs typeface="Cascadia Code Light" panose="020B0609020000020004" pitchFamily="49" charset="0"/>
+              </a:rPr>
+              <a:t>base</a:t>
+            </a:r>
+          </a:p>
+        </p:txBody>
+      </p:sp>
+      <p:sp>
+        <p:nvSpPr>
+          <p:cNvPr id="13" name="Segno di addizione 12">
+            <a:extLst>
+              <a:ext uri="{FF2B5EF4-FFF2-40B4-BE49-F238E27FC236}">
+                <a16:creationId xmlns:a16="http://schemas.microsoft.com/office/drawing/2014/main" id="{EB73C83C-D983-375C-18E4-3047397FD9FD}"/>
+              </a:ext>
+            </a:extLst>
+          </p:cNvPr>
+          <p:cNvSpPr/>
+          <p:nvPr/>
+        </p:nvSpPr>
+        <p:spPr>
+          <a:xfrm>
+            <a:off x="3406166" y="5120683"/>
+            <a:ext cx="502721" cy="474354"/>
+          </a:xfrm>
+          <a:prstGeom prst="mathPlus">
+            <a:avLst/>
+          </a:prstGeom>
+        </p:spPr>
+        <p:style>
+          <a:lnRef idx="2">
+            <a:schemeClr val="accent1">
+              <a:shade val="15000"/>
+            </a:schemeClr>
+          </a:lnRef>
+          <a:fillRef idx="1">
+            <a:schemeClr val="accent1"/>
+          </a:fillRef>
+          <a:effectRef idx="0">
+            <a:schemeClr val="accent1"/>
+          </a:effectRef>
+          <a:fontRef idx="minor">
+            <a:schemeClr val="lt1"/>
+          </a:fontRef>
+        </p:style>
+        <p:txBody>
+          <a:bodyPr rtlCol="0" anchor="ctr"/>
+          <a:lstStyle/>
+          <a:p>
+            <a:pPr algn="ctr"/>
+            <a:endParaRPr lang="it-IT" dirty="0"/>
+          </a:p>
+        </p:txBody>
+      </p:sp>
+      <p:sp>
+        <p:nvSpPr>
+          <p:cNvPr id="14" name="CasellaDiTesto 13">
+            <a:extLst>
+              <a:ext uri="{FF2B5EF4-FFF2-40B4-BE49-F238E27FC236}">
+                <a16:creationId xmlns:a16="http://schemas.microsoft.com/office/drawing/2014/main" id="{863DE9F8-6761-ACB5-5EC3-4F68A5A72593}"/>
+              </a:ext>
+            </a:extLst>
+          </p:cNvPr>
+          <p:cNvSpPr txBox="1"/>
+          <p:nvPr/>
+        </p:nvSpPr>
+        <p:spPr>
+          <a:xfrm>
+            <a:off x="9980243" y="3873191"/>
+            <a:ext cx="687011" cy="369332"/>
+          </a:xfrm>
+          <a:prstGeom prst="rect">
+            <a:avLst/>
+          </a:prstGeom>
+          <a:noFill/>
+        </p:spPr>
+        <p:txBody>
+          <a:bodyPr wrap="square" rtlCol="0">
+            <a:spAutoFit/>
+          </a:bodyPr>
+          <a:lstStyle/>
+          <a:p>
+            <a:r>
+              <a:rPr lang="it-IT" b="1" dirty="0"/>
+              <a:t>test</a:t>
+            </a:r>
+          </a:p>
+        </p:txBody>
+      </p:sp>
+      <p:pic>
+        <p:nvPicPr>
+          <p:cNvPr id="15" name="Elemento grafico 14" descr="Cartella con riempimento a tinta unita">
+            <a:extLst>
+              <a:ext uri="{FF2B5EF4-FFF2-40B4-BE49-F238E27FC236}">
+                <a16:creationId xmlns:a16="http://schemas.microsoft.com/office/drawing/2014/main" id="{DAAE7041-9CCD-B50E-A215-0AE92C83114D}"/>
+              </a:ext>
+            </a:extLst>
+          </p:cNvPr>
+          <p:cNvPicPr>
+            <a:picLocks noChangeAspect="1"/>
+          </p:cNvPicPr>
+          <p:nvPr/>
+        </p:nvPicPr>
+        <p:blipFill>
+          <a:blip r:embed="rId2">
+            <a:extLst>
+              <a:ext uri="{96DAC541-7B7A-43D3-8B79-37D633B846F1}">
+                <asvg:svgBlip xmlns:asvg="http://schemas.microsoft.com/office/drawing/2016/SVG/main" r:embed="rId3"/>
+              </a:ext>
+            </a:extLst>
+          </a:blip>
+          <a:stretch>
+            <a:fillRect/>
+          </a:stretch>
+        </p:blipFill>
+        <p:spPr>
+          <a:xfrm>
+            <a:off x="4176610" y="3355357"/>
+            <a:ext cx="1919390" cy="1919390"/>
+          </a:xfrm>
+          <a:prstGeom prst="rect">
+            <a:avLst/>
+          </a:prstGeom>
+        </p:spPr>
+      </p:pic>
+      <p:pic>
+        <p:nvPicPr>
+          <p:cNvPr id="16" name="Elemento grafico 15" descr="Cartella con riempimento a tinta unita">
+            <a:extLst>
+              <a:ext uri="{FF2B5EF4-FFF2-40B4-BE49-F238E27FC236}">
+                <a16:creationId xmlns:a16="http://schemas.microsoft.com/office/drawing/2014/main" id="{86322839-06B8-67FD-1C0A-0448303F6218}"/>
+              </a:ext>
+            </a:extLst>
+          </p:cNvPr>
+          <p:cNvPicPr>
+            <a:picLocks noChangeAspect="1"/>
+          </p:cNvPicPr>
+          <p:nvPr/>
+        </p:nvPicPr>
+        <p:blipFill>
+          <a:blip r:embed="rId2">
+            <a:extLst>
+              <a:ext uri="{96DAC541-7B7A-43D3-8B79-37D633B846F1}">
+                <asvg:svgBlip xmlns:asvg="http://schemas.microsoft.com/office/drawing/2016/SVG/main" r:embed="rId3"/>
+              </a:ext>
+            </a:extLst>
+          </a:blip>
+          <a:stretch>
+            <a:fillRect/>
+          </a:stretch>
+        </p:blipFill>
+        <p:spPr>
+          <a:xfrm>
+            <a:off x="5882579" y="3382814"/>
+            <a:ext cx="1919390" cy="1919390"/>
+          </a:xfrm>
+          <a:prstGeom prst="rect">
+            <a:avLst/>
+          </a:prstGeom>
+        </p:spPr>
+      </p:pic>
+      <p:pic>
+        <p:nvPicPr>
+          <p:cNvPr id="17" name="Elemento grafico 16" descr="Cartella con riempimento a tinta unita">
+            <a:extLst>
+              <a:ext uri="{FF2B5EF4-FFF2-40B4-BE49-F238E27FC236}">
+                <a16:creationId xmlns:a16="http://schemas.microsoft.com/office/drawing/2014/main" id="{E605EC3E-9B66-D975-C5B9-DF5D66A5C0BE}"/>
+              </a:ext>
+            </a:extLst>
+          </p:cNvPr>
+          <p:cNvPicPr>
+            <a:picLocks noChangeAspect="1"/>
+          </p:cNvPicPr>
+          <p:nvPr/>
+        </p:nvPicPr>
+        <p:blipFill>
+          <a:blip r:embed="rId2">
+            <a:extLst>
+              <a:ext uri="{96DAC541-7B7A-43D3-8B79-37D633B846F1}">
+                <asvg:svgBlip xmlns:asvg="http://schemas.microsoft.com/office/drawing/2016/SVG/main" r:embed="rId3"/>
+              </a:ext>
+            </a:extLst>
+          </a:blip>
+          <a:stretch>
+            <a:fillRect/>
+          </a:stretch>
+        </p:blipFill>
+        <p:spPr>
+          <a:xfrm>
+            <a:off x="7634906" y="3410271"/>
+            <a:ext cx="1919390" cy="1919390"/>
+          </a:xfrm>
+          <a:prstGeom prst="rect">
+            <a:avLst/>
+          </a:prstGeom>
+        </p:spPr>
+      </p:pic>
+      <p:pic>
+        <p:nvPicPr>
+          <p:cNvPr id="18" name="Elemento grafico 17" descr="Cartella con riempimento a tinta unita">
+            <a:extLst>
+              <a:ext uri="{FF2B5EF4-FFF2-40B4-BE49-F238E27FC236}">
+                <a16:creationId xmlns:a16="http://schemas.microsoft.com/office/drawing/2014/main" id="{ABC07FDB-B9C9-AC9A-275F-EE58E467975C}"/>
+              </a:ext>
+            </a:extLst>
+          </p:cNvPr>
+          <p:cNvPicPr>
+            <a:picLocks noChangeAspect="1"/>
+          </p:cNvPicPr>
+          <p:nvPr/>
+        </p:nvPicPr>
+        <p:blipFill>
+          <a:blip r:embed="rId2">
+            <a:extLst>
+              <a:ext uri="{96DAC541-7B7A-43D3-8B79-37D633B846F1}">
+                <asvg:svgBlip xmlns:asvg="http://schemas.microsoft.com/office/drawing/2016/SVG/main" r:embed="rId3"/>
+              </a:ext>
+            </a:extLst>
+          </a:blip>
+          <a:stretch>
+            <a:fillRect/>
+          </a:stretch>
+        </p:blipFill>
+        <p:spPr>
+          <a:xfrm>
+            <a:off x="4168466" y="4705442"/>
+            <a:ext cx="1919390" cy="1919390"/>
+          </a:xfrm>
+          <a:prstGeom prst="rect">
+            <a:avLst/>
+          </a:prstGeom>
+        </p:spPr>
+      </p:pic>
+      <p:pic>
+        <p:nvPicPr>
+          <p:cNvPr id="19" name="Elemento grafico 18" descr="Cartella con riempimento a tinta unita">
+            <a:extLst>
+              <a:ext uri="{FF2B5EF4-FFF2-40B4-BE49-F238E27FC236}">
+                <a16:creationId xmlns:a16="http://schemas.microsoft.com/office/drawing/2014/main" id="{8ADD6427-CBCC-E991-3793-882D64D355FF}"/>
+              </a:ext>
+            </a:extLst>
+          </p:cNvPr>
+          <p:cNvPicPr>
+            <a:picLocks noChangeAspect="1"/>
+          </p:cNvPicPr>
+          <p:nvPr/>
+        </p:nvPicPr>
+        <p:blipFill>
+          <a:blip r:embed="rId2">
+            <a:extLst>
+              <a:ext uri="{96DAC541-7B7A-43D3-8B79-37D633B846F1}">
+                <asvg:svgBlip xmlns:asvg="http://schemas.microsoft.com/office/drawing/2016/SVG/main" r:embed="rId3"/>
+              </a:ext>
+            </a:extLst>
+          </a:blip>
+          <a:stretch>
+            <a:fillRect/>
+          </a:stretch>
+        </p:blipFill>
+        <p:spPr>
+          <a:xfrm>
+            <a:off x="5905758" y="4705442"/>
+            <a:ext cx="1919390" cy="1919390"/>
+          </a:xfrm>
+          <a:prstGeom prst="rect">
+            <a:avLst/>
+          </a:prstGeom>
+        </p:spPr>
+      </p:pic>
+      <p:pic>
+        <p:nvPicPr>
+          <p:cNvPr id="20" name="Elemento grafico 19" descr="Cartella con riempimento a tinta unita">
+            <a:extLst>
+              <a:ext uri="{FF2B5EF4-FFF2-40B4-BE49-F238E27FC236}">
+                <a16:creationId xmlns:a16="http://schemas.microsoft.com/office/drawing/2014/main" id="{6F8081B1-FA0A-AA0E-5FE9-B552E86F426C}"/>
+              </a:ext>
+            </a:extLst>
+          </p:cNvPr>
+          <p:cNvPicPr>
+            <a:picLocks noChangeAspect="1"/>
+          </p:cNvPicPr>
+          <p:nvPr/>
+        </p:nvPicPr>
+        <p:blipFill>
+          <a:blip r:embed="rId2">
+            <a:extLst>
+              <a:ext uri="{96DAC541-7B7A-43D3-8B79-37D633B846F1}">
+                <asvg:svgBlip xmlns:asvg="http://schemas.microsoft.com/office/drawing/2016/SVG/main" r:embed="rId3"/>
+              </a:ext>
+            </a:extLst>
+          </a:blip>
+          <a:stretch>
+            <a:fillRect/>
+          </a:stretch>
+        </p:blipFill>
+        <p:spPr>
+          <a:xfrm>
+            <a:off x="7643050" y="4705442"/>
+            <a:ext cx="1919390" cy="1919390"/>
+          </a:xfrm>
+          <a:prstGeom prst="rect">
+            <a:avLst/>
+          </a:prstGeom>
+        </p:spPr>
+      </p:pic>
+      <p:sp>
+        <p:nvSpPr>
+          <p:cNvPr id="22" name="CasellaDiTesto 21">
+            <a:extLst>
+              <a:ext uri="{FF2B5EF4-FFF2-40B4-BE49-F238E27FC236}">
+                <a16:creationId xmlns:a16="http://schemas.microsoft.com/office/drawing/2014/main" id="{1DA5112E-DE50-1550-9E49-930841C53FAC}"/>
+              </a:ext>
+            </a:extLst>
+          </p:cNvPr>
+          <p:cNvSpPr txBox="1"/>
+          <p:nvPr/>
+        </p:nvSpPr>
+        <p:spPr>
+          <a:xfrm>
+            <a:off x="4765469" y="4157843"/>
+            <a:ext cx="741671" cy="369332"/>
+          </a:xfrm>
+          <a:prstGeom prst="rect">
+            <a:avLst/>
+          </a:prstGeom>
+          <a:noFill/>
+        </p:spPr>
+        <p:txBody>
+          <a:bodyPr wrap="square" rtlCol="0">
+            <a:spAutoFit/>
+          </a:bodyPr>
+          <a:lstStyle/>
+          <a:p>
+            <a:pPr algn="ctr"/>
+            <a:r>
+              <a:rPr lang="it-IT" dirty="0">
+                <a:latin typeface="Cascadia Code Light" panose="020B0609020000020004" pitchFamily="49" charset="0"/>
+                <a:ea typeface="Cascadia Code Light" panose="020B0609020000020004" pitchFamily="49" charset="0"/>
+                <a:cs typeface="Cascadia Code Light" panose="020B0609020000020004" pitchFamily="49" charset="0"/>
+              </a:rPr>
+              <a:t>tilt</a:t>
+            </a:r>
+          </a:p>
+        </p:txBody>
+      </p:sp>
+      <p:sp>
+        <p:nvSpPr>
+          <p:cNvPr id="23" name="CasellaDiTesto 22">
+            <a:extLst>
+              <a:ext uri="{FF2B5EF4-FFF2-40B4-BE49-F238E27FC236}">
+                <a16:creationId xmlns:a16="http://schemas.microsoft.com/office/drawing/2014/main" id="{7B247F18-63E0-F06B-FD30-F01777DA15CA}"/>
+              </a:ext>
+            </a:extLst>
+          </p:cNvPr>
+          <p:cNvSpPr txBox="1"/>
+          <p:nvPr/>
+        </p:nvSpPr>
+        <p:spPr>
+          <a:xfrm>
+            <a:off x="4775790" y="5513704"/>
+            <a:ext cx="741671" cy="369332"/>
+          </a:xfrm>
+          <a:prstGeom prst="rect">
+            <a:avLst/>
+          </a:prstGeom>
+          <a:noFill/>
+        </p:spPr>
+        <p:txBody>
+          <a:bodyPr wrap="square" rtlCol="0">
+            <a:spAutoFit/>
+          </a:bodyPr>
+          <a:lstStyle/>
+          <a:p>
+            <a:pPr algn="ctr"/>
+            <a:r>
+              <a:rPr lang="it-IT" dirty="0" err="1">
+                <a:latin typeface="Cascadia Code Light" panose="020B0609020000020004" pitchFamily="49" charset="0"/>
+                <a:ea typeface="Cascadia Code Light" panose="020B0609020000020004" pitchFamily="49" charset="0"/>
+                <a:cs typeface="Cascadia Code Light" panose="020B0609020000020004" pitchFamily="49" charset="0"/>
+              </a:rPr>
+              <a:t>blur</a:t>
+            </a:r>
+            <a:endParaRPr lang="it-IT" dirty="0">
+              <a:latin typeface="Cascadia Code Light" panose="020B0609020000020004" pitchFamily="49" charset="0"/>
+              <a:ea typeface="Cascadia Code Light" panose="020B0609020000020004" pitchFamily="49" charset="0"/>
+              <a:cs typeface="Cascadia Code Light" panose="020B0609020000020004" pitchFamily="49" charset="0"/>
+            </a:endParaRPr>
+          </a:p>
+        </p:txBody>
+      </p:sp>
+      <p:sp>
+        <p:nvSpPr>
+          <p:cNvPr id="24" name="CasellaDiTesto 23">
+            <a:extLst>
+              <a:ext uri="{FF2B5EF4-FFF2-40B4-BE49-F238E27FC236}">
+                <a16:creationId xmlns:a16="http://schemas.microsoft.com/office/drawing/2014/main" id="{01B6177B-C4B4-83A8-DFC3-0BDA8EB3D5D4}"/>
+              </a:ext>
+            </a:extLst>
+          </p:cNvPr>
+          <p:cNvSpPr txBox="1"/>
+          <p:nvPr/>
+        </p:nvSpPr>
+        <p:spPr>
+          <a:xfrm>
+            <a:off x="6471438" y="4185300"/>
+            <a:ext cx="741671" cy="369332"/>
+          </a:xfrm>
+          <a:prstGeom prst="rect">
+            <a:avLst/>
+          </a:prstGeom>
+          <a:noFill/>
+        </p:spPr>
+        <p:txBody>
+          <a:bodyPr wrap="square" rtlCol="0">
+            <a:spAutoFit/>
+          </a:bodyPr>
+          <a:lstStyle/>
+          <a:p>
+            <a:pPr algn="ctr"/>
+            <a:r>
+              <a:rPr lang="it-IT" dirty="0" err="1">
+                <a:latin typeface="Cascadia Code Light" panose="020B0609020000020004" pitchFamily="49" charset="0"/>
+                <a:ea typeface="Cascadia Code Light" panose="020B0609020000020004" pitchFamily="49" charset="0"/>
+                <a:cs typeface="Cascadia Code Light" panose="020B0609020000020004" pitchFamily="49" charset="0"/>
+              </a:rPr>
+              <a:t>db</a:t>
+            </a:r>
+            <a:endParaRPr lang="it-IT" dirty="0">
+              <a:latin typeface="Cascadia Code Light" panose="020B0609020000020004" pitchFamily="49" charset="0"/>
+              <a:ea typeface="Cascadia Code Light" panose="020B0609020000020004" pitchFamily="49" charset="0"/>
+              <a:cs typeface="Cascadia Code Light" panose="020B0609020000020004" pitchFamily="49" charset="0"/>
+            </a:endParaRPr>
+          </a:p>
+        </p:txBody>
+      </p:sp>
+      <p:sp>
+        <p:nvSpPr>
+          <p:cNvPr id="25" name="CasellaDiTesto 24">
+            <a:extLst>
+              <a:ext uri="{FF2B5EF4-FFF2-40B4-BE49-F238E27FC236}">
+                <a16:creationId xmlns:a16="http://schemas.microsoft.com/office/drawing/2014/main" id="{5A2031D3-2972-0F16-F5D7-4076870AE78E}"/>
+              </a:ext>
+            </a:extLst>
+          </p:cNvPr>
+          <p:cNvSpPr txBox="1"/>
+          <p:nvPr/>
+        </p:nvSpPr>
+        <p:spPr>
+          <a:xfrm>
+            <a:off x="8088127" y="4178774"/>
+            <a:ext cx="1003287" cy="369332"/>
+          </a:xfrm>
+          <a:prstGeom prst="rect">
+            <a:avLst/>
+          </a:prstGeom>
+          <a:noFill/>
+        </p:spPr>
+        <p:txBody>
+          <a:bodyPr wrap="square" rtlCol="0">
+            <a:spAutoFit/>
+          </a:bodyPr>
+          <a:lstStyle/>
+          <a:p>
+            <a:pPr algn="ctr"/>
+            <a:r>
+              <a:rPr lang="it-IT" dirty="0">
+                <a:latin typeface="Cascadia Code Light" panose="020B0609020000020004" pitchFamily="49" charset="0"/>
+                <a:ea typeface="Cascadia Code Light" panose="020B0609020000020004" pitchFamily="49" charset="0"/>
+                <a:cs typeface="Cascadia Code Light" panose="020B0609020000020004" pitchFamily="49" charset="0"/>
+              </a:rPr>
+              <a:t>rotate</a:t>
+            </a:r>
+          </a:p>
+        </p:txBody>
+      </p:sp>
+      <p:sp>
+        <p:nvSpPr>
+          <p:cNvPr id="26" name="CasellaDiTesto 25">
+            <a:extLst>
+              <a:ext uri="{FF2B5EF4-FFF2-40B4-BE49-F238E27FC236}">
+                <a16:creationId xmlns:a16="http://schemas.microsoft.com/office/drawing/2014/main" id="{F2EC1D17-58EF-58E5-F9A8-C23B2087E0DC}"/>
+              </a:ext>
+            </a:extLst>
+          </p:cNvPr>
+          <p:cNvSpPr txBox="1"/>
+          <p:nvPr/>
+        </p:nvSpPr>
+        <p:spPr>
+          <a:xfrm>
+            <a:off x="6490545" y="5513704"/>
+            <a:ext cx="741671" cy="369332"/>
+          </a:xfrm>
+          <a:prstGeom prst="rect">
+            <a:avLst/>
+          </a:prstGeom>
+          <a:noFill/>
+        </p:spPr>
+        <p:txBody>
+          <a:bodyPr wrap="square" rtlCol="0">
+            <a:spAutoFit/>
+          </a:bodyPr>
+          <a:lstStyle/>
+          <a:p>
+            <a:pPr algn="ctr"/>
+            <a:r>
+              <a:rPr lang="it-IT" dirty="0" err="1">
+                <a:latin typeface="Cascadia Code Light" panose="020B0609020000020004" pitchFamily="49" charset="0"/>
+                <a:ea typeface="Cascadia Code Light" panose="020B0609020000020004" pitchFamily="49" charset="0"/>
+                <a:cs typeface="Cascadia Code Light" panose="020B0609020000020004" pitchFamily="49" charset="0"/>
+              </a:rPr>
+              <a:t>fn</a:t>
+            </a:r>
+            <a:endParaRPr lang="it-IT" dirty="0">
+              <a:latin typeface="Cascadia Code Light" panose="020B0609020000020004" pitchFamily="49" charset="0"/>
+              <a:ea typeface="Cascadia Code Light" panose="020B0609020000020004" pitchFamily="49" charset="0"/>
+              <a:cs typeface="Cascadia Code Light" panose="020B0609020000020004" pitchFamily="49" charset="0"/>
+            </a:endParaRPr>
+          </a:p>
+        </p:txBody>
+      </p:sp>
+      <p:sp>
+        <p:nvSpPr>
+          <p:cNvPr id="27" name="CasellaDiTesto 26">
+            <a:extLst>
+              <a:ext uri="{FF2B5EF4-FFF2-40B4-BE49-F238E27FC236}">
+                <a16:creationId xmlns:a16="http://schemas.microsoft.com/office/drawing/2014/main" id="{7EF1A7B7-E8EC-6454-2878-3AE9ACE6C8D6}"/>
+              </a:ext>
+            </a:extLst>
+          </p:cNvPr>
+          <p:cNvSpPr txBox="1"/>
+          <p:nvPr/>
+        </p:nvSpPr>
+        <p:spPr>
+          <a:xfrm>
+            <a:off x="7870669" y="5513704"/>
+            <a:ext cx="1464151" cy="369332"/>
+          </a:xfrm>
+          <a:prstGeom prst="rect">
+            <a:avLst/>
+          </a:prstGeom>
+          <a:noFill/>
+        </p:spPr>
+        <p:txBody>
+          <a:bodyPr wrap="square" rtlCol="0">
+            <a:spAutoFit/>
+          </a:bodyPr>
+          <a:lstStyle/>
+          <a:p>
+            <a:pPr algn="ctr"/>
+            <a:r>
+              <a:rPr lang="it-IT" dirty="0">
+                <a:latin typeface="Cascadia Code Light" panose="020B0609020000020004" pitchFamily="49" charset="0"/>
+                <a:ea typeface="Cascadia Code Light" panose="020B0609020000020004" pitchFamily="49" charset="0"/>
+                <a:cs typeface="Cascadia Code Light" panose="020B0609020000020004" pitchFamily="49" charset="0"/>
+              </a:rPr>
+              <a:t>challenge</a:t>
+            </a:r>
+          </a:p>
+        </p:txBody>
+      </p:sp>
+      <p:pic>
+        <p:nvPicPr>
+          <p:cNvPr id="28" name="Elemento grafico 27" descr="Cartella con riempimento a tinta unita">
+            <a:extLst>
+              <a:ext uri="{FF2B5EF4-FFF2-40B4-BE49-F238E27FC236}">
+                <a16:creationId xmlns:a16="http://schemas.microsoft.com/office/drawing/2014/main" id="{3F659A41-B8E5-8635-0D6C-08C9BADD06C9}"/>
+              </a:ext>
+            </a:extLst>
+          </p:cNvPr>
+          <p:cNvPicPr>
+            <a:picLocks noChangeAspect="1"/>
+          </p:cNvPicPr>
+          <p:nvPr/>
+        </p:nvPicPr>
+        <p:blipFill>
+          <a:blip r:embed="rId2">
+            <a:extLst>
+              <a:ext uri="{96DAC541-7B7A-43D3-8B79-37D633B846F1}">
+                <asvg:svgBlip xmlns:asvg="http://schemas.microsoft.com/office/drawing/2016/SVG/main" r:embed="rId3"/>
+              </a:ext>
+            </a:extLst>
+          </a:blip>
+          <a:stretch>
+            <a:fillRect/>
+          </a:stretch>
+        </p:blipFill>
+        <p:spPr>
+          <a:xfrm>
+            <a:off x="9364054" y="4057857"/>
+            <a:ext cx="1919390" cy="1919390"/>
+          </a:xfrm>
+          <a:prstGeom prst="rect">
+            <a:avLst/>
+          </a:prstGeom>
+        </p:spPr>
+      </p:pic>
+      <p:sp>
+        <p:nvSpPr>
+          <p:cNvPr id="29" name="CasellaDiTesto 28">
+            <a:extLst>
+              <a:ext uri="{FF2B5EF4-FFF2-40B4-BE49-F238E27FC236}">
+                <a16:creationId xmlns:a16="http://schemas.microsoft.com/office/drawing/2014/main" id="{11DFF085-3DDD-11E7-20C7-82A6BACF6CC5}"/>
+              </a:ext>
+            </a:extLst>
+          </p:cNvPr>
+          <p:cNvSpPr txBox="1"/>
+          <p:nvPr/>
+        </p:nvSpPr>
+        <p:spPr>
+          <a:xfrm>
+            <a:off x="9728373" y="4832886"/>
+            <a:ext cx="1155323" cy="369332"/>
+          </a:xfrm>
+          <a:prstGeom prst="rect">
+            <a:avLst/>
+          </a:prstGeom>
+          <a:noFill/>
+        </p:spPr>
+        <p:txBody>
+          <a:bodyPr wrap="square" rtlCol="0">
+            <a:spAutoFit/>
+          </a:bodyPr>
+          <a:lstStyle/>
+          <a:p>
+            <a:pPr algn="ctr"/>
+            <a:r>
+              <a:rPr lang="it-IT" dirty="0" err="1">
+                <a:latin typeface="Cascadia Code Light" panose="020B0609020000020004" pitchFamily="49" charset="0"/>
+                <a:ea typeface="Cascadia Code Light" panose="020B0609020000020004" pitchFamily="49" charset="0"/>
+                <a:cs typeface="Cascadia Code Light" panose="020B0609020000020004" pitchFamily="49" charset="0"/>
+              </a:rPr>
+              <a:t>weather</a:t>
+            </a:r>
+            <a:endParaRPr lang="it-IT" dirty="0">
+              <a:latin typeface="Cascadia Code Light" panose="020B0609020000020004" pitchFamily="49" charset="0"/>
+              <a:ea typeface="Cascadia Code Light" panose="020B0609020000020004" pitchFamily="49" charset="0"/>
+              <a:cs typeface="Cascadia Code Light" panose="020B0609020000020004" pitchFamily="49" charset="0"/>
+            </a:endParaRPr>
+          </a:p>
+        </p:txBody>
+      </p:sp>
+      <p:sp>
+        <p:nvSpPr>
+          <p:cNvPr id="30" name="CasellaDiTesto 29">
+            <a:extLst>
+              <a:ext uri="{FF2B5EF4-FFF2-40B4-BE49-F238E27FC236}">
+                <a16:creationId xmlns:a16="http://schemas.microsoft.com/office/drawing/2014/main" id="{7C677957-36F8-F945-C260-A7F2444A73EF}"/>
+              </a:ext>
+            </a:extLst>
+          </p:cNvPr>
+          <p:cNvSpPr txBox="1"/>
+          <p:nvPr/>
+        </p:nvSpPr>
+        <p:spPr>
+          <a:xfrm>
+            <a:off x="1927514" y="4157843"/>
+            <a:ext cx="687011" cy="369332"/>
+          </a:xfrm>
+          <a:prstGeom prst="rect">
+            <a:avLst/>
+          </a:prstGeom>
+          <a:noFill/>
+        </p:spPr>
+        <p:txBody>
+          <a:bodyPr wrap="square" rtlCol="0">
+            <a:spAutoFit/>
+          </a:bodyPr>
+          <a:lstStyle/>
+          <a:p>
+            <a:r>
+              <a:rPr lang="it-IT" b="1" dirty="0" err="1"/>
+              <a:t>train</a:t>
+            </a:r>
+            <a:endParaRPr lang="it-IT" b="1" dirty="0"/>
           </a:p>
         </p:txBody>
       </p:sp>
@@ -5730,8 +7030,8 @@
         </p:blipFill>
         <p:spPr>
           <a:xfrm>
-            <a:off x="1325428" y="1941443"/>
-            <a:ext cx="1484115" cy="2391074"/>
+            <a:off x="887891" y="1530625"/>
+            <a:ext cx="2014332" cy="3245312"/>
           </a:xfrm>
           <a:prstGeom prst="rect">
             <a:avLst/>
@@ -5889,8 +7189,8 @@
         </p:nvCxnSpPr>
         <p:spPr>
           <a:xfrm flipV="1">
-            <a:off x="5963477" y="3074503"/>
-            <a:ext cx="834887" cy="1"/>
+            <a:off x="5963477" y="3074502"/>
+            <a:ext cx="1761841" cy="2"/>
           </a:xfrm>
           <a:prstGeom prst="line">
             <a:avLst/>
@@ -5927,7 +7227,7 @@
         </p:nvCxnSpPr>
         <p:spPr>
           <a:xfrm>
-            <a:off x="6798364" y="1530626"/>
+            <a:off x="7725318" y="1272209"/>
             <a:ext cx="19879" cy="3101009"/>
           </a:xfrm>
           <a:prstGeom prst="line">
@@ -5963,7 +7263,7 @@
         </p:nvCxnSpPr>
         <p:spPr>
           <a:xfrm>
-            <a:off x="6785111" y="1517373"/>
+            <a:off x="7712065" y="1258956"/>
             <a:ext cx="1345096" cy="0"/>
           </a:xfrm>
           <a:prstGeom prst="straightConnector1">
@@ -6004,7 +7304,7 @@
         </p:nvCxnSpPr>
         <p:spPr>
           <a:xfrm>
-            <a:off x="6818243" y="4631635"/>
+            <a:off x="7745197" y="4373218"/>
             <a:ext cx="1311964" cy="0"/>
           </a:xfrm>
           <a:prstGeom prst="straightConnector1">
@@ -6043,7 +7343,7 @@
         </p:nvSpPr>
         <p:spPr>
           <a:xfrm>
-            <a:off x="8150086" y="4272480"/>
+            <a:off x="9077040" y="4014063"/>
             <a:ext cx="2365513" cy="954559"/>
           </a:xfrm>
           <a:prstGeom prst="rect">
@@ -6094,7 +7394,7 @@
         </p:nvSpPr>
         <p:spPr>
           <a:xfrm>
-            <a:off x="8143456" y="1040093"/>
+            <a:off x="9070410" y="781676"/>
             <a:ext cx="2365513" cy="954559"/>
           </a:xfrm>
           <a:prstGeom prst="rect">
@@ -6149,7 +7449,7 @@
         </p:nvSpPr>
         <p:spPr>
           <a:xfrm>
-            <a:off x="6765236" y="1161293"/>
+            <a:off x="7692190" y="902876"/>
             <a:ext cx="371061" cy="369332"/>
           </a:xfrm>
           <a:prstGeom prst="rect">
@@ -6184,7 +7484,7 @@
         </p:nvSpPr>
         <p:spPr>
           <a:xfrm>
-            <a:off x="6818243" y="4644887"/>
+            <a:off x="7745197" y="4386470"/>
             <a:ext cx="371061" cy="369332"/>
           </a:xfrm>
           <a:prstGeom prst="rect">
@@ -6233,7 +7533,7 @@
         </p:blipFill>
         <p:spPr>
           <a:xfrm>
-            <a:off x="8435624" y="2948821"/>
+            <a:off x="9362578" y="2690404"/>
             <a:ext cx="1781175" cy="542925"/>
           </a:xfrm>
           <a:prstGeom prst="rect">
@@ -6258,7 +7558,7 @@
         </p:nvCxnSpPr>
         <p:spPr>
           <a:xfrm flipH="1">
-            <a:off x="9326212" y="1994652"/>
+            <a:off x="10253166" y="1736235"/>
             <a:ext cx="1" cy="954169"/>
           </a:xfrm>
           <a:prstGeom prst="straightConnector1">
@@ -6300,7 +7600,7 @@
         </p:nvCxnSpPr>
         <p:spPr>
           <a:xfrm>
-            <a:off x="9326212" y="3491746"/>
+            <a:off x="10253166" y="3233329"/>
             <a:ext cx="6631" cy="780734"/>
           </a:xfrm>
           <a:prstGeom prst="straightConnector1">
@@ -6341,7 +7641,7 @@
         </p:nvCxnSpPr>
         <p:spPr>
           <a:xfrm>
-            <a:off x="9332843" y="5227039"/>
+            <a:off x="10259797" y="4968622"/>
             <a:ext cx="0" cy="729813"/>
           </a:xfrm>
           <a:prstGeom prst="straightConnector1">
@@ -6380,7 +7680,7 @@
         </p:nvSpPr>
         <p:spPr>
           <a:xfrm>
-            <a:off x="8660597" y="5996932"/>
+            <a:off x="9587551" y="5738515"/>
             <a:ext cx="1331228" cy="369332"/>
           </a:xfrm>
           <a:prstGeom prst="rect">
@@ -6476,8 +7776,8 @@
         </p:blipFill>
         <p:spPr>
           <a:xfrm>
-            <a:off x="729305" y="4749759"/>
-            <a:ext cx="5651616" cy="1522612"/>
+            <a:off x="1780020" y="4789188"/>
+            <a:ext cx="6395875" cy="1723124"/>
           </a:xfrm>
           <a:prstGeom prst="rect">
             <a:avLst/>
@@ -6786,6 +8086,95 @@
           <a:chExt cx="0" cy="0"/>
         </a:xfrm>
       </p:grpSpPr>
+      <p:sp>
+        <p:nvSpPr>
+          <p:cNvPr id="65" name="Rettangolo con angoli arrotondati 64">
+            <a:extLst>
+              <a:ext uri="{FF2B5EF4-FFF2-40B4-BE49-F238E27FC236}">
+                <a16:creationId xmlns:a16="http://schemas.microsoft.com/office/drawing/2014/main" id="{E25A634E-2E90-9356-5170-46B7ED822DB1}"/>
+              </a:ext>
+            </a:extLst>
+          </p:cNvPr>
+          <p:cNvSpPr/>
+          <p:nvPr/>
+        </p:nvSpPr>
+        <p:spPr>
+          <a:xfrm>
+            <a:off x="8726251" y="79513"/>
+            <a:ext cx="3070140" cy="6480313"/>
+          </a:xfrm>
+          <a:prstGeom prst="roundRect">
+            <a:avLst/>
+          </a:prstGeom>
+        </p:spPr>
+        <p:style>
+          <a:lnRef idx="2">
+            <a:schemeClr val="accent2"/>
+          </a:lnRef>
+          <a:fillRef idx="1">
+            <a:schemeClr val="lt1"/>
+          </a:fillRef>
+          <a:effectRef idx="0">
+            <a:schemeClr val="accent2"/>
+          </a:effectRef>
+          <a:fontRef idx="minor">
+            <a:schemeClr val="dk1"/>
+          </a:fontRef>
+        </p:style>
+        <p:txBody>
+          <a:bodyPr rtlCol="0" anchor="ctr"/>
+          <a:lstStyle/>
+          <a:p>
+            <a:pPr algn="ctr"/>
+            <a:endParaRPr lang="it-IT"/>
+          </a:p>
+        </p:txBody>
+      </p:sp>
+      <p:cxnSp>
+        <p:nvCxnSpPr>
+          <p:cNvPr id="37" name="Connettore a gomito 36">
+            <a:extLst>
+              <a:ext uri="{FF2B5EF4-FFF2-40B4-BE49-F238E27FC236}">
+                <a16:creationId xmlns:a16="http://schemas.microsoft.com/office/drawing/2014/main" id="{793DFC5B-4108-7123-98E3-D4D15EA5EE3B}"/>
+              </a:ext>
+            </a:extLst>
+          </p:cNvPr>
+          <p:cNvCxnSpPr>
+            <a:cxnSpLocks/>
+            <a:stCxn id="8" idx="3"/>
+            <a:endCxn id="14" idx="1"/>
+          </p:cNvCxnSpPr>
+          <p:nvPr/>
+        </p:nvCxnSpPr>
+        <p:spPr>
+          <a:xfrm flipV="1">
+            <a:off x="6149869" y="974034"/>
+            <a:ext cx="3329577" cy="2905546"/>
+          </a:xfrm>
+          <a:prstGeom prst="bentConnector3">
+            <a:avLst>
+              <a:gd name="adj1" fmla="val 36468"/>
+            </a:avLst>
+          </a:prstGeom>
+          <a:ln>
+            <a:tailEnd type="triangle"/>
+          </a:ln>
+        </p:spPr>
+        <p:style>
+          <a:lnRef idx="1">
+            <a:schemeClr val="accent1"/>
+          </a:lnRef>
+          <a:fillRef idx="0">
+            <a:schemeClr val="accent1"/>
+          </a:fillRef>
+          <a:effectRef idx="0">
+            <a:schemeClr val="accent1"/>
+          </a:effectRef>
+          <a:fontRef idx="minor">
+            <a:schemeClr val="tx1"/>
+          </a:fontRef>
+        </p:style>
+      </p:cxnSp>
       <p:pic>
         <p:nvPicPr>
           <p:cNvPr id="6" name="Immagine 5" descr="Immagine che contiene testo, Targa di veicolo, veicolo, Veicolo terrestre&#10;&#10;Il contenuto generato dall'IA potrebbe non essere corretto.">
@@ -6814,8 +8203,8 @@
         </p:blipFill>
         <p:spPr>
           <a:xfrm>
-            <a:off x="2107308" y="2011485"/>
-            <a:ext cx="1484115" cy="2391074"/>
+            <a:off x="462454" y="1740229"/>
+            <a:ext cx="2418606" cy="3896643"/>
           </a:xfrm>
           <a:prstGeom prst="rect">
             <a:avLst/>
@@ -6838,7 +8227,7 @@
         </p:nvCxnSpPr>
         <p:spPr>
           <a:xfrm>
-            <a:off x="3591423" y="3207022"/>
+            <a:off x="2881060" y="3850886"/>
             <a:ext cx="669151" cy="0"/>
           </a:xfrm>
           <a:prstGeom prst="straightConnector1">
@@ -6877,8 +8266,8 @@
         </p:nvSpPr>
         <p:spPr>
           <a:xfrm>
-            <a:off x="4260574" y="2309188"/>
-            <a:ext cx="2073965" cy="1795669"/>
+            <a:off x="3565125" y="2764739"/>
+            <a:ext cx="2584744" cy="2229681"/>
           </a:xfrm>
           <a:prstGeom prst="rect">
             <a:avLst/>
@@ -6904,15 +8293,15 @@
           <a:p>
             <a:pPr algn="ctr"/>
             <a:r>
-              <a:rPr lang="it-IT" dirty="0"/>
+              <a:rPr lang="it-IT" sz="2400" dirty="0"/>
               <a:t>Object </a:t>
             </a:r>
             <a:r>
-              <a:rPr lang="it-IT" dirty="0" err="1"/>
+              <a:rPr lang="it-IT" sz="2400" dirty="0" err="1"/>
               <a:t>detection</a:t>
             </a:r>
             <a:r>
-              <a:rPr lang="it-IT" dirty="0">
+              <a:rPr lang="it-IT" sz="2400" dirty="0">
                 <a:ln w="0"/>
                 <a:solidFill>
                   <a:schemeClr val="tx1"/>
@@ -6931,7 +8320,7 @@
           <a:p>
             <a:pPr algn="ctr"/>
             <a:r>
-              <a:rPr lang="it-IT" dirty="0">
+              <a:rPr lang="it-IT" sz="2400" dirty="0">
                 <a:ln w="0"/>
                 <a:solidFill>
                   <a:schemeClr val="tx1"/>
@@ -6963,7 +8352,7 @@
         </p:nvSpPr>
         <p:spPr>
           <a:xfrm>
-            <a:off x="8143456" y="1040093"/>
+            <a:off x="9479446" y="496754"/>
             <a:ext cx="1563761" cy="954559"/>
           </a:xfrm>
           <a:prstGeom prst="rect">
@@ -7025,8 +8414,8 @@
         </p:blipFill>
         <p:spPr>
           <a:xfrm>
-            <a:off x="6334539" y="983726"/>
-            <a:ext cx="1463120" cy="445978"/>
+            <a:off x="6273190" y="1803705"/>
+            <a:ext cx="2033335" cy="619787"/>
           </a:xfrm>
           <a:prstGeom prst="rect">
             <a:avLst/>
@@ -7063,7 +8452,7 @@
           <a:p>
             <a:r>
               <a:rPr lang="it-IT" dirty="0"/>
-              <a:t>Yolov5 + PLDPR</a:t>
+              <a:t>Yolov5 + PDLPR</a:t>
             </a:r>
           </a:p>
         </p:txBody>
@@ -7082,7 +8471,7 @@
         </p:nvSpPr>
         <p:spPr>
           <a:xfrm>
-            <a:off x="8143451" y="2760289"/>
+            <a:off x="9479441" y="2216950"/>
             <a:ext cx="1563761" cy="954559"/>
           </a:xfrm>
           <a:prstGeom prst="rect">
@@ -7130,7 +8519,7 @@
         </p:nvSpPr>
         <p:spPr>
           <a:xfrm>
-            <a:off x="8143451" y="4562583"/>
+            <a:off x="9479441" y="4019244"/>
             <a:ext cx="1563761" cy="954559"/>
           </a:xfrm>
           <a:prstGeom prst="rect">
@@ -7168,48 +8557,6 @@
           </a:p>
         </p:txBody>
       </p:sp>
-      <p:cxnSp>
-        <p:nvCxnSpPr>
-          <p:cNvPr id="37" name="Connettore a gomito 36">
-            <a:extLst>
-              <a:ext uri="{FF2B5EF4-FFF2-40B4-BE49-F238E27FC236}">
-                <a16:creationId xmlns:a16="http://schemas.microsoft.com/office/drawing/2014/main" id="{793DFC5B-4108-7123-98E3-D4D15EA5EE3B}"/>
-              </a:ext>
-            </a:extLst>
-          </p:cNvPr>
-          <p:cNvCxnSpPr>
-            <a:stCxn id="8" idx="3"/>
-            <a:endCxn id="14" idx="1"/>
-          </p:cNvCxnSpPr>
-          <p:nvPr/>
-        </p:nvCxnSpPr>
-        <p:spPr>
-          <a:xfrm flipV="1">
-            <a:off x="6334539" y="1517373"/>
-            <a:ext cx="1808917" cy="1689650"/>
-          </a:xfrm>
-          <a:prstGeom prst="bentConnector3">
-            <a:avLst/>
-          </a:prstGeom>
-          <a:ln>
-            <a:tailEnd type="triangle"/>
-          </a:ln>
-        </p:spPr>
-        <p:style>
-          <a:lnRef idx="1">
-            <a:schemeClr val="accent1"/>
-          </a:lnRef>
-          <a:fillRef idx="0">
-            <a:schemeClr val="accent1"/>
-          </a:fillRef>
-          <a:effectRef idx="0">
-            <a:schemeClr val="accent1"/>
-          </a:effectRef>
-          <a:fontRef idx="minor">
-            <a:schemeClr val="tx1"/>
-          </a:fontRef>
-        </p:style>
-      </p:cxnSp>
       <p:sp>
         <p:nvSpPr>
           <p:cNvPr id="38" name="CasellaDiTesto 37">
@@ -7224,7 +8571,7 @@
         </p:nvSpPr>
         <p:spPr>
           <a:xfrm>
-            <a:off x="10075266" y="5824653"/>
+            <a:off x="9595707" y="5636872"/>
             <a:ext cx="1331228" cy="369332"/>
           </a:xfrm>
           <a:prstGeom prst="rect">
@@ -7263,18 +8610,20 @@
             </a:extLst>
           </p:cNvPr>
           <p:cNvCxnSpPr>
+            <a:cxnSpLocks/>
             <a:stCxn id="34" idx="2"/>
-            <a:endCxn id="38" idx="1"/>
           </p:cNvCxnSpPr>
           <p:nvPr/>
         </p:nvCxnSpPr>
         <p:spPr>
           <a:xfrm rot="16200000" flipH="1">
-            <a:off x="9254211" y="5188263"/>
-            <a:ext cx="492177" cy="1149934"/>
+            <a:off x="9971892" y="5263232"/>
+            <a:ext cx="578861" cy="1"/>
           </a:xfrm>
-          <a:prstGeom prst="bentConnector2">
-            <a:avLst/>
+          <a:prstGeom prst="bentConnector3">
+            <a:avLst>
+              <a:gd name="adj1" fmla="val 50000"/>
+            </a:avLst>
           </a:prstGeom>
           <a:ln>
             <a:tailEnd type="triangle"/>
@@ -7312,7 +8661,7 @@
         </p:nvCxnSpPr>
         <p:spPr>
           <a:xfrm flipH="1">
-            <a:off x="8925332" y="1994652"/>
+            <a:off x="10261322" y="1451313"/>
             <a:ext cx="5" cy="765637"/>
           </a:xfrm>
           <a:prstGeom prst="straightConnector1">
@@ -7354,7 +8703,7 @@
         </p:nvCxnSpPr>
         <p:spPr>
           <a:xfrm>
-            <a:off x="8925332" y="3714848"/>
+            <a:off x="10261322" y="3171509"/>
             <a:ext cx="0" cy="847735"/>
           </a:xfrm>
           <a:prstGeom prst="straightConnector1">
@@ -7393,7 +8742,7 @@
         </p:nvSpPr>
         <p:spPr>
           <a:xfrm>
-            <a:off x="9104159" y="2177532"/>
+            <a:off x="10440149" y="1634193"/>
             <a:ext cx="1289397" cy="369332"/>
           </a:xfrm>
           <a:prstGeom prst="rect">
@@ -7428,7 +8777,7 @@
         </p:nvSpPr>
         <p:spPr>
           <a:xfrm>
-            <a:off x="6421400" y="614394"/>
+            <a:off x="6683665" y="2423492"/>
             <a:ext cx="1289397" cy="369332"/>
           </a:xfrm>
           <a:prstGeom prst="rect">
@@ -7463,7 +8812,7 @@
         </p:nvSpPr>
         <p:spPr>
           <a:xfrm>
-            <a:off x="9104159" y="3979825"/>
+            <a:off x="10440149" y="3436486"/>
             <a:ext cx="1289397" cy="369332"/>
           </a:xfrm>
           <a:prstGeom prst="rect">
@@ -7480,6 +8829,45 @@
             <a:r>
               <a:rPr lang="it-IT" dirty="0"/>
               <a:t>512 x 6 x 18</a:t>
+            </a:r>
+          </a:p>
+        </p:txBody>
+      </p:sp>
+      <p:sp>
+        <p:nvSpPr>
+          <p:cNvPr id="66" name="CasellaDiTesto 65">
+            <a:extLst>
+              <a:ext uri="{FF2B5EF4-FFF2-40B4-BE49-F238E27FC236}">
+                <a16:creationId xmlns:a16="http://schemas.microsoft.com/office/drawing/2014/main" id="{7A3B7F14-F6D3-34D1-05B1-80263E8F540D}"/>
+              </a:ext>
+            </a:extLst>
+          </p:cNvPr>
+          <p:cNvSpPr txBox="1"/>
+          <p:nvPr/>
+        </p:nvSpPr>
+        <p:spPr>
+          <a:xfrm>
+            <a:off x="7713543" y="5775371"/>
+            <a:ext cx="1192696" cy="461665"/>
+          </a:xfrm>
+          <a:prstGeom prst="rect">
+            <a:avLst/>
+          </a:prstGeom>
+          <a:noFill/>
+        </p:spPr>
+        <p:txBody>
+          <a:bodyPr wrap="square" rtlCol="0">
+            <a:spAutoFit/>
+          </a:bodyPr>
+          <a:lstStyle/>
+          <a:p>
+            <a:r>
+              <a:rPr lang="it-IT" sz="2400" dirty="0">
+                <a:solidFill>
+                  <a:srgbClr val="ED7D31"/>
+                </a:solidFill>
+              </a:rPr>
+              <a:t>PDLPR</a:t>
             </a:r>
           </a:p>
         </p:txBody>
